--- a/docs/MTECH AAI COHORT-1_Human_ID_HAR_Dissertation_Project– Presentation_Phase_2__Eval_3_V1.0.pptx
+++ b/docs/MTECH AAI COHORT-1_Human_ID_HAR_Dissertation_Project– Presentation_Phase_2__Eval_3_V1.0.pptx
@@ -32,6 +32,10 @@
     <p:sldId id="299" r:id="rId26"/>
     <p:sldId id="300" r:id="rId27"/>
     <p:sldId id="286" r:id="rId28"/>
+    <p:sldId id="301" r:id="rId29"/>
+    <p:sldId id="302" r:id="rId30"/>
+    <p:sldId id="303" r:id="rId31"/>
+    <p:sldId id="304" r:id="rId32"/>
   </p:sldIdLst>
   <p:sldSz cx="9144000" cy="6858000" type="screen4x3"/>
   <p:notesSz cx="6858000" cy="9144000"/>
@@ -328,7 +332,7 @@
           <a:p>
             <a:fld id="{5BCAD085-E8A6-8845-BD4E-CB4CCA059FC4}" type="datetimeFigureOut">
               <a:rPr lang="en-US" smtClean="0"/>
-              <a:t>10/20/2025</a:t>
+              <a:t>10/21/2025</a:t>
             </a:fld>
             <a:endParaRPr lang="en-US"/>
           </a:p>
@@ -496,7 +500,7 @@
           <a:p>
             <a:fld id="{5BCAD085-E8A6-8845-BD4E-CB4CCA059FC4}" type="datetimeFigureOut">
               <a:rPr lang="en-US" smtClean="0"/>
-              <a:t>10/20/2025</a:t>
+              <a:t>10/21/2025</a:t>
             </a:fld>
             <a:endParaRPr lang="en-US"/>
           </a:p>
@@ -674,7 +678,7 @@
           <a:p>
             <a:fld id="{5BCAD085-E8A6-8845-BD4E-CB4CCA059FC4}" type="datetimeFigureOut">
               <a:rPr lang="en-US" smtClean="0"/>
-              <a:t>10/20/2025</a:t>
+              <a:t>10/21/2025</a:t>
             </a:fld>
             <a:endParaRPr lang="en-US"/>
           </a:p>
@@ -842,7 +846,7 @@
           <a:p>
             <a:fld id="{5BCAD085-E8A6-8845-BD4E-CB4CCA059FC4}" type="datetimeFigureOut">
               <a:rPr lang="en-US" smtClean="0"/>
-              <a:t>10/20/2025</a:t>
+              <a:t>10/21/2025</a:t>
             </a:fld>
             <a:endParaRPr lang="en-US"/>
           </a:p>
@@ -1087,7 +1091,7 @@
           <a:p>
             <a:fld id="{5BCAD085-E8A6-8845-BD4E-CB4CCA059FC4}" type="datetimeFigureOut">
               <a:rPr lang="en-US" smtClean="0"/>
-              <a:t>10/20/2025</a:t>
+              <a:t>10/21/2025</a:t>
             </a:fld>
             <a:endParaRPr lang="en-US"/>
           </a:p>
@@ -1372,7 +1376,7 @@
           <a:p>
             <a:fld id="{5BCAD085-E8A6-8845-BD4E-CB4CCA059FC4}" type="datetimeFigureOut">
               <a:rPr lang="en-US" smtClean="0"/>
-              <a:t>10/20/2025</a:t>
+              <a:t>10/21/2025</a:t>
             </a:fld>
             <a:endParaRPr lang="en-US"/>
           </a:p>
@@ -1791,7 +1795,7 @@
           <a:p>
             <a:fld id="{5BCAD085-E8A6-8845-BD4E-CB4CCA059FC4}" type="datetimeFigureOut">
               <a:rPr lang="en-US" smtClean="0"/>
-              <a:t>10/20/2025</a:t>
+              <a:t>10/21/2025</a:t>
             </a:fld>
             <a:endParaRPr lang="en-US"/>
           </a:p>
@@ -1908,7 +1912,7 @@
           <a:p>
             <a:fld id="{5BCAD085-E8A6-8845-BD4E-CB4CCA059FC4}" type="datetimeFigureOut">
               <a:rPr lang="en-US" smtClean="0"/>
-              <a:t>10/20/2025</a:t>
+              <a:t>10/21/2025</a:t>
             </a:fld>
             <a:endParaRPr lang="en-US"/>
           </a:p>
@@ -2003,7 +2007,7 @@
           <a:p>
             <a:fld id="{5BCAD085-E8A6-8845-BD4E-CB4CCA059FC4}" type="datetimeFigureOut">
               <a:rPr lang="en-US" smtClean="0"/>
-              <a:t>10/20/2025</a:t>
+              <a:t>10/21/2025</a:t>
             </a:fld>
             <a:endParaRPr lang="en-US"/>
           </a:p>
@@ -2278,7 +2282,7 @@
           <a:p>
             <a:fld id="{5BCAD085-E8A6-8845-BD4E-CB4CCA059FC4}" type="datetimeFigureOut">
               <a:rPr lang="en-US" smtClean="0"/>
-              <a:t>10/20/2025</a:t>
+              <a:t>10/21/2025</a:t>
             </a:fld>
             <a:endParaRPr lang="en-US"/>
           </a:p>
@@ -2530,7 +2534,7 @@
           <a:p>
             <a:fld id="{5BCAD085-E8A6-8845-BD4E-CB4CCA059FC4}" type="datetimeFigureOut">
               <a:rPr lang="en-US" smtClean="0"/>
-              <a:t>10/20/2025</a:t>
+              <a:t>10/21/2025</a:t>
             </a:fld>
             <a:endParaRPr lang="en-US"/>
           </a:p>
@@ -2741,7 +2745,7 @@
           <a:p>
             <a:fld id="{5BCAD085-E8A6-8845-BD4E-CB4CCA059FC4}" type="datetimeFigureOut">
               <a:rPr lang="en-US" smtClean="0"/>
-              <a:t>10/20/2025</a:t>
+              <a:t>10/21/2025</a:t>
             </a:fld>
             <a:endParaRPr lang="en-US"/>
           </a:p>
@@ -5867,8 +5871,8 @@
           </a:p>
         </p:txBody>
       </p:sp>
-      <mc:AlternateContent xmlns:mc="http://schemas.openxmlformats.org/markup-compatibility/2006">
-        <mc:Choice xmlns:a14="http://schemas.microsoft.com/office/drawing/2010/main" Requires="a14">
+      <mc:AlternateContent xmlns:mc="http://schemas.openxmlformats.org/markup-compatibility/2006" xmlns:a14="http://schemas.microsoft.com/office/drawing/2010/main">
+        <mc:Choice Requires="a14">
           <p:sp>
             <p:nvSpPr>
               <p:cNvPr id="3" name="Content Placeholder 2">
@@ -6751,7 +6755,7 @@
             </p:txBody>
           </p:sp>
         </mc:Choice>
-        <mc:Fallback>
+        <mc:Fallback xmlns="">
           <p:sp>
             <p:nvSpPr>
               <p:cNvPr id="3" name="Content Placeholder 2">
@@ -9088,6 +9092,1594 @@
 </p:sld>
 </file>
 
+<file path=ppt/slides/slide28.xml><?xml version="1.0" encoding="utf-8"?>
+<p:sld xmlns:a="http://schemas.openxmlformats.org/drawingml/2006/main" xmlns:r="http://schemas.openxmlformats.org/officeDocument/2006/relationships" xmlns:p="http://schemas.openxmlformats.org/presentationml/2006/main">
+  <p:cSld>
+    <p:spTree>
+      <p:nvGrpSpPr>
+        <p:cNvPr id="1" name="">
+          <a:extLst>
+            <a:ext uri="{FF2B5EF4-FFF2-40B4-BE49-F238E27FC236}">
+              <a16:creationId xmlns:a16="http://schemas.microsoft.com/office/drawing/2014/main" id="{8FE6520F-F32C-02C4-344D-F84998F17409}"/>
+            </a:ext>
+          </a:extLst>
+        </p:cNvPr>
+        <p:cNvGrpSpPr/>
+        <p:nvPr/>
+      </p:nvGrpSpPr>
+      <p:grpSpPr>
+        <a:xfrm>
+          <a:off x="0" y="0"/>
+          <a:ext cx="0" cy="0"/>
+          <a:chOff x="0" y="0"/>
+          <a:chExt cx="0" cy="0"/>
+        </a:xfrm>
+      </p:grpSpPr>
+      <p:sp>
+        <p:nvSpPr>
+          <p:cNvPr id="40962" name="Title 1">
+            <a:extLst>
+              <a:ext uri="{FF2B5EF4-FFF2-40B4-BE49-F238E27FC236}">
+                <a16:creationId xmlns:a16="http://schemas.microsoft.com/office/drawing/2014/main" id="{7BDE2BCA-CCD6-D3EC-EEE9-281367674081}"/>
+              </a:ext>
+            </a:extLst>
+          </p:cNvPr>
+          <p:cNvSpPr txBox="1">
+            <a:spLocks noGrp="1" noChangeArrowheads="1"/>
+          </p:cNvSpPr>
+          <p:nvPr>
+            <p:ph type="ctrTitle"/>
+          </p:nvPr>
+        </p:nvSpPr>
+        <p:spPr>
+          <a:xfrm>
+            <a:off x="928328" y="1872983"/>
+            <a:ext cx="7360823" cy="1792301"/>
+          </a:xfrm>
+          <a:gradFill rotWithShape="0">
+            <a:gsLst>
+              <a:gs pos="0">
+                <a:srgbClr val="F5FBFE"/>
+              </a:gs>
+              <a:gs pos="74001">
+                <a:srgbClr val="A2DAF6"/>
+              </a:gs>
+              <a:gs pos="83000">
+                <a:srgbClr val="A2DAF6"/>
+              </a:gs>
+              <a:gs pos="100000">
+                <a:srgbClr val="C1E6F9"/>
+              </a:gs>
+            </a:gsLst>
+            <a:lin ang="5400000"/>
+          </a:gradFill>
+        </p:spPr>
+        <p:txBody>
+          <a:bodyPr/>
+          <a:lstStyle/>
+          <a:p>
+            <a:pPr algn="ctr" eaLnBrk="1" hangingPunct="1"/>
+            <a:r>
+              <a:rPr lang="en-US" altLang="en-US" sz="3993" dirty="0">
+                <a:latin typeface="Corbel" panose="020B0503020204020204" pitchFamily="34" charset="0"/>
+                <a:ea typeface="Corbel" panose="020B0503020204020204" pitchFamily="34" charset="0"/>
+                <a:cs typeface="Corbel" panose="020B0503020204020204" pitchFamily="34" charset="0"/>
+              </a:rPr>
+              <a:t>MTECH AAI COHORT-1 Dissertation Project – Phase II</a:t>
+            </a:r>
+          </a:p>
+        </p:txBody>
+      </p:sp>
+      <p:sp>
+        <p:nvSpPr>
+          <p:cNvPr id="40963" name="Subtitle 2">
+            <a:extLst>
+              <a:ext uri="{FF2B5EF4-FFF2-40B4-BE49-F238E27FC236}">
+                <a16:creationId xmlns:a16="http://schemas.microsoft.com/office/drawing/2014/main" id="{00127FC9-49B6-D823-F0A4-A13696283D7A}"/>
+              </a:ext>
+            </a:extLst>
+          </p:cNvPr>
+          <p:cNvSpPr txBox="1">
+            <a:spLocks noGrp="1" noChangeArrowheads="1"/>
+          </p:cNvSpPr>
+          <p:nvPr>
+            <p:ph type="subTitle" sz="quarter" idx="1"/>
+          </p:nvPr>
+        </p:nvSpPr>
+        <p:spPr>
+          <a:xfrm>
+            <a:off x="928328" y="4572000"/>
+            <a:ext cx="7360823" cy="1432290"/>
+          </a:xfrm>
+          <a:gradFill rotWithShape="0">
+            <a:gsLst>
+              <a:gs pos="0">
+                <a:srgbClr val="F5FBFE"/>
+              </a:gs>
+              <a:gs pos="74001">
+                <a:srgbClr val="A2DAF6"/>
+              </a:gs>
+              <a:gs pos="83000">
+                <a:srgbClr val="A2DAF6"/>
+              </a:gs>
+              <a:gs pos="100000">
+                <a:srgbClr val="C1E6F9"/>
+              </a:gs>
+            </a:gsLst>
+            <a:lin ang="5400000"/>
+          </a:gradFill>
+        </p:spPr>
+        <p:txBody>
+          <a:bodyPr>
+            <a:normAutofit/>
+          </a:bodyPr>
+          <a:lstStyle/>
+          <a:p>
+            <a:pPr algn="ctr" eaLnBrk="1" hangingPunct="1"/>
+            <a:r>
+              <a:rPr lang="en-US" altLang="en-US" sz="1800" b="1" dirty="0">
+                <a:solidFill>
+                  <a:srgbClr val="898989"/>
+                </a:solidFill>
+                <a:latin typeface="Calibri" panose="020F0502020204030204" pitchFamily="34" charset="0"/>
+                <a:cs typeface="Calibri" panose="020F0502020204030204" pitchFamily="34" charset="0"/>
+                <a:sym typeface="Calibri" panose="020F0502020204030204" pitchFamily="34" charset="0"/>
+              </a:rPr>
+              <a:t>Presented by:</a:t>
+            </a:r>
+            <a:r>
+              <a:rPr lang="en-US" altLang="en-US" sz="1800" dirty="0">
+                <a:solidFill>
+                  <a:srgbClr val="898989"/>
+                </a:solidFill>
+                <a:latin typeface="Calibri" panose="020F0502020204030204" pitchFamily="34" charset="0"/>
+                <a:cs typeface="Calibri" panose="020F0502020204030204" pitchFamily="34" charset="0"/>
+                <a:sym typeface="Calibri" panose="020F0502020204030204" pitchFamily="34" charset="0"/>
+              </a:rPr>
+              <a:t> Sanjeev Kumar Pandey	</a:t>
+            </a:r>
+          </a:p>
+          <a:p>
+            <a:pPr algn="ctr" eaLnBrk="1" hangingPunct="1"/>
+            <a:r>
+              <a:rPr lang="en-US" altLang="en-US" sz="1800" b="1" dirty="0">
+                <a:solidFill>
+                  <a:srgbClr val="898989"/>
+                </a:solidFill>
+                <a:latin typeface="Calibri" panose="020F0502020204030204" pitchFamily="34" charset="0"/>
+                <a:cs typeface="Calibri" panose="020F0502020204030204" pitchFamily="34" charset="0"/>
+                <a:sym typeface="Calibri" panose="020F0502020204030204" pitchFamily="34" charset="0"/>
+              </a:rPr>
+              <a:t>Enrolment No:</a:t>
+            </a:r>
+            <a:r>
+              <a:rPr lang="en-US" altLang="en-US" sz="1800" dirty="0">
+                <a:solidFill>
+                  <a:srgbClr val="898989"/>
+                </a:solidFill>
+                <a:latin typeface="Calibri" panose="020F0502020204030204" pitchFamily="34" charset="0"/>
+                <a:cs typeface="Calibri" panose="020F0502020204030204" pitchFamily="34" charset="0"/>
+                <a:sym typeface="Calibri" panose="020F0502020204030204" pitchFamily="34" charset="0"/>
+              </a:rPr>
+              <a:t> MT23AAI001</a:t>
+            </a:r>
+          </a:p>
+          <a:p>
+            <a:pPr algn="ctr" eaLnBrk="1" hangingPunct="1"/>
+            <a:r>
+              <a:rPr lang="en-US" altLang="en-US" sz="1800" b="1" dirty="0">
+                <a:solidFill>
+                  <a:srgbClr val="898989"/>
+                </a:solidFill>
+                <a:latin typeface="Calibri" panose="020F0502020204030204" pitchFamily="34" charset="0"/>
+                <a:cs typeface="Calibri" panose="020F0502020204030204" pitchFamily="34" charset="0"/>
+                <a:sym typeface="Calibri" panose="020F0502020204030204" pitchFamily="34" charset="0"/>
+              </a:rPr>
+              <a:t>Project Guide:</a:t>
+            </a:r>
+            <a:r>
+              <a:rPr lang="en-US" altLang="en-US" sz="1800" dirty="0">
+                <a:solidFill>
+                  <a:srgbClr val="898989"/>
+                </a:solidFill>
+                <a:latin typeface="Calibri" panose="020F0502020204030204" pitchFamily="34" charset="0"/>
+                <a:cs typeface="Calibri" panose="020F0502020204030204" pitchFamily="34" charset="0"/>
+                <a:sym typeface="Calibri" panose="020F0502020204030204" pitchFamily="34" charset="0"/>
+              </a:rPr>
+              <a:t> Dr. Amit Agrawal</a:t>
+            </a:r>
+          </a:p>
+          <a:p>
+            <a:pPr algn="ctr" eaLnBrk="1" hangingPunct="1"/>
+            <a:r>
+              <a:rPr lang="en-US" altLang="en-US" sz="1800" dirty="0">
+                <a:solidFill>
+                  <a:srgbClr val="898989"/>
+                </a:solidFill>
+                <a:latin typeface="Calibri" panose="020F0502020204030204" pitchFamily="34" charset="0"/>
+                <a:cs typeface="Calibri" panose="020F0502020204030204" pitchFamily="34" charset="0"/>
+                <a:sym typeface="Calibri" panose="020F0502020204030204" pitchFamily="34" charset="0"/>
+              </a:rPr>
+              <a:t>Date: 11-Oct-2025</a:t>
+            </a:r>
+          </a:p>
+          <a:p>
+            <a:pPr algn="ctr" eaLnBrk="1" hangingPunct="1"/>
+            <a:endParaRPr lang="en-US" altLang="en-US" dirty="0">
+              <a:solidFill>
+                <a:srgbClr val="898989"/>
+              </a:solidFill>
+              <a:latin typeface="Calibri" panose="020F0502020204030204" pitchFamily="34" charset="0"/>
+              <a:cs typeface="Calibri" panose="020F0502020204030204" pitchFamily="34" charset="0"/>
+              <a:sym typeface="Calibri" panose="020F0502020204030204" pitchFamily="34" charset="0"/>
+            </a:endParaRPr>
+          </a:p>
+        </p:txBody>
+      </p:sp>
+      <p:pic>
+        <p:nvPicPr>
+          <p:cNvPr id="40964" name="Picture 4" descr="Picture 4">
+            <a:extLst>
+              <a:ext uri="{FF2B5EF4-FFF2-40B4-BE49-F238E27FC236}">
+                <a16:creationId xmlns:a16="http://schemas.microsoft.com/office/drawing/2014/main" id="{B7A5B41B-69D1-C8B6-0A02-629DC91C0C1F}"/>
+              </a:ext>
+            </a:extLst>
+          </p:cNvPr>
+          <p:cNvPicPr>
+            <a:picLocks noChangeAspect="1" noChangeArrowheads="1"/>
+          </p:cNvPicPr>
+          <p:nvPr/>
+        </p:nvPicPr>
+        <p:blipFill>
+          <a:blip r:embed="rId2">
+            <a:extLst>
+              <a:ext uri="{28A0092B-C50C-407E-A947-70E740481C1C}">
+                <a14:useLocalDpi xmlns:a14="http://schemas.microsoft.com/office/drawing/2010/main" val="0"/>
+              </a:ext>
+            </a:extLst>
+          </a:blip>
+          <a:srcRect/>
+          <a:stretch>
+            <a:fillRect/>
+          </a:stretch>
+        </p:blipFill>
+        <p:spPr bwMode="auto">
+          <a:xfrm>
+            <a:off x="3903489" y="497061"/>
+            <a:ext cx="1179980" cy="1279392"/>
+          </a:xfrm>
+          <a:prstGeom prst="rect">
+            <a:avLst/>
+          </a:prstGeom>
+          <a:noFill/>
+          <a:ln>
+            <a:noFill/>
+          </a:ln>
+          <a:extLst>
+            <a:ext uri="{909E8E84-426E-40DD-AFC4-6F175D3DCCD1}">
+              <a14:hiddenFill xmlns:a14="http://schemas.microsoft.com/office/drawing/2010/main">
+                <a:solidFill>
+                  <a:srgbClr val="FFFFFF"/>
+                </a:solidFill>
+              </a14:hiddenFill>
+            </a:ext>
+            <a:ext uri="{91240B29-F687-4F45-9708-019B960494DF}">
+              <a14:hiddenLine xmlns:a14="http://schemas.microsoft.com/office/drawing/2010/main" w="12700">
+                <a:solidFill>
+                  <a:srgbClr val="000000"/>
+                </a:solidFill>
+                <a:miter lim="400000"/>
+                <a:headEnd/>
+                <a:tailEnd/>
+              </a14:hiddenLine>
+            </a:ext>
+          </a:extLst>
+        </p:spPr>
+      </p:pic>
+      <p:sp>
+        <p:nvSpPr>
+          <p:cNvPr id="40965" name="Subtitle 2">
+            <a:extLst>
+              <a:ext uri="{FF2B5EF4-FFF2-40B4-BE49-F238E27FC236}">
+                <a16:creationId xmlns:a16="http://schemas.microsoft.com/office/drawing/2014/main" id="{549C39CB-C0D0-AB70-990A-B87476CDB82D}"/>
+              </a:ext>
+            </a:extLst>
+          </p:cNvPr>
+          <p:cNvSpPr txBox="1">
+            <a:spLocks noChangeArrowheads="1"/>
+          </p:cNvSpPr>
+          <p:nvPr/>
+        </p:nvSpPr>
+        <p:spPr bwMode="auto">
+          <a:xfrm>
+            <a:off x="892309" y="3806478"/>
+            <a:ext cx="7359383" cy="462483"/>
+          </a:xfrm>
+          <a:prstGeom prst="rect">
+            <a:avLst/>
+          </a:prstGeom>
+          <a:gradFill rotWithShape="0">
+            <a:gsLst>
+              <a:gs pos="0">
+                <a:srgbClr val="F5FBFE"/>
+              </a:gs>
+              <a:gs pos="74001">
+                <a:srgbClr val="A2DAF6"/>
+              </a:gs>
+              <a:gs pos="83000">
+                <a:srgbClr val="A2DAF6"/>
+              </a:gs>
+              <a:gs pos="100000">
+                <a:srgbClr val="C1E6F9"/>
+              </a:gs>
+            </a:gsLst>
+            <a:lin ang="5400000"/>
+          </a:gradFill>
+          <a:ln>
+            <a:noFill/>
+          </a:ln>
+          <a:extLst>
+            <a:ext uri="{91240B29-F687-4F45-9708-019B960494DF}">
+              <a14:hiddenLine xmlns:a14="http://schemas.microsoft.com/office/drawing/2010/main" w="12700">
+                <a:solidFill>
+                  <a:srgbClr val="000000"/>
+                </a:solidFill>
+                <a:miter lim="400000"/>
+                <a:headEnd/>
+                <a:tailEnd/>
+              </a14:hiddenLine>
+            </a:ext>
+          </a:extLst>
+        </p:spPr>
+        <p:txBody>
+          <a:bodyPr lIns="41493" rIns="41493"/>
+          <a:lstStyle>
+            <a:lvl1pPr defTabSz="503238">
+              <a:spcBef>
+                <a:spcPts val="600"/>
+              </a:spcBef>
+              <a:buClr>
+                <a:srgbClr val="1287C3"/>
+              </a:buClr>
+              <a:buSzPct val="145000"/>
+              <a:buFont typeface="Arial" panose="020B0604020202020204" pitchFamily="34" charset="0"/>
+              <a:buChar char="•"/>
+              <a:defRPr sz="2600">
+                <a:solidFill>
+                  <a:srgbClr val="000000"/>
+                </a:solidFill>
+                <a:latin typeface="Corbel" panose="020B0503020204020204" pitchFamily="34" charset="0"/>
+                <a:ea typeface="Corbel" panose="020B0503020204020204" pitchFamily="34" charset="0"/>
+                <a:cs typeface="Corbel" panose="020B0503020204020204" pitchFamily="34" charset="0"/>
+                <a:sym typeface="Corbel" panose="020B0503020204020204" pitchFamily="34" charset="0"/>
+              </a:defRPr>
+            </a:lvl1pPr>
+            <a:lvl2pPr marL="874713" indent="-371475" defTabSz="503238">
+              <a:spcBef>
+                <a:spcPts val="600"/>
+              </a:spcBef>
+              <a:buClr>
+                <a:srgbClr val="1287C3"/>
+              </a:buClr>
+              <a:buSzPct val="145000"/>
+              <a:buFont typeface="Arial" panose="020B0604020202020204" pitchFamily="34" charset="0"/>
+              <a:buChar char="•"/>
+              <a:defRPr sz="2600">
+                <a:solidFill>
+                  <a:srgbClr val="000000"/>
+                </a:solidFill>
+                <a:latin typeface="Corbel" panose="020B0503020204020204" pitchFamily="34" charset="0"/>
+                <a:ea typeface="Corbel" panose="020B0503020204020204" pitchFamily="34" charset="0"/>
+                <a:cs typeface="Corbel" panose="020B0503020204020204" pitchFamily="34" charset="0"/>
+                <a:sym typeface="Corbel" panose="020B0503020204020204" pitchFamily="34" charset="0"/>
+              </a:defRPr>
+            </a:lvl2pPr>
+            <a:lvl3pPr marL="1438275" indent="-430213" defTabSz="503238">
+              <a:spcBef>
+                <a:spcPts val="600"/>
+              </a:spcBef>
+              <a:buClr>
+                <a:srgbClr val="1287C3"/>
+              </a:buClr>
+              <a:buSzPct val="145000"/>
+              <a:buFont typeface="Arial" panose="020B0604020202020204" pitchFamily="34" charset="0"/>
+              <a:buChar char="•"/>
+              <a:defRPr sz="2600">
+                <a:solidFill>
+                  <a:srgbClr val="000000"/>
+                </a:solidFill>
+                <a:latin typeface="Corbel" panose="020B0503020204020204" pitchFamily="34" charset="0"/>
+                <a:ea typeface="Corbel" panose="020B0503020204020204" pitchFamily="34" charset="0"/>
+                <a:cs typeface="Corbel" panose="020B0503020204020204" pitchFamily="34" charset="0"/>
+                <a:sym typeface="Corbel" panose="020B0503020204020204" pitchFamily="34" charset="0"/>
+              </a:defRPr>
+            </a:lvl3pPr>
+            <a:lvl4pPr marL="1800225" indent="-288925" defTabSz="503238">
+              <a:spcBef>
+                <a:spcPts val="600"/>
+              </a:spcBef>
+              <a:buClr>
+                <a:srgbClr val="1287C3"/>
+              </a:buClr>
+              <a:buSzPct val="145000"/>
+              <a:buFont typeface="Arial" panose="020B0604020202020204" pitchFamily="34" charset="0"/>
+              <a:buChar char="•"/>
+              <a:defRPr sz="2600">
+                <a:solidFill>
+                  <a:srgbClr val="000000"/>
+                </a:solidFill>
+                <a:latin typeface="Corbel" panose="020B0503020204020204" pitchFamily="34" charset="0"/>
+                <a:ea typeface="Corbel" panose="020B0503020204020204" pitchFamily="34" charset="0"/>
+                <a:cs typeface="Corbel" panose="020B0503020204020204" pitchFamily="34" charset="0"/>
+                <a:sym typeface="Corbel" panose="020B0503020204020204" pitchFamily="34" charset="0"/>
+              </a:defRPr>
+            </a:lvl4pPr>
+            <a:lvl5pPr marL="2343150" indent="-327025" defTabSz="503238">
+              <a:spcBef>
+                <a:spcPts val="600"/>
+              </a:spcBef>
+              <a:buClr>
+                <a:srgbClr val="1287C3"/>
+              </a:buClr>
+              <a:buSzPct val="145000"/>
+              <a:buFont typeface="Arial" panose="020B0604020202020204" pitchFamily="34" charset="0"/>
+              <a:buChar char="•"/>
+              <a:defRPr sz="2600">
+                <a:solidFill>
+                  <a:srgbClr val="000000"/>
+                </a:solidFill>
+                <a:latin typeface="Corbel" panose="020B0503020204020204" pitchFamily="34" charset="0"/>
+                <a:ea typeface="Corbel" panose="020B0503020204020204" pitchFamily="34" charset="0"/>
+                <a:cs typeface="Corbel" panose="020B0503020204020204" pitchFamily="34" charset="0"/>
+                <a:sym typeface="Corbel" panose="020B0503020204020204" pitchFamily="34" charset="0"/>
+              </a:defRPr>
+            </a:lvl5pPr>
+            <a:lvl6pPr marL="2800350" indent="-327025" defTabSz="503238" eaLnBrk="0" fontAlgn="base" hangingPunct="0">
+              <a:spcBef>
+                <a:spcPts val="600"/>
+              </a:spcBef>
+              <a:spcAft>
+                <a:spcPct val="0"/>
+              </a:spcAft>
+              <a:buClr>
+                <a:srgbClr val="1287C3"/>
+              </a:buClr>
+              <a:buSzPct val="145000"/>
+              <a:buFont typeface="Arial" panose="020B0604020202020204" pitchFamily="34" charset="0"/>
+              <a:buChar char="•"/>
+              <a:defRPr sz="2600">
+                <a:solidFill>
+                  <a:srgbClr val="000000"/>
+                </a:solidFill>
+                <a:latin typeface="Corbel" panose="020B0503020204020204" pitchFamily="34" charset="0"/>
+                <a:ea typeface="Corbel" panose="020B0503020204020204" pitchFamily="34" charset="0"/>
+                <a:cs typeface="Corbel" panose="020B0503020204020204" pitchFamily="34" charset="0"/>
+                <a:sym typeface="Corbel" panose="020B0503020204020204" pitchFamily="34" charset="0"/>
+              </a:defRPr>
+            </a:lvl6pPr>
+            <a:lvl7pPr marL="3257550" indent="-327025" defTabSz="503238" eaLnBrk="0" fontAlgn="base" hangingPunct="0">
+              <a:spcBef>
+                <a:spcPts val="600"/>
+              </a:spcBef>
+              <a:spcAft>
+                <a:spcPct val="0"/>
+              </a:spcAft>
+              <a:buClr>
+                <a:srgbClr val="1287C3"/>
+              </a:buClr>
+              <a:buSzPct val="145000"/>
+              <a:buFont typeface="Arial" panose="020B0604020202020204" pitchFamily="34" charset="0"/>
+              <a:buChar char="•"/>
+              <a:defRPr sz="2600">
+                <a:solidFill>
+                  <a:srgbClr val="000000"/>
+                </a:solidFill>
+                <a:latin typeface="Corbel" panose="020B0503020204020204" pitchFamily="34" charset="0"/>
+                <a:ea typeface="Corbel" panose="020B0503020204020204" pitchFamily="34" charset="0"/>
+                <a:cs typeface="Corbel" panose="020B0503020204020204" pitchFamily="34" charset="0"/>
+                <a:sym typeface="Corbel" panose="020B0503020204020204" pitchFamily="34" charset="0"/>
+              </a:defRPr>
+            </a:lvl7pPr>
+            <a:lvl8pPr marL="3714750" indent="-327025" defTabSz="503238" eaLnBrk="0" fontAlgn="base" hangingPunct="0">
+              <a:spcBef>
+                <a:spcPts val="600"/>
+              </a:spcBef>
+              <a:spcAft>
+                <a:spcPct val="0"/>
+              </a:spcAft>
+              <a:buClr>
+                <a:srgbClr val="1287C3"/>
+              </a:buClr>
+              <a:buSzPct val="145000"/>
+              <a:buFont typeface="Arial" panose="020B0604020202020204" pitchFamily="34" charset="0"/>
+              <a:buChar char="•"/>
+              <a:defRPr sz="2600">
+                <a:solidFill>
+                  <a:srgbClr val="000000"/>
+                </a:solidFill>
+                <a:latin typeface="Corbel" panose="020B0503020204020204" pitchFamily="34" charset="0"/>
+                <a:ea typeface="Corbel" panose="020B0503020204020204" pitchFamily="34" charset="0"/>
+                <a:cs typeface="Corbel" panose="020B0503020204020204" pitchFamily="34" charset="0"/>
+                <a:sym typeface="Corbel" panose="020B0503020204020204" pitchFamily="34" charset="0"/>
+              </a:defRPr>
+            </a:lvl8pPr>
+            <a:lvl9pPr marL="4171950" indent="-327025" defTabSz="503238" eaLnBrk="0" fontAlgn="base" hangingPunct="0">
+              <a:spcBef>
+                <a:spcPts val="600"/>
+              </a:spcBef>
+              <a:spcAft>
+                <a:spcPct val="0"/>
+              </a:spcAft>
+              <a:buClr>
+                <a:srgbClr val="1287C3"/>
+              </a:buClr>
+              <a:buSzPct val="145000"/>
+              <a:buFont typeface="Arial" panose="020B0604020202020204" pitchFamily="34" charset="0"/>
+              <a:buChar char="•"/>
+              <a:defRPr sz="2600">
+                <a:solidFill>
+                  <a:srgbClr val="000000"/>
+                </a:solidFill>
+                <a:latin typeface="Corbel" panose="020B0503020204020204" pitchFamily="34" charset="0"/>
+                <a:ea typeface="Corbel" panose="020B0503020204020204" pitchFamily="34" charset="0"/>
+                <a:cs typeface="Corbel" panose="020B0503020204020204" pitchFamily="34" charset="0"/>
+                <a:sym typeface="Corbel" panose="020B0503020204020204" pitchFamily="34" charset="0"/>
+              </a:defRPr>
+            </a:lvl9pPr>
+          </a:lstStyle>
+          <a:p>
+            <a:pPr algn="ctr" eaLnBrk="1">
+              <a:buClrTx/>
+              <a:buSzTx/>
+              <a:buFontTx/>
+              <a:buNone/>
+            </a:pPr>
+            <a:r>
+              <a:rPr lang="en-US" altLang="en-US" sz="1724" b="1" dirty="0">
+                <a:solidFill>
+                  <a:srgbClr val="898989"/>
+                </a:solidFill>
+                <a:latin typeface="Calibri" panose="020F0502020204030204" pitchFamily="34" charset="0"/>
+                <a:cs typeface="Calibri" panose="020F0502020204030204" pitchFamily="34" charset="0"/>
+                <a:sym typeface="Calibri" panose="020F0502020204030204" pitchFamily="34" charset="0"/>
+              </a:rPr>
+              <a:t>Evaluation-II</a:t>
+            </a:r>
+          </a:p>
+        </p:txBody>
+      </p:sp>
+    </p:spTree>
+    <p:extLst>
+      <p:ext uri="{BB962C8B-B14F-4D97-AF65-F5344CB8AC3E}">
+        <p14:creationId xmlns:p14="http://schemas.microsoft.com/office/powerpoint/2010/main" val="213463520"/>
+      </p:ext>
+    </p:extLst>
+  </p:cSld>
+  <p:clrMapOvr>
+    <a:masterClrMapping/>
+  </p:clrMapOvr>
+</p:sld>
+</file>
+
+<file path=ppt/slides/slide29.xml><?xml version="1.0" encoding="utf-8"?>
+<p:sld xmlns:a="http://schemas.openxmlformats.org/drawingml/2006/main" xmlns:r="http://schemas.openxmlformats.org/officeDocument/2006/relationships" xmlns:p="http://schemas.openxmlformats.org/presentationml/2006/main">
+  <p:cSld>
+    <p:spTree>
+      <p:nvGrpSpPr>
+        <p:cNvPr id="1" name="">
+          <a:extLst>
+            <a:ext uri="{FF2B5EF4-FFF2-40B4-BE49-F238E27FC236}">
+              <a16:creationId xmlns:a16="http://schemas.microsoft.com/office/drawing/2014/main" id="{0584AA36-9245-97FB-7D20-8CD715E1070E}"/>
+            </a:ext>
+          </a:extLst>
+        </p:cNvPr>
+        <p:cNvGrpSpPr/>
+        <p:nvPr/>
+      </p:nvGrpSpPr>
+      <p:grpSpPr>
+        <a:xfrm>
+          <a:off x="0" y="0"/>
+          <a:ext cx="0" cy="0"/>
+          <a:chOff x="0" y="0"/>
+          <a:chExt cx="0" cy="0"/>
+        </a:xfrm>
+      </p:grpSpPr>
+      <p:sp>
+        <p:nvSpPr>
+          <p:cNvPr id="2" name="Title 1">
+            <a:extLst>
+              <a:ext uri="{FF2B5EF4-FFF2-40B4-BE49-F238E27FC236}">
+                <a16:creationId xmlns:a16="http://schemas.microsoft.com/office/drawing/2014/main" id="{5CAC02B1-B698-331B-6A9D-48846F45D4D9}"/>
+              </a:ext>
+            </a:extLst>
+          </p:cNvPr>
+          <p:cNvSpPr>
+            <a:spLocks noGrp="1"/>
+          </p:cNvSpPr>
+          <p:nvPr>
+            <p:ph type="title"/>
+          </p:nvPr>
+        </p:nvSpPr>
+        <p:spPr/>
+        <p:txBody>
+          <a:bodyPr>
+            <a:noAutofit/>
+          </a:bodyPr>
+          <a:lstStyle/>
+          <a:p>
+            <a:r>
+              <a:rPr lang="en-GB" sz="3600" dirty="0"/>
+              <a:t>Experimental Hyperparameter Configuration and Grid Sampling Strategy</a:t>
+            </a:r>
+          </a:p>
+        </p:txBody>
+      </p:sp>
+      <p:graphicFrame>
+        <p:nvGraphicFramePr>
+          <p:cNvPr id="4" name="Content Placeholder 3">
+            <a:extLst>
+              <a:ext uri="{FF2B5EF4-FFF2-40B4-BE49-F238E27FC236}">
+                <a16:creationId xmlns:a16="http://schemas.microsoft.com/office/drawing/2014/main" id="{36778D02-367C-854E-2AA8-82065BE2791D}"/>
+              </a:ext>
+            </a:extLst>
+          </p:cNvPr>
+          <p:cNvGraphicFramePr>
+            <a:graphicFrameLocks noGrp="1"/>
+          </p:cNvGraphicFramePr>
+          <p:nvPr>
+            <p:ph idx="1"/>
+            <p:extLst>
+              <p:ext uri="{D42A27DB-BD31-4B8C-83A1-F6EECF244321}">
+                <p14:modId xmlns:p14="http://schemas.microsoft.com/office/powerpoint/2010/main" val="2370028040"/>
+              </p:ext>
+            </p:extLst>
+          </p:nvPr>
+        </p:nvGraphicFramePr>
+        <p:xfrm>
+          <a:off x="606902" y="1497456"/>
+          <a:ext cx="7727894" cy="2184400"/>
+        </p:xfrm>
+        <a:graphic>
+          <a:graphicData uri="http://schemas.openxmlformats.org/drawingml/2006/table">
+            <a:tbl>
+              <a:tblPr firstRow="1" bandRow="1">
+                <a:tableStyleId>{5C22544A-7EE6-4342-B048-85BDC9FD1C3A}</a:tableStyleId>
+              </a:tblPr>
+              <a:tblGrid>
+                <a:gridCol w="1883645">
+                  <a:extLst>
+                    <a:ext uri="{9D8B030D-6E8A-4147-A177-3AD203B41FA5}">
+                      <a16:colId xmlns:a16="http://schemas.microsoft.com/office/drawing/2014/main" val="4008570941"/>
+                    </a:ext>
+                  </a:extLst>
+                </a:gridCol>
+                <a:gridCol w="1875120">
+                  <a:extLst>
+                    <a:ext uri="{9D8B030D-6E8A-4147-A177-3AD203B41FA5}">
+                      <a16:colId xmlns:a16="http://schemas.microsoft.com/office/drawing/2014/main" val="323992706"/>
+                    </a:ext>
+                  </a:extLst>
+                </a:gridCol>
+                <a:gridCol w="1381257">
+                  <a:extLst>
+                    <a:ext uri="{9D8B030D-6E8A-4147-A177-3AD203B41FA5}">
+                      <a16:colId xmlns:a16="http://schemas.microsoft.com/office/drawing/2014/main" val="3738054000"/>
+                    </a:ext>
+                  </a:extLst>
+                </a:gridCol>
+                <a:gridCol w="1524146">
+                  <a:extLst>
+                    <a:ext uri="{9D8B030D-6E8A-4147-A177-3AD203B41FA5}">
+                      <a16:colId xmlns:a16="http://schemas.microsoft.com/office/drawing/2014/main" val="2578734096"/>
+                    </a:ext>
+                  </a:extLst>
+                </a:gridCol>
+                <a:gridCol w="1063726">
+                  <a:extLst>
+                    <a:ext uri="{9D8B030D-6E8A-4147-A177-3AD203B41FA5}">
+                      <a16:colId xmlns:a16="http://schemas.microsoft.com/office/drawing/2014/main" val="2069725364"/>
+                    </a:ext>
+                  </a:extLst>
+                </a:gridCol>
+              </a:tblGrid>
+              <a:tr h="370840">
+                <a:tc>
+                  <a:txBody>
+                    <a:bodyPr/>
+                    <a:lstStyle/>
+                    <a:p>
+                      <a:pPr algn="l" fontAlgn="t" latinLnBrk="0">
+                        <a:buNone/>
+                      </a:pPr>
+                      <a:r>
+                        <a:rPr lang="en-GB" b="0" dirty="0">
+                          <a:effectLst/>
+                        </a:rPr>
+                        <a:t>Model Name</a:t>
+                      </a:r>
+                    </a:p>
+                  </a:txBody>
+                  <a:tcPr marL="76200" marR="76200" marT="76200" marB="76200"/>
+                </a:tc>
+                <a:tc>
+                  <a:txBody>
+                    <a:bodyPr/>
+                    <a:lstStyle/>
+                    <a:p>
+                      <a:pPr algn="l" fontAlgn="t" latinLnBrk="0">
+                        <a:buNone/>
+                      </a:pPr>
+                      <a:r>
+                        <a:rPr lang="en-GB" b="0">
+                          <a:effectLst/>
+                        </a:rPr>
+                        <a:t>CSI Input Size / Channels</a:t>
+                      </a:r>
+                    </a:p>
+                  </a:txBody>
+                  <a:tcPr marL="76200" marR="76200" marT="76200" marB="76200"/>
+                </a:tc>
+                <a:tc>
+                  <a:txBody>
+                    <a:bodyPr/>
+                    <a:lstStyle/>
+                    <a:p>
+                      <a:pPr algn="l" fontAlgn="t" latinLnBrk="0">
+                        <a:buNone/>
+                      </a:pPr>
+                      <a:r>
+                        <a:rPr lang="en-GB" b="0">
+                          <a:effectLst/>
+                        </a:rPr>
+                        <a:t>Meta Features</a:t>
+                      </a:r>
+                    </a:p>
+                  </a:txBody>
+                  <a:tcPr marL="76200" marR="76200" marT="76200" marB="76200"/>
+                </a:tc>
+                <a:tc>
+                  <a:txBody>
+                    <a:bodyPr/>
+                    <a:lstStyle/>
+                    <a:p>
+                      <a:pPr algn="l" fontAlgn="t" latinLnBrk="0">
+                        <a:buNone/>
+                      </a:pPr>
+                      <a:r>
+                        <a:rPr lang="en-GB" b="0">
+                          <a:effectLst/>
+                        </a:rPr>
+                        <a:t>Sequence / Window Size</a:t>
+                      </a:r>
+                    </a:p>
+                  </a:txBody>
+                  <a:tcPr marL="76200" marR="76200" marT="76200" marB="76200"/>
+                </a:tc>
+                <a:tc>
+                  <a:txBody>
+                    <a:bodyPr/>
+                    <a:lstStyle/>
+                    <a:p>
+                      <a:pPr algn="l" fontAlgn="t" latinLnBrk="0">
+                        <a:buNone/>
+                      </a:pPr>
+                      <a:r>
+                        <a:rPr lang="en-GB" b="0">
+                          <a:effectLst/>
+                        </a:rPr>
+                        <a:t>Output Classes</a:t>
+                      </a:r>
+                    </a:p>
+                  </a:txBody>
+                  <a:tcPr marL="76200" marR="76200" marT="76200" marB="76200"/>
+                </a:tc>
+                <a:extLst>
+                  <a:ext uri="{0D108BD9-81ED-4DB2-BD59-A6C34878D82A}">
+                    <a16:rowId xmlns:a16="http://schemas.microsoft.com/office/drawing/2014/main" val="3271397179"/>
+                  </a:ext>
+                </a:extLst>
+              </a:tr>
+              <a:tr h="370840">
+                <a:tc>
+                  <a:txBody>
+                    <a:bodyPr/>
+                    <a:lstStyle/>
+                    <a:p>
+                      <a:pPr fontAlgn="base" latinLnBrk="0">
+                        <a:buNone/>
+                      </a:pPr>
+                      <a:r>
+                        <a:rPr lang="en-GB" sz="1200" b="1" dirty="0" err="1">
+                          <a:effectLst/>
+                          <a:latin typeface="+mn-lt"/>
+                        </a:rPr>
+                        <a:t>CSILSTMNet</a:t>
+                      </a:r>
+                      <a:endParaRPr lang="en-GB" sz="1200" b="1" dirty="0">
+                        <a:effectLst/>
+                        <a:latin typeface="+mn-lt"/>
+                      </a:endParaRPr>
+                    </a:p>
+                  </a:txBody>
+                  <a:tcPr marL="76200" marR="76200" anchor="ctr"/>
+                </a:tc>
+                <a:tc>
+                  <a:txBody>
+                    <a:bodyPr/>
+                    <a:lstStyle/>
+                    <a:p>
+                      <a:pPr fontAlgn="base" latinLnBrk="0">
+                        <a:buNone/>
+                      </a:pPr>
+                      <a:r>
+                        <a:rPr lang="en-GB" sz="1200">
+                          <a:effectLst/>
+                          <a:latin typeface="+mn-lt"/>
+                        </a:rPr>
+                        <a:t>99</a:t>
+                      </a:r>
+                    </a:p>
+                  </a:txBody>
+                  <a:tcPr marL="76200" marR="76200" anchor="ctr"/>
+                </a:tc>
+                <a:tc>
+                  <a:txBody>
+                    <a:bodyPr/>
+                    <a:lstStyle/>
+                    <a:p>
+                      <a:pPr fontAlgn="base" latinLnBrk="0">
+                        <a:buNone/>
+                      </a:pPr>
+                      <a:r>
+                        <a:rPr lang="en-GB" sz="1200">
+                          <a:effectLst/>
+                          <a:latin typeface="+mn-lt"/>
+                        </a:rPr>
+                        <a:t>12</a:t>
+                      </a:r>
+                    </a:p>
+                  </a:txBody>
+                  <a:tcPr marL="76200" marR="76200" anchor="ctr"/>
+                </a:tc>
+                <a:tc>
+                  <a:txBody>
+                    <a:bodyPr/>
+                    <a:lstStyle/>
+                    <a:p>
+                      <a:pPr fontAlgn="base" latinLnBrk="0">
+                        <a:buNone/>
+                      </a:pPr>
+                      <a:r>
+                        <a:rPr lang="en-GB" sz="1200">
+                          <a:effectLst/>
+                          <a:latin typeface="+mn-lt"/>
+                        </a:rPr>
+                        <a:t>128</a:t>
+                      </a:r>
+                    </a:p>
+                  </a:txBody>
+                  <a:tcPr marL="76200" marR="76200" anchor="ctr"/>
+                </a:tc>
+                <a:tc>
+                  <a:txBody>
+                    <a:bodyPr/>
+                    <a:lstStyle/>
+                    <a:p>
+                      <a:pPr fontAlgn="base" latinLnBrk="0">
+                        <a:buNone/>
+                      </a:pPr>
+                      <a:r>
+                        <a:rPr lang="en-GB" sz="1200">
+                          <a:effectLst/>
+                          <a:latin typeface="+mn-lt"/>
+                        </a:rPr>
+                        <a:t>31</a:t>
+                      </a:r>
+                    </a:p>
+                  </a:txBody>
+                  <a:tcPr marL="76200" marR="76200" anchor="ctr"/>
+                </a:tc>
+                <a:extLst>
+                  <a:ext uri="{0D108BD9-81ED-4DB2-BD59-A6C34878D82A}">
+                    <a16:rowId xmlns:a16="http://schemas.microsoft.com/office/drawing/2014/main" val="1267054606"/>
+                  </a:ext>
+                </a:extLst>
+              </a:tr>
+              <a:tr h="370840">
+                <a:tc>
+                  <a:txBody>
+                    <a:bodyPr/>
+                    <a:lstStyle/>
+                    <a:p>
+                      <a:pPr fontAlgn="base" latinLnBrk="0">
+                        <a:buNone/>
+                      </a:pPr>
+                      <a:r>
+                        <a:rPr lang="en-GB" sz="1200" b="1">
+                          <a:effectLst/>
+                          <a:latin typeface="+mn-lt"/>
+                        </a:rPr>
+                        <a:t>DenseNet1D</a:t>
+                      </a:r>
+                    </a:p>
+                  </a:txBody>
+                  <a:tcPr marL="76200" marR="76200" anchor="ctr"/>
+                </a:tc>
+                <a:tc>
+                  <a:txBody>
+                    <a:bodyPr/>
+                    <a:lstStyle/>
+                    <a:p>
+                      <a:pPr fontAlgn="base" latinLnBrk="0">
+                        <a:buNone/>
+                      </a:pPr>
+                      <a:r>
+                        <a:rPr lang="en-GB" sz="1200">
+                          <a:effectLst/>
+                          <a:latin typeface="+mn-lt"/>
+                        </a:rPr>
+                        <a:t>99</a:t>
+                      </a:r>
+                    </a:p>
+                  </a:txBody>
+                  <a:tcPr marL="76200" marR="76200" anchor="ctr"/>
+                </a:tc>
+                <a:tc>
+                  <a:txBody>
+                    <a:bodyPr/>
+                    <a:lstStyle/>
+                    <a:p>
+                      <a:pPr fontAlgn="base" latinLnBrk="0">
+                        <a:buNone/>
+                      </a:pPr>
+                      <a:r>
+                        <a:rPr lang="en-GB" sz="1200">
+                          <a:effectLst/>
+                          <a:latin typeface="+mn-lt"/>
+                        </a:rPr>
+                        <a:t>12</a:t>
+                      </a:r>
+                    </a:p>
+                  </a:txBody>
+                  <a:tcPr marL="76200" marR="76200" anchor="ctr"/>
+                </a:tc>
+                <a:tc>
+                  <a:txBody>
+                    <a:bodyPr/>
+                    <a:lstStyle/>
+                    <a:p>
+                      <a:pPr fontAlgn="base" latinLnBrk="0">
+                        <a:buNone/>
+                      </a:pPr>
+                      <a:r>
+                        <a:rPr lang="en-GB" sz="1200">
+                          <a:effectLst/>
+                          <a:latin typeface="+mn-lt"/>
+                        </a:rPr>
+                        <a:t>—</a:t>
+                      </a:r>
+                    </a:p>
+                  </a:txBody>
+                  <a:tcPr marL="76200" marR="76200" anchor="ctr"/>
+                </a:tc>
+                <a:tc>
+                  <a:txBody>
+                    <a:bodyPr/>
+                    <a:lstStyle/>
+                    <a:p>
+                      <a:pPr fontAlgn="base" latinLnBrk="0">
+                        <a:buNone/>
+                      </a:pPr>
+                      <a:r>
+                        <a:rPr lang="en-GB" sz="1200">
+                          <a:effectLst/>
+                          <a:latin typeface="+mn-lt"/>
+                        </a:rPr>
+                        <a:t>31</a:t>
+                      </a:r>
+                    </a:p>
+                  </a:txBody>
+                  <a:tcPr marL="76200" marR="76200" anchor="ctr"/>
+                </a:tc>
+                <a:extLst>
+                  <a:ext uri="{0D108BD9-81ED-4DB2-BD59-A6C34878D82A}">
+                    <a16:rowId xmlns:a16="http://schemas.microsoft.com/office/drawing/2014/main" val="1890405566"/>
+                  </a:ext>
+                </a:extLst>
+              </a:tr>
+              <a:tr h="370840">
+                <a:tc>
+                  <a:txBody>
+                    <a:bodyPr/>
+                    <a:lstStyle/>
+                    <a:p>
+                      <a:pPr fontAlgn="base" latinLnBrk="0">
+                        <a:buNone/>
+                      </a:pPr>
+                      <a:r>
+                        <a:rPr lang="en-GB" sz="1200" b="1">
+                          <a:effectLst/>
+                          <a:latin typeface="+mn-lt"/>
+                        </a:rPr>
+                        <a:t>EfficientNet1DLSTM</a:t>
+                      </a:r>
+                    </a:p>
+                  </a:txBody>
+                  <a:tcPr marL="76200" marR="76200" anchor="ctr"/>
+                </a:tc>
+                <a:tc>
+                  <a:txBody>
+                    <a:bodyPr/>
+                    <a:lstStyle/>
+                    <a:p>
+                      <a:pPr fontAlgn="base" latinLnBrk="0">
+                        <a:buNone/>
+                      </a:pPr>
+                      <a:r>
+                        <a:rPr lang="en-GB" sz="1200" dirty="0">
+                          <a:effectLst/>
+                          <a:latin typeface="+mn-lt"/>
+                        </a:rPr>
+                        <a:t>99</a:t>
+                      </a:r>
+                    </a:p>
+                  </a:txBody>
+                  <a:tcPr marL="76200" marR="76200" anchor="ctr"/>
+                </a:tc>
+                <a:tc>
+                  <a:txBody>
+                    <a:bodyPr/>
+                    <a:lstStyle/>
+                    <a:p>
+                      <a:pPr fontAlgn="base" latinLnBrk="0">
+                        <a:buNone/>
+                      </a:pPr>
+                      <a:r>
+                        <a:rPr lang="en-GB" sz="1200">
+                          <a:effectLst/>
+                          <a:latin typeface="+mn-lt"/>
+                        </a:rPr>
+                        <a:t>12</a:t>
+                      </a:r>
+                    </a:p>
+                  </a:txBody>
+                  <a:tcPr marL="76200" marR="76200" anchor="ctr"/>
+                </a:tc>
+                <a:tc>
+                  <a:txBody>
+                    <a:bodyPr/>
+                    <a:lstStyle/>
+                    <a:p>
+                      <a:pPr fontAlgn="base" latinLnBrk="0">
+                        <a:buNone/>
+                      </a:pPr>
+                      <a:r>
+                        <a:rPr lang="en-GB" sz="1200">
+                          <a:effectLst/>
+                          <a:latin typeface="+mn-lt"/>
+                        </a:rPr>
+                        <a:t>128</a:t>
+                      </a:r>
+                    </a:p>
+                  </a:txBody>
+                  <a:tcPr marL="76200" marR="76200" anchor="ctr"/>
+                </a:tc>
+                <a:tc>
+                  <a:txBody>
+                    <a:bodyPr/>
+                    <a:lstStyle/>
+                    <a:p>
+                      <a:pPr fontAlgn="base" latinLnBrk="0">
+                        <a:buNone/>
+                      </a:pPr>
+                      <a:r>
+                        <a:rPr lang="en-GB" sz="1200">
+                          <a:effectLst/>
+                          <a:latin typeface="+mn-lt"/>
+                        </a:rPr>
+                        <a:t>31</a:t>
+                      </a:r>
+                    </a:p>
+                  </a:txBody>
+                  <a:tcPr marL="76200" marR="76200" anchor="ctr"/>
+                </a:tc>
+                <a:extLst>
+                  <a:ext uri="{0D108BD9-81ED-4DB2-BD59-A6C34878D82A}">
+                    <a16:rowId xmlns:a16="http://schemas.microsoft.com/office/drawing/2014/main" val="1037789132"/>
+                  </a:ext>
+                </a:extLst>
+              </a:tr>
+              <a:tr h="370840">
+                <a:tc>
+                  <a:txBody>
+                    <a:bodyPr/>
+                    <a:lstStyle/>
+                    <a:p>
+                      <a:pPr fontAlgn="base" latinLnBrk="0">
+                        <a:buNone/>
+                      </a:pPr>
+                      <a:r>
+                        <a:rPr lang="en-GB" sz="1200" b="1" dirty="0">
+                          <a:effectLst/>
+                          <a:latin typeface="+mn-lt"/>
+                        </a:rPr>
+                        <a:t>MobileNetV3_1D_LSTM</a:t>
+                      </a:r>
+                    </a:p>
+                  </a:txBody>
+                  <a:tcPr marL="76200" marR="76200" anchor="ctr"/>
+                </a:tc>
+                <a:tc>
+                  <a:txBody>
+                    <a:bodyPr/>
+                    <a:lstStyle/>
+                    <a:p>
+                      <a:pPr fontAlgn="base" latinLnBrk="0">
+                        <a:buNone/>
+                      </a:pPr>
+                      <a:r>
+                        <a:rPr lang="en-GB" sz="1200">
+                          <a:effectLst/>
+                          <a:latin typeface="+mn-lt"/>
+                        </a:rPr>
+                        <a:t>99</a:t>
+                      </a:r>
+                    </a:p>
+                  </a:txBody>
+                  <a:tcPr marL="76200" marR="76200" anchor="ctr"/>
+                </a:tc>
+                <a:tc>
+                  <a:txBody>
+                    <a:bodyPr/>
+                    <a:lstStyle/>
+                    <a:p>
+                      <a:pPr fontAlgn="base" latinLnBrk="0">
+                        <a:buNone/>
+                      </a:pPr>
+                      <a:r>
+                        <a:rPr lang="en-GB" sz="1200">
+                          <a:effectLst/>
+                          <a:latin typeface="+mn-lt"/>
+                        </a:rPr>
+                        <a:t>12</a:t>
+                      </a:r>
+                    </a:p>
+                  </a:txBody>
+                  <a:tcPr marL="76200" marR="76200" anchor="ctr"/>
+                </a:tc>
+                <a:tc>
+                  <a:txBody>
+                    <a:bodyPr/>
+                    <a:lstStyle/>
+                    <a:p>
+                      <a:pPr fontAlgn="base" latinLnBrk="0">
+                        <a:buNone/>
+                      </a:pPr>
+                      <a:r>
+                        <a:rPr lang="en-GB" sz="1200">
+                          <a:effectLst/>
+                          <a:latin typeface="+mn-lt"/>
+                        </a:rPr>
+                        <a:t>—</a:t>
+                      </a:r>
+                    </a:p>
+                  </a:txBody>
+                  <a:tcPr marL="76200" marR="76200" anchor="ctr"/>
+                </a:tc>
+                <a:tc>
+                  <a:txBody>
+                    <a:bodyPr/>
+                    <a:lstStyle/>
+                    <a:p>
+                      <a:pPr fontAlgn="base" latinLnBrk="0">
+                        <a:buNone/>
+                      </a:pPr>
+                      <a:r>
+                        <a:rPr lang="en-GB" sz="1200" dirty="0">
+                          <a:effectLst/>
+                          <a:latin typeface="+mn-lt"/>
+                        </a:rPr>
+                        <a:t>31</a:t>
+                      </a:r>
+                    </a:p>
+                  </a:txBody>
+                  <a:tcPr marL="76200" marR="76200" anchor="ctr"/>
+                </a:tc>
+                <a:extLst>
+                  <a:ext uri="{0D108BD9-81ED-4DB2-BD59-A6C34878D82A}">
+                    <a16:rowId xmlns:a16="http://schemas.microsoft.com/office/drawing/2014/main" val="2484458502"/>
+                  </a:ext>
+                </a:extLst>
+              </a:tr>
+            </a:tbl>
+          </a:graphicData>
+        </a:graphic>
+      </p:graphicFrame>
+      <p:graphicFrame>
+        <p:nvGraphicFramePr>
+          <p:cNvPr id="3" name="Table 2">
+            <a:extLst>
+              <a:ext uri="{FF2B5EF4-FFF2-40B4-BE49-F238E27FC236}">
+                <a16:creationId xmlns:a16="http://schemas.microsoft.com/office/drawing/2014/main" id="{F47D2D31-30B6-D228-2E92-3A91133FDA32}"/>
+              </a:ext>
+            </a:extLst>
+          </p:cNvPr>
+          <p:cNvGraphicFramePr>
+            <a:graphicFrameLocks noGrp="1"/>
+          </p:cNvGraphicFramePr>
+          <p:nvPr>
+            <p:extLst>
+              <p:ext uri="{D42A27DB-BD31-4B8C-83A1-F6EECF244321}">
+                <p14:modId xmlns:p14="http://schemas.microsoft.com/office/powerpoint/2010/main" val="4137105713"/>
+              </p:ext>
+            </p:extLst>
+          </p:nvPr>
+        </p:nvGraphicFramePr>
+        <p:xfrm>
+          <a:off x="606902" y="3800324"/>
+          <a:ext cx="7727894" cy="2225040"/>
+        </p:xfrm>
+        <a:graphic>
+          <a:graphicData uri="http://schemas.openxmlformats.org/drawingml/2006/table">
+            <a:tbl>
+              <a:tblPr firstRow="1" bandRow="1">
+                <a:tableStyleId>{5C22544A-7EE6-4342-B048-85BDC9FD1C3A}</a:tableStyleId>
+              </a:tblPr>
+              <a:tblGrid>
+                <a:gridCol w="3863947">
+                  <a:extLst>
+                    <a:ext uri="{9D8B030D-6E8A-4147-A177-3AD203B41FA5}">
+                      <a16:colId xmlns:a16="http://schemas.microsoft.com/office/drawing/2014/main" val="3398294999"/>
+                    </a:ext>
+                  </a:extLst>
+                </a:gridCol>
+                <a:gridCol w="3863947">
+                  <a:extLst>
+                    <a:ext uri="{9D8B030D-6E8A-4147-A177-3AD203B41FA5}">
+                      <a16:colId xmlns:a16="http://schemas.microsoft.com/office/drawing/2014/main" val="2376096010"/>
+                    </a:ext>
+                  </a:extLst>
+                </a:gridCol>
+              </a:tblGrid>
+              <a:tr h="370840">
+                <a:tc>
+                  <a:txBody>
+                    <a:bodyPr/>
+                    <a:lstStyle/>
+                    <a:p>
+                      <a:r>
+                        <a:rPr lang="en-IN" dirty="0"/>
+                        <a:t>Hyperparameter</a:t>
+                      </a:r>
+                      <a:endParaRPr lang="en-GB" dirty="0"/>
+                    </a:p>
+                  </a:txBody>
+                  <a:tcPr/>
+                </a:tc>
+                <a:tc>
+                  <a:txBody>
+                    <a:bodyPr/>
+                    <a:lstStyle/>
+                    <a:p>
+                      <a:r>
+                        <a:rPr lang="en-IN" dirty="0"/>
+                        <a:t>Values Tested</a:t>
+                      </a:r>
+                      <a:endParaRPr lang="en-GB" dirty="0"/>
+                    </a:p>
+                  </a:txBody>
+                  <a:tcPr/>
+                </a:tc>
+                <a:extLst>
+                  <a:ext uri="{0D108BD9-81ED-4DB2-BD59-A6C34878D82A}">
+                    <a16:rowId xmlns:a16="http://schemas.microsoft.com/office/drawing/2014/main" val="3705606927"/>
+                  </a:ext>
+                </a:extLst>
+              </a:tr>
+              <a:tr h="370840">
+                <a:tc>
+                  <a:txBody>
+                    <a:bodyPr/>
+                    <a:lstStyle/>
+                    <a:p>
+                      <a:r>
+                        <a:rPr lang="en-IN" dirty="0"/>
+                        <a:t>Learning Rate</a:t>
+                      </a:r>
+                      <a:endParaRPr lang="en-GB" dirty="0"/>
+                    </a:p>
+                  </a:txBody>
+                  <a:tcPr/>
+                </a:tc>
+                <a:tc>
+                  <a:txBody>
+                    <a:bodyPr/>
+                    <a:lstStyle/>
+                    <a:p>
+                      <a:r>
+                        <a:rPr lang="en-IN" dirty="0"/>
+                        <a:t>0.001, 0.0005</a:t>
+                      </a:r>
+                      <a:endParaRPr lang="en-GB" dirty="0"/>
+                    </a:p>
+                  </a:txBody>
+                  <a:tcPr/>
+                </a:tc>
+                <a:extLst>
+                  <a:ext uri="{0D108BD9-81ED-4DB2-BD59-A6C34878D82A}">
+                    <a16:rowId xmlns:a16="http://schemas.microsoft.com/office/drawing/2014/main" val="850416615"/>
+                  </a:ext>
+                </a:extLst>
+              </a:tr>
+              <a:tr h="370840">
+                <a:tc>
+                  <a:txBody>
+                    <a:bodyPr/>
+                    <a:lstStyle/>
+                    <a:p>
+                      <a:r>
+                        <a:rPr lang="en-IN" dirty="0"/>
+                        <a:t>Batch Size </a:t>
+                      </a:r>
+                      <a:endParaRPr lang="en-GB" dirty="0"/>
+                    </a:p>
+                  </a:txBody>
+                  <a:tcPr/>
+                </a:tc>
+                <a:tc>
+                  <a:txBody>
+                    <a:bodyPr/>
+                    <a:lstStyle/>
+                    <a:p>
+                      <a:pPr marL="0" marR="0" lvl="0" indent="0" algn="l" defTabSz="457200" rtl="0" eaLnBrk="1" fontAlgn="auto" latinLnBrk="0" hangingPunct="1">
+                        <a:lnSpc>
+                          <a:spcPct val="100000"/>
+                        </a:lnSpc>
+                        <a:spcBef>
+                          <a:spcPts val="0"/>
+                        </a:spcBef>
+                        <a:spcAft>
+                          <a:spcPts val="0"/>
+                        </a:spcAft>
+                        <a:buClrTx/>
+                        <a:buSzTx/>
+                        <a:buFontTx/>
+                        <a:buNone/>
+                        <a:tabLst/>
+                        <a:defRPr/>
+                      </a:pPr>
+                      <a:r>
+                        <a:rPr lang="en-GB" sz="1800" b="0" kern="1200" dirty="0">
+                          <a:solidFill>
+                            <a:schemeClr val="dk1"/>
+                          </a:solidFill>
+                          <a:effectLst/>
+                          <a:latin typeface="+mn-lt"/>
+                          <a:ea typeface="+mn-ea"/>
+                          <a:cs typeface="+mn-cs"/>
+                        </a:rPr>
+                        <a:t>16, 32, 64, 128</a:t>
+                      </a:r>
+                    </a:p>
+                  </a:txBody>
+                  <a:tcPr/>
+                </a:tc>
+                <a:extLst>
+                  <a:ext uri="{0D108BD9-81ED-4DB2-BD59-A6C34878D82A}">
+                    <a16:rowId xmlns:a16="http://schemas.microsoft.com/office/drawing/2014/main" val="3765307749"/>
+                  </a:ext>
+                </a:extLst>
+              </a:tr>
+              <a:tr h="370840">
+                <a:tc>
+                  <a:txBody>
+                    <a:bodyPr/>
+                    <a:lstStyle/>
+                    <a:p>
+                      <a:r>
+                        <a:rPr lang="en-GB" sz="1800" b="0" i="0" kern="1200" dirty="0">
+                          <a:solidFill>
+                            <a:schemeClr val="dk1"/>
+                          </a:solidFill>
+                          <a:effectLst/>
+                          <a:latin typeface="+mn-lt"/>
+                          <a:ea typeface="+mn-ea"/>
+                          <a:cs typeface="+mn-cs"/>
+                        </a:rPr>
+                        <a:t>Optimizer</a:t>
+                      </a:r>
+                      <a:endParaRPr lang="en-GB" dirty="0"/>
+                    </a:p>
+                  </a:txBody>
+                  <a:tcPr/>
+                </a:tc>
+                <a:tc>
+                  <a:txBody>
+                    <a:bodyPr/>
+                    <a:lstStyle/>
+                    <a:p>
+                      <a:r>
+                        <a:rPr lang="en-IN" dirty="0"/>
+                        <a:t>Adam, SGD</a:t>
+                      </a:r>
+                      <a:endParaRPr lang="en-GB" dirty="0"/>
+                    </a:p>
+                  </a:txBody>
+                  <a:tcPr/>
+                </a:tc>
+                <a:extLst>
+                  <a:ext uri="{0D108BD9-81ED-4DB2-BD59-A6C34878D82A}">
+                    <a16:rowId xmlns:a16="http://schemas.microsoft.com/office/drawing/2014/main" val="53225989"/>
+                  </a:ext>
+                </a:extLst>
+              </a:tr>
+              <a:tr h="370840">
+                <a:tc>
+                  <a:txBody>
+                    <a:bodyPr/>
+                    <a:lstStyle/>
+                    <a:p>
+                      <a:pPr fontAlgn="base" latinLnBrk="0">
+                        <a:buNone/>
+                      </a:pPr>
+                      <a:r>
+                        <a:rPr lang="en-GB" dirty="0">
+                          <a:effectLst/>
+                        </a:rPr>
+                        <a:t>Weight Decay</a:t>
+                      </a:r>
+                    </a:p>
+                  </a:txBody>
+                  <a:tcPr marL="76200" marR="76200" anchor="ctr"/>
+                </a:tc>
+                <a:tc>
+                  <a:txBody>
+                    <a:bodyPr/>
+                    <a:lstStyle/>
+                    <a:p>
+                      <a:pPr fontAlgn="base" latinLnBrk="0">
+                        <a:buNone/>
+                      </a:pPr>
+                      <a:r>
+                        <a:rPr lang="en-GB" sz="1800" b="0" i="0" kern="1200" dirty="0">
+                          <a:solidFill>
+                            <a:schemeClr val="dk1"/>
+                          </a:solidFill>
+                          <a:effectLst/>
+                          <a:latin typeface="+mn-lt"/>
+                          <a:ea typeface="+mn-ea"/>
+                          <a:cs typeface="+mn-cs"/>
+                        </a:rPr>
+                        <a:t>0.0, 1e-5, 1e-4, 1e-3</a:t>
+                      </a:r>
+                      <a:endParaRPr lang="en-GB" dirty="0">
+                        <a:effectLst/>
+                      </a:endParaRPr>
+                    </a:p>
+                  </a:txBody>
+                  <a:tcPr marL="76200" marR="76200" anchor="ctr"/>
+                </a:tc>
+                <a:extLst>
+                  <a:ext uri="{0D108BD9-81ED-4DB2-BD59-A6C34878D82A}">
+                    <a16:rowId xmlns:a16="http://schemas.microsoft.com/office/drawing/2014/main" val="2372432037"/>
+                  </a:ext>
+                </a:extLst>
+              </a:tr>
+              <a:tr h="370840">
+                <a:tc>
+                  <a:txBody>
+                    <a:bodyPr/>
+                    <a:lstStyle/>
+                    <a:p>
+                      <a:r>
+                        <a:rPr lang="en-IN" dirty="0"/>
+                        <a:t>Epochs</a:t>
+                      </a:r>
+                      <a:endParaRPr lang="en-GB" dirty="0"/>
+                    </a:p>
+                  </a:txBody>
+                  <a:tcPr/>
+                </a:tc>
+                <a:tc>
+                  <a:txBody>
+                    <a:bodyPr/>
+                    <a:lstStyle/>
+                    <a:p>
+                      <a:r>
+                        <a:rPr lang="en-IN" dirty="0"/>
+                        <a:t>10</a:t>
+                      </a:r>
+                      <a:endParaRPr lang="en-GB" dirty="0"/>
+                    </a:p>
+                  </a:txBody>
+                  <a:tcPr/>
+                </a:tc>
+                <a:extLst>
+                  <a:ext uri="{0D108BD9-81ED-4DB2-BD59-A6C34878D82A}">
+                    <a16:rowId xmlns:a16="http://schemas.microsoft.com/office/drawing/2014/main" val="1293429995"/>
+                  </a:ext>
+                </a:extLst>
+              </a:tr>
+            </a:tbl>
+          </a:graphicData>
+        </a:graphic>
+      </p:graphicFrame>
+      <p:graphicFrame>
+        <p:nvGraphicFramePr>
+          <p:cNvPr id="5" name="Object 4">
+            <a:extLst>
+              <a:ext uri="{FF2B5EF4-FFF2-40B4-BE49-F238E27FC236}">
+                <a16:creationId xmlns:a16="http://schemas.microsoft.com/office/drawing/2014/main" id="{444F33AC-EFEC-546C-5FDB-FD651F66FAD0}"/>
+              </a:ext>
+            </a:extLst>
+          </p:cNvPr>
+          <p:cNvGraphicFramePr>
+            <a:graphicFrameLocks noChangeAspect="1"/>
+          </p:cNvGraphicFramePr>
+          <p:nvPr>
+            <p:extLst>
+              <p:ext uri="{D42A27DB-BD31-4B8C-83A1-F6EECF244321}">
+                <p14:modId xmlns:p14="http://schemas.microsoft.com/office/powerpoint/2010/main" val="3387111536"/>
+              </p:ext>
+            </p:extLst>
+          </p:nvPr>
+        </p:nvGraphicFramePr>
+        <p:xfrm>
+          <a:off x="6202545" y="6086475"/>
+          <a:ext cx="914400" cy="771525"/>
+        </p:xfrm>
+        <a:graphic>
+          <a:graphicData uri="http://schemas.openxmlformats.org/presentationml/2006/ole">
+            <mc:AlternateContent xmlns:mc="http://schemas.openxmlformats.org/markup-compatibility/2006">
+              <mc:Choice xmlns:v="urn:schemas-microsoft-com:vml" Requires="v">
+                <p:oleObj name="Macro-Enabled Worksheet" showAsIcon="1" r:id="rId2" imgW="914400" imgH="771656" progId="Excel.SheetMacroEnabled.12">
+                  <p:embed/>
+                </p:oleObj>
+              </mc:Choice>
+              <mc:Fallback>
+                <p:oleObj name="Macro-Enabled Worksheet" showAsIcon="1" r:id="rId2" imgW="914400" imgH="771656" progId="Excel.SheetMacroEnabled.12">
+                  <p:embed/>
+                  <p:pic>
+                    <p:nvPicPr>
+                      <p:cNvPr id="0" name=""/>
+                      <p:cNvPicPr/>
+                      <p:nvPr/>
+                    </p:nvPicPr>
+                    <p:blipFill>
+                      <a:blip r:embed="rId3"/>
+                      <a:stretch>
+                        <a:fillRect/>
+                      </a:stretch>
+                    </p:blipFill>
+                    <p:spPr>
+                      <a:xfrm>
+                        <a:off x="6202545" y="6086475"/>
+                        <a:ext cx="914400" cy="771525"/>
+                      </a:xfrm>
+                      <a:prstGeom prst="rect">
+                        <a:avLst/>
+                      </a:prstGeom>
+                    </p:spPr>
+                  </p:pic>
+                </p:oleObj>
+              </mc:Fallback>
+            </mc:AlternateContent>
+          </a:graphicData>
+        </a:graphic>
+      </p:graphicFrame>
+    </p:spTree>
+    <p:extLst>
+      <p:ext uri="{BB962C8B-B14F-4D97-AF65-F5344CB8AC3E}">
+        <p14:creationId xmlns:p14="http://schemas.microsoft.com/office/powerpoint/2010/main" val="510907961"/>
+      </p:ext>
+    </p:extLst>
+  </p:cSld>
+  <p:clrMapOvr>
+    <a:masterClrMapping/>
+  </p:clrMapOvr>
+</p:sld>
+</file>
+
 <file path=ppt/slides/slide3.xml><?xml version="1.0" encoding="utf-8"?>
 <p:sld xmlns:a="http://schemas.openxmlformats.org/drawingml/2006/main" xmlns:r="http://schemas.openxmlformats.org/officeDocument/2006/relationships" xmlns:p="http://schemas.openxmlformats.org/presentationml/2006/main">
   <p:cSld>
@@ -9177,6 +10769,1312 @@
         </p:txBody>
       </p:sp>
     </p:spTree>
+  </p:cSld>
+  <p:clrMapOvr>
+    <a:masterClrMapping/>
+  </p:clrMapOvr>
+</p:sld>
+</file>
+
+<file path=ppt/slides/slide30.xml><?xml version="1.0" encoding="utf-8"?>
+<p:sld xmlns:a="http://schemas.openxmlformats.org/drawingml/2006/main" xmlns:r="http://schemas.openxmlformats.org/officeDocument/2006/relationships" xmlns:p="http://schemas.openxmlformats.org/presentationml/2006/main">
+  <p:cSld>
+    <p:spTree>
+      <p:nvGrpSpPr>
+        <p:cNvPr id="1" name=""/>
+        <p:cNvGrpSpPr/>
+        <p:nvPr/>
+      </p:nvGrpSpPr>
+      <p:grpSpPr>
+        <a:xfrm>
+          <a:off x="0" y="0"/>
+          <a:ext cx="0" cy="0"/>
+          <a:chOff x="0" y="0"/>
+          <a:chExt cx="0" cy="0"/>
+        </a:xfrm>
+      </p:grpSpPr>
+      <p:sp>
+        <p:nvSpPr>
+          <p:cNvPr id="2" name="Title 1">
+            <a:extLst>
+              <a:ext uri="{FF2B5EF4-FFF2-40B4-BE49-F238E27FC236}">
+                <a16:creationId xmlns:a16="http://schemas.microsoft.com/office/drawing/2014/main" id="{A3B0478F-DEAE-2427-7906-269798A0E78B}"/>
+              </a:ext>
+            </a:extLst>
+          </p:cNvPr>
+          <p:cNvSpPr>
+            <a:spLocks noGrp="1"/>
+          </p:cNvSpPr>
+          <p:nvPr>
+            <p:ph type="title"/>
+          </p:nvPr>
+        </p:nvSpPr>
+        <p:spPr/>
+        <p:txBody>
+          <a:bodyPr>
+            <a:noAutofit/>
+          </a:bodyPr>
+          <a:lstStyle/>
+          <a:p>
+            <a:r>
+              <a:rPr lang="en-GB" sz="3600" b="1" dirty="0"/>
+              <a:t>Observations from Short-Epoch Grid Search (10 Epochs)</a:t>
+            </a:r>
+            <a:endParaRPr lang="en-GB" sz="3600" dirty="0"/>
+          </a:p>
+        </p:txBody>
+      </p:sp>
+      <p:sp>
+        <p:nvSpPr>
+          <p:cNvPr id="3" name="Content Placeholder 2">
+            <a:extLst>
+              <a:ext uri="{FF2B5EF4-FFF2-40B4-BE49-F238E27FC236}">
+                <a16:creationId xmlns:a16="http://schemas.microsoft.com/office/drawing/2014/main" id="{9A9CE221-9ACB-E961-09CC-9DA906C53B08}"/>
+              </a:ext>
+            </a:extLst>
+          </p:cNvPr>
+          <p:cNvSpPr>
+            <a:spLocks noGrp="1"/>
+          </p:cNvSpPr>
+          <p:nvPr>
+            <p:ph idx="1"/>
+          </p:nvPr>
+        </p:nvSpPr>
+        <p:spPr/>
+        <p:txBody>
+          <a:bodyPr>
+            <a:normAutofit fontScale="47500" lnSpcReduction="20000"/>
+          </a:bodyPr>
+          <a:lstStyle/>
+          <a:p>
+            <a:r>
+              <a:rPr lang="en-GB" b="1" dirty="0"/>
+              <a:t>📈 Overall Correlation</a:t>
+            </a:r>
+            <a:endParaRPr lang="en-GB" dirty="0"/>
+          </a:p>
+          <a:p>
+            <a:pPr lvl="1"/>
+            <a:r>
+              <a:rPr lang="en-GB" dirty="0"/>
+              <a:t>Train F1 ↔ Val F1 correlation ≈ </a:t>
+            </a:r>
+            <a:r>
+              <a:rPr lang="en-GB" b="1" dirty="0"/>
+              <a:t>0.88</a:t>
+            </a:r>
+            <a:r>
+              <a:rPr lang="en-GB" dirty="0"/>
+              <a:t> → Stable training trends</a:t>
+            </a:r>
+          </a:p>
+          <a:p>
+            <a:pPr lvl="1"/>
+            <a:r>
+              <a:rPr lang="en-GB" dirty="0"/>
+              <a:t>Overfitting visible at </a:t>
+            </a:r>
+            <a:r>
+              <a:rPr lang="en-GB" b="1" dirty="0"/>
+              <a:t>higher learning rates</a:t>
+            </a:r>
+            <a:r>
+              <a:rPr lang="en-GB" dirty="0"/>
+              <a:t> or </a:t>
+            </a:r>
+            <a:r>
+              <a:rPr lang="en-GB" b="1" dirty="0"/>
+              <a:t>zero weight decay</a:t>
+            </a:r>
+            <a:endParaRPr lang="en-GB" dirty="0"/>
+          </a:p>
+          <a:p>
+            <a:r>
+              <a:rPr lang="en-GB" b="1" dirty="0"/>
+              <a:t>⚙️ Batch Size</a:t>
+            </a:r>
+            <a:endParaRPr lang="en-GB" dirty="0"/>
+          </a:p>
+          <a:p>
+            <a:pPr lvl="1"/>
+            <a:r>
+              <a:rPr lang="en-GB" b="1" dirty="0"/>
+              <a:t>128 (Adam or SGD)</a:t>
+            </a:r>
+            <a:r>
+              <a:rPr lang="en-GB" dirty="0"/>
+              <a:t> under-utilizes gradient noise</a:t>
+            </a:r>
+          </a:p>
+          <a:p>
+            <a:pPr lvl="1"/>
+            <a:r>
+              <a:rPr lang="en-GB" dirty="0"/>
+              <a:t>Poor early generalization — </a:t>
+            </a:r>
+            <a:r>
+              <a:rPr lang="en-GB" b="1" dirty="0"/>
+              <a:t>remove for long (50/100 epoch)</a:t>
+            </a:r>
+            <a:r>
+              <a:rPr lang="en-GB" dirty="0"/>
+              <a:t> runs</a:t>
+            </a:r>
+          </a:p>
+          <a:p>
+            <a:r>
+              <a:rPr lang="en-GB" b="1" dirty="0"/>
+              <a:t>📉 Weight Decay</a:t>
+            </a:r>
+            <a:endParaRPr lang="en-GB" dirty="0"/>
+          </a:p>
+          <a:p>
+            <a:pPr lvl="1"/>
+            <a:r>
+              <a:rPr lang="en-GB" b="1" dirty="0"/>
+              <a:t>&gt; 1e-3</a:t>
+            </a:r>
+            <a:r>
+              <a:rPr lang="en-GB" dirty="0"/>
+              <a:t> consistently degrades validation performance</a:t>
+            </a:r>
+          </a:p>
+          <a:p>
+            <a:pPr lvl="1"/>
+            <a:r>
+              <a:rPr lang="en-GB" dirty="0"/>
+              <a:t>Recommended: </a:t>
+            </a:r>
+            <a:r>
+              <a:rPr lang="en-GB" b="1" dirty="0"/>
+              <a:t>1e-5 – 1e-4</a:t>
+            </a:r>
+            <a:endParaRPr lang="en-GB" dirty="0"/>
+          </a:p>
+          <a:p>
+            <a:r>
+              <a:rPr lang="en-GB" b="1" dirty="0"/>
+              <a:t>🚀 Learning Rate</a:t>
+            </a:r>
+            <a:endParaRPr lang="en-GB" dirty="0"/>
+          </a:p>
+          <a:p>
+            <a:pPr lvl="1"/>
+            <a:r>
+              <a:rPr lang="en-GB" b="1" dirty="0"/>
+              <a:t>0.0005 – 0.001</a:t>
+            </a:r>
+            <a:r>
+              <a:rPr lang="en-GB" dirty="0"/>
+              <a:t> works best for Adam</a:t>
+            </a:r>
+          </a:p>
+          <a:p>
+            <a:pPr lvl="1"/>
+            <a:r>
+              <a:rPr lang="en-GB" b="1" dirty="0"/>
+              <a:t>SGD needs ≥ 0.005</a:t>
+            </a:r>
+            <a:endParaRPr lang="en-GB" dirty="0"/>
+          </a:p>
+          <a:p>
+            <a:r>
+              <a:rPr lang="en-GB" b="1" dirty="0"/>
+              <a:t>🧩 Optimizer Behaviour</a:t>
+            </a:r>
+            <a:endParaRPr lang="en-GB" dirty="0"/>
+          </a:p>
+          <a:p>
+            <a:pPr lvl="1"/>
+            <a:r>
+              <a:rPr lang="en-GB" b="1" dirty="0"/>
+              <a:t>Adam (no decay)</a:t>
+            </a:r>
+            <a:r>
+              <a:rPr lang="en-GB" dirty="0"/>
+              <a:t> → mild overfitting (Train F1 − Val F1 &gt; 0.05)</a:t>
+            </a:r>
+          </a:p>
+          <a:p>
+            <a:pPr lvl="1"/>
+            <a:r>
+              <a:rPr lang="en-GB" dirty="0"/>
+              <a:t>Use small decay (</a:t>
+            </a:r>
+            <a:r>
+              <a:rPr lang="en-GB" b="1" dirty="0"/>
+              <a:t>1e-4</a:t>
+            </a:r>
+            <a:r>
+              <a:rPr lang="en-GB" dirty="0"/>
+              <a:t>) for better generalization</a:t>
+            </a:r>
+          </a:p>
+          <a:p>
+            <a:pPr marL="0" indent="0">
+              <a:buNone/>
+            </a:pPr>
+            <a:endParaRPr lang="en-GB" sz="4200" b="1" dirty="0"/>
+          </a:p>
+          <a:p>
+            <a:pPr marL="0" indent="0">
+              <a:buNone/>
+            </a:pPr>
+            <a:r>
+              <a:rPr lang="en-GB" sz="4200" b="1" dirty="0"/>
+              <a:t>Conclusion:</a:t>
+            </a:r>
+            <a:br>
+              <a:rPr lang="en-GB" sz="4200" dirty="0"/>
+            </a:br>
+            <a:r>
+              <a:rPr lang="en-GB" sz="4200" dirty="0"/>
+              <a:t>Restrict long-run grid(50-100 Epochs) to </a:t>
+            </a:r>
+            <a:r>
+              <a:rPr lang="en-GB" sz="4200" b="1" dirty="0"/>
+              <a:t>LR ∈ [0.0005–0.001]</a:t>
+            </a:r>
+            <a:r>
+              <a:rPr lang="en-GB" sz="4200" dirty="0"/>
+              <a:t>, </a:t>
+            </a:r>
+            <a:r>
+              <a:rPr lang="en-GB" sz="4200" b="1" dirty="0"/>
+              <a:t>Batch Size ∈ [32–64]</a:t>
+            </a:r>
+            <a:r>
+              <a:rPr lang="en-GB" sz="4200" dirty="0"/>
+              <a:t>, </a:t>
+            </a:r>
+            <a:r>
+              <a:rPr lang="en-GB" sz="4200" b="1" dirty="0"/>
+              <a:t>Adam with 1e-4 decay.</a:t>
+            </a:r>
+            <a:endParaRPr lang="en-GB" sz="4200" dirty="0"/>
+          </a:p>
+        </p:txBody>
+      </p:sp>
+    </p:spTree>
+    <p:extLst>
+      <p:ext uri="{BB962C8B-B14F-4D97-AF65-F5344CB8AC3E}">
+        <p14:creationId xmlns:p14="http://schemas.microsoft.com/office/powerpoint/2010/main" val="410788863"/>
+      </p:ext>
+    </p:extLst>
+  </p:cSld>
+  <p:clrMapOvr>
+    <a:masterClrMapping/>
+  </p:clrMapOvr>
+</p:sld>
+</file>
+
+<file path=ppt/slides/slide31.xml><?xml version="1.0" encoding="utf-8"?>
+<p:sld xmlns:a="http://schemas.openxmlformats.org/drawingml/2006/main" xmlns:r="http://schemas.openxmlformats.org/officeDocument/2006/relationships" xmlns:p="http://schemas.openxmlformats.org/presentationml/2006/main">
+  <p:cSld>
+    <p:spTree>
+      <p:nvGrpSpPr>
+        <p:cNvPr id="1" name="">
+          <a:extLst>
+            <a:ext uri="{FF2B5EF4-FFF2-40B4-BE49-F238E27FC236}">
+              <a16:creationId xmlns:a16="http://schemas.microsoft.com/office/drawing/2014/main" id="{1361433C-3FE1-F47F-3DEE-CA2ED90E5B5C}"/>
+            </a:ext>
+          </a:extLst>
+        </p:cNvPr>
+        <p:cNvGrpSpPr/>
+        <p:nvPr/>
+      </p:nvGrpSpPr>
+      <p:grpSpPr>
+        <a:xfrm>
+          <a:off x="0" y="0"/>
+          <a:ext cx="0" cy="0"/>
+          <a:chOff x="0" y="0"/>
+          <a:chExt cx="0" cy="0"/>
+        </a:xfrm>
+      </p:grpSpPr>
+      <p:sp>
+        <p:nvSpPr>
+          <p:cNvPr id="2" name="Title 1">
+            <a:extLst>
+              <a:ext uri="{FF2B5EF4-FFF2-40B4-BE49-F238E27FC236}">
+                <a16:creationId xmlns:a16="http://schemas.microsoft.com/office/drawing/2014/main" id="{6FD602E4-9410-76AB-1381-43E4F70B2750}"/>
+              </a:ext>
+            </a:extLst>
+          </p:cNvPr>
+          <p:cNvSpPr>
+            <a:spLocks noGrp="1"/>
+          </p:cNvSpPr>
+          <p:nvPr>
+            <p:ph type="title"/>
+          </p:nvPr>
+        </p:nvSpPr>
+        <p:spPr/>
+        <p:txBody>
+          <a:bodyPr>
+            <a:noAutofit/>
+          </a:bodyPr>
+          <a:lstStyle/>
+          <a:p>
+            <a:r>
+              <a:rPr lang="en-GB" sz="3600" dirty="0"/>
+              <a:t>Experimental Hyperparameter Configuration and Grid Sampling Strategy</a:t>
+            </a:r>
+          </a:p>
+        </p:txBody>
+      </p:sp>
+      <p:graphicFrame>
+        <p:nvGraphicFramePr>
+          <p:cNvPr id="4" name="Content Placeholder 3">
+            <a:extLst>
+              <a:ext uri="{FF2B5EF4-FFF2-40B4-BE49-F238E27FC236}">
+                <a16:creationId xmlns:a16="http://schemas.microsoft.com/office/drawing/2014/main" id="{DDA8D259-CAB7-4C8C-BFD1-87CEFB3B0EEC}"/>
+              </a:ext>
+            </a:extLst>
+          </p:cNvPr>
+          <p:cNvGraphicFramePr>
+            <a:graphicFrameLocks noGrp="1"/>
+          </p:cNvGraphicFramePr>
+          <p:nvPr>
+            <p:ph idx="1"/>
+          </p:nvPr>
+        </p:nvGraphicFramePr>
+        <p:xfrm>
+          <a:off x="606902" y="1497456"/>
+          <a:ext cx="7727894" cy="2184400"/>
+        </p:xfrm>
+        <a:graphic>
+          <a:graphicData uri="http://schemas.openxmlformats.org/drawingml/2006/table">
+            <a:tbl>
+              <a:tblPr firstRow="1" bandRow="1">
+                <a:tableStyleId>{5C22544A-7EE6-4342-B048-85BDC9FD1C3A}</a:tableStyleId>
+              </a:tblPr>
+              <a:tblGrid>
+                <a:gridCol w="1883645">
+                  <a:extLst>
+                    <a:ext uri="{9D8B030D-6E8A-4147-A177-3AD203B41FA5}">
+                      <a16:colId xmlns:a16="http://schemas.microsoft.com/office/drawing/2014/main" val="4008570941"/>
+                    </a:ext>
+                  </a:extLst>
+                </a:gridCol>
+                <a:gridCol w="1875120">
+                  <a:extLst>
+                    <a:ext uri="{9D8B030D-6E8A-4147-A177-3AD203B41FA5}">
+                      <a16:colId xmlns:a16="http://schemas.microsoft.com/office/drawing/2014/main" val="323992706"/>
+                    </a:ext>
+                  </a:extLst>
+                </a:gridCol>
+                <a:gridCol w="1381257">
+                  <a:extLst>
+                    <a:ext uri="{9D8B030D-6E8A-4147-A177-3AD203B41FA5}">
+                      <a16:colId xmlns:a16="http://schemas.microsoft.com/office/drawing/2014/main" val="3738054000"/>
+                    </a:ext>
+                  </a:extLst>
+                </a:gridCol>
+                <a:gridCol w="1524146">
+                  <a:extLst>
+                    <a:ext uri="{9D8B030D-6E8A-4147-A177-3AD203B41FA5}">
+                      <a16:colId xmlns:a16="http://schemas.microsoft.com/office/drawing/2014/main" val="2578734096"/>
+                    </a:ext>
+                  </a:extLst>
+                </a:gridCol>
+                <a:gridCol w="1063726">
+                  <a:extLst>
+                    <a:ext uri="{9D8B030D-6E8A-4147-A177-3AD203B41FA5}">
+                      <a16:colId xmlns:a16="http://schemas.microsoft.com/office/drawing/2014/main" val="2069725364"/>
+                    </a:ext>
+                  </a:extLst>
+                </a:gridCol>
+              </a:tblGrid>
+              <a:tr h="370840">
+                <a:tc>
+                  <a:txBody>
+                    <a:bodyPr/>
+                    <a:lstStyle/>
+                    <a:p>
+                      <a:pPr algn="l" fontAlgn="t" latinLnBrk="0">
+                        <a:buNone/>
+                      </a:pPr>
+                      <a:r>
+                        <a:rPr lang="en-GB" b="0" dirty="0">
+                          <a:effectLst/>
+                        </a:rPr>
+                        <a:t>Model Name</a:t>
+                      </a:r>
+                    </a:p>
+                  </a:txBody>
+                  <a:tcPr marL="76200" marR="76200" marT="76200" marB="76200"/>
+                </a:tc>
+                <a:tc>
+                  <a:txBody>
+                    <a:bodyPr/>
+                    <a:lstStyle/>
+                    <a:p>
+                      <a:pPr algn="l" fontAlgn="t" latinLnBrk="0">
+                        <a:buNone/>
+                      </a:pPr>
+                      <a:r>
+                        <a:rPr lang="en-GB" b="0">
+                          <a:effectLst/>
+                        </a:rPr>
+                        <a:t>CSI Input Size / Channels</a:t>
+                      </a:r>
+                    </a:p>
+                  </a:txBody>
+                  <a:tcPr marL="76200" marR="76200" marT="76200" marB="76200"/>
+                </a:tc>
+                <a:tc>
+                  <a:txBody>
+                    <a:bodyPr/>
+                    <a:lstStyle/>
+                    <a:p>
+                      <a:pPr algn="l" fontAlgn="t" latinLnBrk="0">
+                        <a:buNone/>
+                      </a:pPr>
+                      <a:r>
+                        <a:rPr lang="en-GB" b="0">
+                          <a:effectLst/>
+                        </a:rPr>
+                        <a:t>Meta Features</a:t>
+                      </a:r>
+                    </a:p>
+                  </a:txBody>
+                  <a:tcPr marL="76200" marR="76200" marT="76200" marB="76200"/>
+                </a:tc>
+                <a:tc>
+                  <a:txBody>
+                    <a:bodyPr/>
+                    <a:lstStyle/>
+                    <a:p>
+                      <a:pPr algn="l" fontAlgn="t" latinLnBrk="0">
+                        <a:buNone/>
+                      </a:pPr>
+                      <a:r>
+                        <a:rPr lang="en-GB" b="0">
+                          <a:effectLst/>
+                        </a:rPr>
+                        <a:t>Sequence / Window Size</a:t>
+                      </a:r>
+                    </a:p>
+                  </a:txBody>
+                  <a:tcPr marL="76200" marR="76200" marT="76200" marB="76200"/>
+                </a:tc>
+                <a:tc>
+                  <a:txBody>
+                    <a:bodyPr/>
+                    <a:lstStyle/>
+                    <a:p>
+                      <a:pPr algn="l" fontAlgn="t" latinLnBrk="0">
+                        <a:buNone/>
+                      </a:pPr>
+                      <a:r>
+                        <a:rPr lang="en-GB" b="0">
+                          <a:effectLst/>
+                        </a:rPr>
+                        <a:t>Output Classes</a:t>
+                      </a:r>
+                    </a:p>
+                  </a:txBody>
+                  <a:tcPr marL="76200" marR="76200" marT="76200" marB="76200"/>
+                </a:tc>
+                <a:extLst>
+                  <a:ext uri="{0D108BD9-81ED-4DB2-BD59-A6C34878D82A}">
+                    <a16:rowId xmlns:a16="http://schemas.microsoft.com/office/drawing/2014/main" val="3271397179"/>
+                  </a:ext>
+                </a:extLst>
+              </a:tr>
+              <a:tr h="370840">
+                <a:tc>
+                  <a:txBody>
+                    <a:bodyPr/>
+                    <a:lstStyle/>
+                    <a:p>
+                      <a:pPr fontAlgn="base" latinLnBrk="0">
+                        <a:buNone/>
+                      </a:pPr>
+                      <a:r>
+                        <a:rPr lang="en-GB" sz="1200" b="1" dirty="0" err="1">
+                          <a:effectLst/>
+                          <a:latin typeface="+mn-lt"/>
+                        </a:rPr>
+                        <a:t>CSILSTMNet</a:t>
+                      </a:r>
+                      <a:endParaRPr lang="en-GB" sz="1200" b="1" dirty="0">
+                        <a:effectLst/>
+                        <a:latin typeface="+mn-lt"/>
+                      </a:endParaRPr>
+                    </a:p>
+                  </a:txBody>
+                  <a:tcPr marL="76200" marR="76200" anchor="ctr"/>
+                </a:tc>
+                <a:tc>
+                  <a:txBody>
+                    <a:bodyPr/>
+                    <a:lstStyle/>
+                    <a:p>
+                      <a:pPr fontAlgn="base" latinLnBrk="0">
+                        <a:buNone/>
+                      </a:pPr>
+                      <a:r>
+                        <a:rPr lang="en-GB" sz="1200">
+                          <a:effectLst/>
+                          <a:latin typeface="+mn-lt"/>
+                        </a:rPr>
+                        <a:t>99</a:t>
+                      </a:r>
+                    </a:p>
+                  </a:txBody>
+                  <a:tcPr marL="76200" marR="76200" anchor="ctr"/>
+                </a:tc>
+                <a:tc>
+                  <a:txBody>
+                    <a:bodyPr/>
+                    <a:lstStyle/>
+                    <a:p>
+                      <a:pPr fontAlgn="base" latinLnBrk="0">
+                        <a:buNone/>
+                      </a:pPr>
+                      <a:r>
+                        <a:rPr lang="en-GB" sz="1200">
+                          <a:effectLst/>
+                          <a:latin typeface="+mn-lt"/>
+                        </a:rPr>
+                        <a:t>12</a:t>
+                      </a:r>
+                    </a:p>
+                  </a:txBody>
+                  <a:tcPr marL="76200" marR="76200" anchor="ctr"/>
+                </a:tc>
+                <a:tc>
+                  <a:txBody>
+                    <a:bodyPr/>
+                    <a:lstStyle/>
+                    <a:p>
+                      <a:pPr fontAlgn="base" latinLnBrk="0">
+                        <a:buNone/>
+                      </a:pPr>
+                      <a:r>
+                        <a:rPr lang="en-GB" sz="1200">
+                          <a:effectLst/>
+                          <a:latin typeface="+mn-lt"/>
+                        </a:rPr>
+                        <a:t>128</a:t>
+                      </a:r>
+                    </a:p>
+                  </a:txBody>
+                  <a:tcPr marL="76200" marR="76200" anchor="ctr"/>
+                </a:tc>
+                <a:tc>
+                  <a:txBody>
+                    <a:bodyPr/>
+                    <a:lstStyle/>
+                    <a:p>
+                      <a:pPr fontAlgn="base" latinLnBrk="0">
+                        <a:buNone/>
+                      </a:pPr>
+                      <a:r>
+                        <a:rPr lang="en-GB" sz="1200">
+                          <a:effectLst/>
+                          <a:latin typeface="+mn-lt"/>
+                        </a:rPr>
+                        <a:t>31</a:t>
+                      </a:r>
+                    </a:p>
+                  </a:txBody>
+                  <a:tcPr marL="76200" marR="76200" anchor="ctr"/>
+                </a:tc>
+                <a:extLst>
+                  <a:ext uri="{0D108BD9-81ED-4DB2-BD59-A6C34878D82A}">
+                    <a16:rowId xmlns:a16="http://schemas.microsoft.com/office/drawing/2014/main" val="1267054606"/>
+                  </a:ext>
+                </a:extLst>
+              </a:tr>
+              <a:tr h="370840">
+                <a:tc>
+                  <a:txBody>
+                    <a:bodyPr/>
+                    <a:lstStyle/>
+                    <a:p>
+                      <a:pPr fontAlgn="base" latinLnBrk="0">
+                        <a:buNone/>
+                      </a:pPr>
+                      <a:r>
+                        <a:rPr lang="en-GB" sz="1200" b="1">
+                          <a:effectLst/>
+                          <a:latin typeface="+mn-lt"/>
+                        </a:rPr>
+                        <a:t>DenseNet1D</a:t>
+                      </a:r>
+                    </a:p>
+                  </a:txBody>
+                  <a:tcPr marL="76200" marR="76200" anchor="ctr"/>
+                </a:tc>
+                <a:tc>
+                  <a:txBody>
+                    <a:bodyPr/>
+                    <a:lstStyle/>
+                    <a:p>
+                      <a:pPr fontAlgn="base" latinLnBrk="0">
+                        <a:buNone/>
+                      </a:pPr>
+                      <a:r>
+                        <a:rPr lang="en-GB" sz="1200">
+                          <a:effectLst/>
+                          <a:latin typeface="+mn-lt"/>
+                        </a:rPr>
+                        <a:t>99</a:t>
+                      </a:r>
+                    </a:p>
+                  </a:txBody>
+                  <a:tcPr marL="76200" marR="76200" anchor="ctr"/>
+                </a:tc>
+                <a:tc>
+                  <a:txBody>
+                    <a:bodyPr/>
+                    <a:lstStyle/>
+                    <a:p>
+                      <a:pPr fontAlgn="base" latinLnBrk="0">
+                        <a:buNone/>
+                      </a:pPr>
+                      <a:r>
+                        <a:rPr lang="en-GB" sz="1200">
+                          <a:effectLst/>
+                          <a:latin typeface="+mn-lt"/>
+                        </a:rPr>
+                        <a:t>12</a:t>
+                      </a:r>
+                    </a:p>
+                  </a:txBody>
+                  <a:tcPr marL="76200" marR="76200" anchor="ctr"/>
+                </a:tc>
+                <a:tc>
+                  <a:txBody>
+                    <a:bodyPr/>
+                    <a:lstStyle/>
+                    <a:p>
+                      <a:pPr fontAlgn="base" latinLnBrk="0">
+                        <a:buNone/>
+                      </a:pPr>
+                      <a:r>
+                        <a:rPr lang="en-GB" sz="1200">
+                          <a:effectLst/>
+                          <a:latin typeface="+mn-lt"/>
+                        </a:rPr>
+                        <a:t>—</a:t>
+                      </a:r>
+                    </a:p>
+                  </a:txBody>
+                  <a:tcPr marL="76200" marR="76200" anchor="ctr"/>
+                </a:tc>
+                <a:tc>
+                  <a:txBody>
+                    <a:bodyPr/>
+                    <a:lstStyle/>
+                    <a:p>
+                      <a:pPr fontAlgn="base" latinLnBrk="0">
+                        <a:buNone/>
+                      </a:pPr>
+                      <a:r>
+                        <a:rPr lang="en-GB" sz="1200">
+                          <a:effectLst/>
+                          <a:latin typeface="+mn-lt"/>
+                        </a:rPr>
+                        <a:t>31</a:t>
+                      </a:r>
+                    </a:p>
+                  </a:txBody>
+                  <a:tcPr marL="76200" marR="76200" anchor="ctr"/>
+                </a:tc>
+                <a:extLst>
+                  <a:ext uri="{0D108BD9-81ED-4DB2-BD59-A6C34878D82A}">
+                    <a16:rowId xmlns:a16="http://schemas.microsoft.com/office/drawing/2014/main" val="1890405566"/>
+                  </a:ext>
+                </a:extLst>
+              </a:tr>
+              <a:tr h="370840">
+                <a:tc>
+                  <a:txBody>
+                    <a:bodyPr/>
+                    <a:lstStyle/>
+                    <a:p>
+                      <a:pPr fontAlgn="base" latinLnBrk="0">
+                        <a:buNone/>
+                      </a:pPr>
+                      <a:r>
+                        <a:rPr lang="en-GB" sz="1200" b="1">
+                          <a:effectLst/>
+                          <a:latin typeface="+mn-lt"/>
+                        </a:rPr>
+                        <a:t>EfficientNet1DLSTM</a:t>
+                      </a:r>
+                    </a:p>
+                  </a:txBody>
+                  <a:tcPr marL="76200" marR="76200" anchor="ctr"/>
+                </a:tc>
+                <a:tc>
+                  <a:txBody>
+                    <a:bodyPr/>
+                    <a:lstStyle/>
+                    <a:p>
+                      <a:pPr fontAlgn="base" latinLnBrk="0">
+                        <a:buNone/>
+                      </a:pPr>
+                      <a:r>
+                        <a:rPr lang="en-GB" sz="1200" dirty="0">
+                          <a:effectLst/>
+                          <a:latin typeface="+mn-lt"/>
+                        </a:rPr>
+                        <a:t>99</a:t>
+                      </a:r>
+                    </a:p>
+                  </a:txBody>
+                  <a:tcPr marL="76200" marR="76200" anchor="ctr"/>
+                </a:tc>
+                <a:tc>
+                  <a:txBody>
+                    <a:bodyPr/>
+                    <a:lstStyle/>
+                    <a:p>
+                      <a:pPr fontAlgn="base" latinLnBrk="0">
+                        <a:buNone/>
+                      </a:pPr>
+                      <a:r>
+                        <a:rPr lang="en-GB" sz="1200">
+                          <a:effectLst/>
+                          <a:latin typeface="+mn-lt"/>
+                        </a:rPr>
+                        <a:t>12</a:t>
+                      </a:r>
+                    </a:p>
+                  </a:txBody>
+                  <a:tcPr marL="76200" marR="76200" anchor="ctr"/>
+                </a:tc>
+                <a:tc>
+                  <a:txBody>
+                    <a:bodyPr/>
+                    <a:lstStyle/>
+                    <a:p>
+                      <a:pPr fontAlgn="base" latinLnBrk="0">
+                        <a:buNone/>
+                      </a:pPr>
+                      <a:r>
+                        <a:rPr lang="en-GB" sz="1200">
+                          <a:effectLst/>
+                          <a:latin typeface="+mn-lt"/>
+                        </a:rPr>
+                        <a:t>128</a:t>
+                      </a:r>
+                    </a:p>
+                  </a:txBody>
+                  <a:tcPr marL="76200" marR="76200" anchor="ctr"/>
+                </a:tc>
+                <a:tc>
+                  <a:txBody>
+                    <a:bodyPr/>
+                    <a:lstStyle/>
+                    <a:p>
+                      <a:pPr fontAlgn="base" latinLnBrk="0">
+                        <a:buNone/>
+                      </a:pPr>
+                      <a:r>
+                        <a:rPr lang="en-GB" sz="1200">
+                          <a:effectLst/>
+                          <a:latin typeface="+mn-lt"/>
+                        </a:rPr>
+                        <a:t>31</a:t>
+                      </a:r>
+                    </a:p>
+                  </a:txBody>
+                  <a:tcPr marL="76200" marR="76200" anchor="ctr"/>
+                </a:tc>
+                <a:extLst>
+                  <a:ext uri="{0D108BD9-81ED-4DB2-BD59-A6C34878D82A}">
+                    <a16:rowId xmlns:a16="http://schemas.microsoft.com/office/drawing/2014/main" val="1037789132"/>
+                  </a:ext>
+                </a:extLst>
+              </a:tr>
+              <a:tr h="370840">
+                <a:tc>
+                  <a:txBody>
+                    <a:bodyPr/>
+                    <a:lstStyle/>
+                    <a:p>
+                      <a:pPr fontAlgn="base" latinLnBrk="0">
+                        <a:buNone/>
+                      </a:pPr>
+                      <a:r>
+                        <a:rPr lang="en-GB" sz="1200" b="1" dirty="0">
+                          <a:effectLst/>
+                          <a:latin typeface="+mn-lt"/>
+                        </a:rPr>
+                        <a:t>MobileNetV3_1D_LSTM</a:t>
+                      </a:r>
+                    </a:p>
+                  </a:txBody>
+                  <a:tcPr marL="76200" marR="76200" anchor="ctr"/>
+                </a:tc>
+                <a:tc>
+                  <a:txBody>
+                    <a:bodyPr/>
+                    <a:lstStyle/>
+                    <a:p>
+                      <a:pPr fontAlgn="base" latinLnBrk="0">
+                        <a:buNone/>
+                      </a:pPr>
+                      <a:r>
+                        <a:rPr lang="en-GB" sz="1200">
+                          <a:effectLst/>
+                          <a:latin typeface="+mn-lt"/>
+                        </a:rPr>
+                        <a:t>99</a:t>
+                      </a:r>
+                    </a:p>
+                  </a:txBody>
+                  <a:tcPr marL="76200" marR="76200" anchor="ctr"/>
+                </a:tc>
+                <a:tc>
+                  <a:txBody>
+                    <a:bodyPr/>
+                    <a:lstStyle/>
+                    <a:p>
+                      <a:pPr fontAlgn="base" latinLnBrk="0">
+                        <a:buNone/>
+                      </a:pPr>
+                      <a:r>
+                        <a:rPr lang="en-GB" sz="1200">
+                          <a:effectLst/>
+                          <a:latin typeface="+mn-lt"/>
+                        </a:rPr>
+                        <a:t>12</a:t>
+                      </a:r>
+                    </a:p>
+                  </a:txBody>
+                  <a:tcPr marL="76200" marR="76200" anchor="ctr"/>
+                </a:tc>
+                <a:tc>
+                  <a:txBody>
+                    <a:bodyPr/>
+                    <a:lstStyle/>
+                    <a:p>
+                      <a:pPr fontAlgn="base" latinLnBrk="0">
+                        <a:buNone/>
+                      </a:pPr>
+                      <a:r>
+                        <a:rPr lang="en-GB" sz="1200">
+                          <a:effectLst/>
+                          <a:latin typeface="+mn-lt"/>
+                        </a:rPr>
+                        <a:t>—</a:t>
+                      </a:r>
+                    </a:p>
+                  </a:txBody>
+                  <a:tcPr marL="76200" marR="76200" anchor="ctr"/>
+                </a:tc>
+                <a:tc>
+                  <a:txBody>
+                    <a:bodyPr/>
+                    <a:lstStyle/>
+                    <a:p>
+                      <a:pPr fontAlgn="base" latinLnBrk="0">
+                        <a:buNone/>
+                      </a:pPr>
+                      <a:r>
+                        <a:rPr lang="en-GB" sz="1200" dirty="0">
+                          <a:effectLst/>
+                          <a:latin typeface="+mn-lt"/>
+                        </a:rPr>
+                        <a:t>31</a:t>
+                      </a:r>
+                    </a:p>
+                  </a:txBody>
+                  <a:tcPr marL="76200" marR="76200" anchor="ctr"/>
+                </a:tc>
+                <a:extLst>
+                  <a:ext uri="{0D108BD9-81ED-4DB2-BD59-A6C34878D82A}">
+                    <a16:rowId xmlns:a16="http://schemas.microsoft.com/office/drawing/2014/main" val="2484458502"/>
+                  </a:ext>
+                </a:extLst>
+              </a:tr>
+            </a:tbl>
+          </a:graphicData>
+        </a:graphic>
+      </p:graphicFrame>
+      <p:graphicFrame>
+        <p:nvGraphicFramePr>
+          <p:cNvPr id="3" name="Table 2">
+            <a:extLst>
+              <a:ext uri="{FF2B5EF4-FFF2-40B4-BE49-F238E27FC236}">
+                <a16:creationId xmlns:a16="http://schemas.microsoft.com/office/drawing/2014/main" id="{F278BC98-1CA6-4AC5-D262-E76296193D37}"/>
+              </a:ext>
+            </a:extLst>
+          </p:cNvPr>
+          <p:cNvGraphicFramePr>
+            <a:graphicFrameLocks noGrp="1"/>
+          </p:cNvGraphicFramePr>
+          <p:nvPr>
+            <p:extLst>
+              <p:ext uri="{D42A27DB-BD31-4B8C-83A1-F6EECF244321}">
+                <p14:modId xmlns:p14="http://schemas.microsoft.com/office/powerpoint/2010/main" val="4166918337"/>
+              </p:ext>
+            </p:extLst>
+          </p:nvPr>
+        </p:nvGraphicFramePr>
+        <p:xfrm>
+          <a:off x="606902" y="3800324"/>
+          <a:ext cx="7727894" cy="2225040"/>
+        </p:xfrm>
+        <a:graphic>
+          <a:graphicData uri="http://schemas.openxmlformats.org/drawingml/2006/table">
+            <a:tbl>
+              <a:tblPr firstRow="1" bandRow="1">
+                <a:tableStyleId>{5C22544A-7EE6-4342-B048-85BDC9FD1C3A}</a:tableStyleId>
+              </a:tblPr>
+              <a:tblGrid>
+                <a:gridCol w="3863947">
+                  <a:extLst>
+                    <a:ext uri="{9D8B030D-6E8A-4147-A177-3AD203B41FA5}">
+                      <a16:colId xmlns:a16="http://schemas.microsoft.com/office/drawing/2014/main" val="3398294999"/>
+                    </a:ext>
+                  </a:extLst>
+                </a:gridCol>
+                <a:gridCol w="3863947">
+                  <a:extLst>
+                    <a:ext uri="{9D8B030D-6E8A-4147-A177-3AD203B41FA5}">
+                      <a16:colId xmlns:a16="http://schemas.microsoft.com/office/drawing/2014/main" val="2376096010"/>
+                    </a:ext>
+                  </a:extLst>
+                </a:gridCol>
+              </a:tblGrid>
+              <a:tr h="370840">
+                <a:tc>
+                  <a:txBody>
+                    <a:bodyPr/>
+                    <a:lstStyle/>
+                    <a:p>
+                      <a:r>
+                        <a:rPr lang="en-IN" dirty="0"/>
+                        <a:t>Hyperparameter</a:t>
+                      </a:r>
+                      <a:endParaRPr lang="en-GB" dirty="0"/>
+                    </a:p>
+                  </a:txBody>
+                  <a:tcPr/>
+                </a:tc>
+                <a:tc>
+                  <a:txBody>
+                    <a:bodyPr/>
+                    <a:lstStyle/>
+                    <a:p>
+                      <a:r>
+                        <a:rPr lang="en-IN" dirty="0"/>
+                        <a:t>Values Tested</a:t>
+                      </a:r>
+                      <a:endParaRPr lang="en-GB" dirty="0"/>
+                    </a:p>
+                  </a:txBody>
+                  <a:tcPr/>
+                </a:tc>
+                <a:extLst>
+                  <a:ext uri="{0D108BD9-81ED-4DB2-BD59-A6C34878D82A}">
+                    <a16:rowId xmlns:a16="http://schemas.microsoft.com/office/drawing/2014/main" val="3705606927"/>
+                  </a:ext>
+                </a:extLst>
+              </a:tr>
+              <a:tr h="370840">
+                <a:tc>
+                  <a:txBody>
+                    <a:bodyPr/>
+                    <a:lstStyle/>
+                    <a:p>
+                      <a:r>
+                        <a:rPr lang="en-IN" dirty="0"/>
+                        <a:t>Learning Rate</a:t>
+                      </a:r>
+                      <a:endParaRPr lang="en-GB" dirty="0"/>
+                    </a:p>
+                  </a:txBody>
+                  <a:tcPr/>
+                </a:tc>
+                <a:tc>
+                  <a:txBody>
+                    <a:bodyPr/>
+                    <a:lstStyle/>
+                    <a:p>
+                      <a:r>
+                        <a:rPr lang="en-IN" dirty="0"/>
+                        <a:t>0.001, 0.0005</a:t>
+                      </a:r>
+                      <a:endParaRPr lang="en-GB" dirty="0"/>
+                    </a:p>
+                  </a:txBody>
+                  <a:tcPr/>
+                </a:tc>
+                <a:extLst>
+                  <a:ext uri="{0D108BD9-81ED-4DB2-BD59-A6C34878D82A}">
+                    <a16:rowId xmlns:a16="http://schemas.microsoft.com/office/drawing/2014/main" val="850416615"/>
+                  </a:ext>
+                </a:extLst>
+              </a:tr>
+              <a:tr h="370840">
+                <a:tc>
+                  <a:txBody>
+                    <a:bodyPr/>
+                    <a:lstStyle/>
+                    <a:p>
+                      <a:r>
+                        <a:rPr lang="en-IN" dirty="0"/>
+                        <a:t>Batch Size </a:t>
+                      </a:r>
+                      <a:endParaRPr lang="en-GB" dirty="0"/>
+                    </a:p>
+                  </a:txBody>
+                  <a:tcPr/>
+                </a:tc>
+                <a:tc>
+                  <a:txBody>
+                    <a:bodyPr/>
+                    <a:lstStyle/>
+                    <a:p>
+                      <a:pPr marL="0" marR="0" lvl="0" indent="0" algn="l" defTabSz="457200" rtl="0" eaLnBrk="1" fontAlgn="auto" latinLnBrk="0" hangingPunct="1">
+                        <a:lnSpc>
+                          <a:spcPct val="100000"/>
+                        </a:lnSpc>
+                        <a:spcBef>
+                          <a:spcPts val="0"/>
+                        </a:spcBef>
+                        <a:spcAft>
+                          <a:spcPts val="0"/>
+                        </a:spcAft>
+                        <a:buClrTx/>
+                        <a:buSzTx/>
+                        <a:buFontTx/>
+                        <a:buNone/>
+                        <a:tabLst/>
+                        <a:defRPr/>
+                      </a:pPr>
+                      <a:r>
+                        <a:rPr lang="en-GB" sz="1800" b="0" kern="1200" dirty="0">
+                          <a:solidFill>
+                            <a:schemeClr val="dk1"/>
+                          </a:solidFill>
+                          <a:effectLst/>
+                          <a:latin typeface="+mn-lt"/>
+                          <a:ea typeface="+mn-ea"/>
+                          <a:cs typeface="+mn-cs"/>
+                        </a:rPr>
+                        <a:t>32, 64</a:t>
+                      </a:r>
+                    </a:p>
+                  </a:txBody>
+                  <a:tcPr/>
+                </a:tc>
+                <a:extLst>
+                  <a:ext uri="{0D108BD9-81ED-4DB2-BD59-A6C34878D82A}">
+                    <a16:rowId xmlns:a16="http://schemas.microsoft.com/office/drawing/2014/main" val="3765307749"/>
+                  </a:ext>
+                </a:extLst>
+              </a:tr>
+              <a:tr h="370840">
+                <a:tc>
+                  <a:txBody>
+                    <a:bodyPr/>
+                    <a:lstStyle/>
+                    <a:p>
+                      <a:r>
+                        <a:rPr lang="en-GB" sz="1800" b="0" i="0" kern="1200" dirty="0">
+                          <a:solidFill>
+                            <a:schemeClr val="dk1"/>
+                          </a:solidFill>
+                          <a:effectLst/>
+                          <a:latin typeface="+mn-lt"/>
+                          <a:ea typeface="+mn-ea"/>
+                          <a:cs typeface="+mn-cs"/>
+                        </a:rPr>
+                        <a:t>Optimizer</a:t>
+                      </a:r>
+                      <a:endParaRPr lang="en-GB" dirty="0"/>
+                    </a:p>
+                  </a:txBody>
+                  <a:tcPr/>
+                </a:tc>
+                <a:tc>
+                  <a:txBody>
+                    <a:bodyPr/>
+                    <a:lstStyle/>
+                    <a:p>
+                      <a:r>
+                        <a:rPr lang="en-IN" dirty="0"/>
+                        <a:t>Adam</a:t>
+                      </a:r>
+                      <a:endParaRPr lang="en-GB" dirty="0"/>
+                    </a:p>
+                  </a:txBody>
+                  <a:tcPr/>
+                </a:tc>
+                <a:extLst>
+                  <a:ext uri="{0D108BD9-81ED-4DB2-BD59-A6C34878D82A}">
+                    <a16:rowId xmlns:a16="http://schemas.microsoft.com/office/drawing/2014/main" val="53225989"/>
+                  </a:ext>
+                </a:extLst>
+              </a:tr>
+              <a:tr h="370840">
+                <a:tc>
+                  <a:txBody>
+                    <a:bodyPr/>
+                    <a:lstStyle/>
+                    <a:p>
+                      <a:pPr fontAlgn="base" latinLnBrk="0">
+                        <a:buNone/>
+                      </a:pPr>
+                      <a:r>
+                        <a:rPr lang="en-GB" dirty="0">
+                          <a:effectLst/>
+                        </a:rPr>
+                        <a:t>Weight Decay</a:t>
+                      </a:r>
+                    </a:p>
+                  </a:txBody>
+                  <a:tcPr marL="76200" marR="76200" anchor="ctr"/>
+                </a:tc>
+                <a:tc>
+                  <a:txBody>
+                    <a:bodyPr/>
+                    <a:lstStyle/>
+                    <a:p>
+                      <a:pPr fontAlgn="base" latinLnBrk="0">
+                        <a:buNone/>
+                      </a:pPr>
+                      <a:r>
+                        <a:rPr lang="en-GB" sz="1800" b="0" i="0" kern="1200" dirty="0">
+                          <a:solidFill>
+                            <a:schemeClr val="dk1"/>
+                          </a:solidFill>
+                          <a:effectLst/>
+                          <a:latin typeface="+mn-lt"/>
+                          <a:ea typeface="+mn-ea"/>
+                          <a:cs typeface="+mn-cs"/>
+                        </a:rPr>
+                        <a:t>1e-4</a:t>
+                      </a:r>
+                      <a:endParaRPr lang="en-GB" dirty="0">
+                        <a:effectLst/>
+                      </a:endParaRPr>
+                    </a:p>
+                  </a:txBody>
+                  <a:tcPr marL="76200" marR="76200" anchor="ctr"/>
+                </a:tc>
+                <a:extLst>
+                  <a:ext uri="{0D108BD9-81ED-4DB2-BD59-A6C34878D82A}">
+                    <a16:rowId xmlns:a16="http://schemas.microsoft.com/office/drawing/2014/main" val="2372432037"/>
+                  </a:ext>
+                </a:extLst>
+              </a:tr>
+              <a:tr h="370840">
+                <a:tc>
+                  <a:txBody>
+                    <a:bodyPr/>
+                    <a:lstStyle/>
+                    <a:p>
+                      <a:r>
+                        <a:rPr lang="en-IN" dirty="0"/>
+                        <a:t>Epochs</a:t>
+                      </a:r>
+                      <a:endParaRPr lang="en-GB" dirty="0"/>
+                    </a:p>
+                  </a:txBody>
+                  <a:tcPr/>
+                </a:tc>
+                <a:tc>
+                  <a:txBody>
+                    <a:bodyPr/>
+                    <a:lstStyle/>
+                    <a:p>
+                      <a:r>
+                        <a:rPr lang="en-IN" dirty="0"/>
+                        <a:t>50, 100</a:t>
+                      </a:r>
+                      <a:endParaRPr lang="en-GB" dirty="0"/>
+                    </a:p>
+                  </a:txBody>
+                  <a:tcPr/>
+                </a:tc>
+                <a:extLst>
+                  <a:ext uri="{0D108BD9-81ED-4DB2-BD59-A6C34878D82A}">
+                    <a16:rowId xmlns:a16="http://schemas.microsoft.com/office/drawing/2014/main" val="1293429995"/>
+                  </a:ext>
+                </a:extLst>
+              </a:tr>
+            </a:tbl>
+          </a:graphicData>
+        </a:graphic>
+      </p:graphicFrame>
+      <p:graphicFrame>
+        <p:nvGraphicFramePr>
+          <p:cNvPr id="5" name="Object 4">
+            <a:extLst>
+              <a:ext uri="{FF2B5EF4-FFF2-40B4-BE49-F238E27FC236}">
+                <a16:creationId xmlns:a16="http://schemas.microsoft.com/office/drawing/2014/main" id="{78A5D3C6-8FBA-5A86-C034-06C4A1C45027}"/>
+              </a:ext>
+            </a:extLst>
+          </p:cNvPr>
+          <p:cNvGraphicFramePr>
+            <a:graphicFrameLocks noChangeAspect="1"/>
+          </p:cNvGraphicFramePr>
+          <p:nvPr/>
+        </p:nvGraphicFramePr>
+        <p:xfrm>
+          <a:off x="6202545" y="6086475"/>
+          <a:ext cx="914400" cy="771525"/>
+        </p:xfrm>
+        <a:graphic>
+          <a:graphicData uri="http://schemas.openxmlformats.org/presentationml/2006/ole">
+            <mc:AlternateContent xmlns:mc="http://schemas.openxmlformats.org/markup-compatibility/2006">
+              <mc:Choice xmlns:v="urn:schemas-microsoft-com:vml" Requires="v">
+                <p:oleObj name="Macro-Enabled Worksheet" showAsIcon="1" r:id="rId2" imgW="914400" imgH="771656" progId="Excel.SheetMacroEnabled.12">
+                  <p:embed/>
+                </p:oleObj>
+              </mc:Choice>
+              <mc:Fallback>
+                <p:oleObj name="Macro-Enabled Worksheet" showAsIcon="1" r:id="rId2" imgW="914400" imgH="771656" progId="Excel.SheetMacroEnabled.12">
+                  <p:embed/>
+                  <p:pic>
+                    <p:nvPicPr>
+                      <p:cNvPr id="5" name="Object 4">
+                        <a:extLst>
+                          <a:ext uri="{FF2B5EF4-FFF2-40B4-BE49-F238E27FC236}">
+                            <a16:creationId xmlns:a16="http://schemas.microsoft.com/office/drawing/2014/main" id="{444F33AC-EFEC-546C-5FDB-FD651F66FAD0}"/>
+                          </a:ext>
+                        </a:extLst>
+                      </p:cNvPr>
+                      <p:cNvPicPr/>
+                      <p:nvPr/>
+                    </p:nvPicPr>
+                    <p:blipFill>
+                      <a:blip r:embed="rId3"/>
+                      <a:stretch>
+                        <a:fillRect/>
+                      </a:stretch>
+                    </p:blipFill>
+                    <p:spPr>
+                      <a:xfrm>
+                        <a:off x="6202545" y="6086475"/>
+                        <a:ext cx="914400" cy="771525"/>
+                      </a:xfrm>
+                      <a:prstGeom prst="rect">
+                        <a:avLst/>
+                      </a:prstGeom>
+                    </p:spPr>
+                  </p:pic>
+                </p:oleObj>
+              </mc:Fallback>
+            </mc:AlternateContent>
+          </a:graphicData>
+        </a:graphic>
+      </p:graphicFrame>
+    </p:spTree>
+    <p:extLst>
+      <p:ext uri="{BB962C8B-B14F-4D97-AF65-F5344CB8AC3E}">
+        <p14:creationId xmlns:p14="http://schemas.microsoft.com/office/powerpoint/2010/main" val="255328758"/>
+      </p:ext>
+    </p:extLst>
   </p:cSld>
   <p:clrMapOvr>
     <a:masterClrMapping/>

--- a/docs/MTECH AAI COHORT-1_Human_ID_HAR_Dissertation_Project– Presentation_Phase_2__Eval_3_V1.0.pptx
+++ b/docs/MTECH AAI COHORT-1_Human_ID_HAR_Dissertation_Project– Presentation_Phase_2__Eval_3_V1.0.pptx
@@ -35,7 +35,12 @@
     <p:sldId id="301" r:id="rId29"/>
     <p:sldId id="302" r:id="rId30"/>
     <p:sldId id="303" r:id="rId31"/>
-    <p:sldId id="304" r:id="rId32"/>
+    <p:sldId id="307" r:id="rId32"/>
+    <p:sldId id="304" r:id="rId33"/>
+    <p:sldId id="305" r:id="rId34"/>
+    <p:sldId id="306" r:id="rId35"/>
+    <p:sldId id="308" r:id="rId36"/>
+    <p:sldId id="309" r:id="rId37"/>
   </p:sldIdLst>
   <p:sldSz cx="9144000" cy="6858000" type="screen4x3"/>
   <p:notesSz cx="6858000" cy="9144000"/>
@@ -332,7 +337,7 @@
           <a:p>
             <a:fld id="{5BCAD085-E8A6-8845-BD4E-CB4CCA059FC4}" type="datetimeFigureOut">
               <a:rPr lang="en-US" smtClean="0"/>
-              <a:t>10/21/2025</a:t>
+              <a:t>11/1/2025</a:t>
             </a:fld>
             <a:endParaRPr lang="en-US"/>
           </a:p>
@@ -500,7 +505,7 @@
           <a:p>
             <a:fld id="{5BCAD085-E8A6-8845-BD4E-CB4CCA059FC4}" type="datetimeFigureOut">
               <a:rPr lang="en-US" smtClean="0"/>
-              <a:t>10/21/2025</a:t>
+              <a:t>11/1/2025</a:t>
             </a:fld>
             <a:endParaRPr lang="en-US"/>
           </a:p>
@@ -678,7 +683,7 @@
           <a:p>
             <a:fld id="{5BCAD085-E8A6-8845-BD4E-CB4CCA059FC4}" type="datetimeFigureOut">
               <a:rPr lang="en-US" smtClean="0"/>
-              <a:t>10/21/2025</a:t>
+              <a:t>11/1/2025</a:t>
             </a:fld>
             <a:endParaRPr lang="en-US"/>
           </a:p>
@@ -846,7 +851,7 @@
           <a:p>
             <a:fld id="{5BCAD085-E8A6-8845-BD4E-CB4CCA059FC4}" type="datetimeFigureOut">
               <a:rPr lang="en-US" smtClean="0"/>
-              <a:t>10/21/2025</a:t>
+              <a:t>11/1/2025</a:t>
             </a:fld>
             <a:endParaRPr lang="en-US"/>
           </a:p>
@@ -1091,7 +1096,7 @@
           <a:p>
             <a:fld id="{5BCAD085-E8A6-8845-BD4E-CB4CCA059FC4}" type="datetimeFigureOut">
               <a:rPr lang="en-US" smtClean="0"/>
-              <a:t>10/21/2025</a:t>
+              <a:t>11/1/2025</a:t>
             </a:fld>
             <a:endParaRPr lang="en-US"/>
           </a:p>
@@ -1376,7 +1381,7 @@
           <a:p>
             <a:fld id="{5BCAD085-E8A6-8845-BD4E-CB4CCA059FC4}" type="datetimeFigureOut">
               <a:rPr lang="en-US" smtClean="0"/>
-              <a:t>10/21/2025</a:t>
+              <a:t>11/1/2025</a:t>
             </a:fld>
             <a:endParaRPr lang="en-US"/>
           </a:p>
@@ -1795,7 +1800,7 @@
           <a:p>
             <a:fld id="{5BCAD085-E8A6-8845-BD4E-CB4CCA059FC4}" type="datetimeFigureOut">
               <a:rPr lang="en-US" smtClean="0"/>
-              <a:t>10/21/2025</a:t>
+              <a:t>11/1/2025</a:t>
             </a:fld>
             <a:endParaRPr lang="en-US"/>
           </a:p>
@@ -1912,7 +1917,7 @@
           <a:p>
             <a:fld id="{5BCAD085-E8A6-8845-BD4E-CB4CCA059FC4}" type="datetimeFigureOut">
               <a:rPr lang="en-US" smtClean="0"/>
-              <a:t>10/21/2025</a:t>
+              <a:t>11/1/2025</a:t>
             </a:fld>
             <a:endParaRPr lang="en-US"/>
           </a:p>
@@ -2007,7 +2012,7 @@
           <a:p>
             <a:fld id="{5BCAD085-E8A6-8845-BD4E-CB4CCA059FC4}" type="datetimeFigureOut">
               <a:rPr lang="en-US" smtClean="0"/>
-              <a:t>10/21/2025</a:t>
+              <a:t>11/1/2025</a:t>
             </a:fld>
             <a:endParaRPr lang="en-US"/>
           </a:p>
@@ -2282,7 +2287,7 @@
           <a:p>
             <a:fld id="{5BCAD085-E8A6-8845-BD4E-CB4CCA059FC4}" type="datetimeFigureOut">
               <a:rPr lang="en-US" smtClean="0"/>
-              <a:t>10/21/2025</a:t>
+              <a:t>11/1/2025</a:t>
             </a:fld>
             <a:endParaRPr lang="en-US"/>
           </a:p>
@@ -2534,7 +2539,7 @@
           <a:p>
             <a:fld id="{5BCAD085-E8A6-8845-BD4E-CB4CCA059FC4}" type="datetimeFigureOut">
               <a:rPr lang="en-US" smtClean="0"/>
-              <a:t>10/21/2025</a:t>
+              <a:t>11/1/2025</a:t>
             </a:fld>
             <a:endParaRPr lang="en-US"/>
           </a:p>
@@ -2745,7 +2750,7 @@
           <a:p>
             <a:fld id="{5BCAD085-E8A6-8845-BD4E-CB4CCA059FC4}" type="datetimeFigureOut">
               <a:rPr lang="en-US" smtClean="0"/>
-              <a:t>10/21/2025</a:t>
+              <a:t>11/1/2025</a:t>
             </a:fld>
             <a:endParaRPr lang="en-US"/>
           </a:p>
@@ -8505,11 +8510,18 @@
               <a:buChar char="•"/>
             </a:pPr>
             <a:r>
+              <a:rPr lang="en-GB" b="1" i="0" dirty="0">
+                <a:effectLst/>
+                <a:latin typeface="fkGroteskNeue"/>
+              </a:rPr>
+              <a:t>Objective</a:t>
+            </a:r>
+            <a:r>
               <a:rPr lang="en-GB" b="0" i="0" dirty="0">
                 <a:effectLst/>
                 <a:latin typeface="fkGroteskNeue"/>
               </a:rPr>
-              <a:t>Objective: Evaluate four DL models on experiment data using two learning rates (0.001, 0.0005)</a:t>
+              <a:t>: Evaluate four DL models on experiment data using two learning rates (0.001, 0.0005)</a:t>
             </a:r>
           </a:p>
           <a:p>
@@ -9709,7 +9721,7 @@
           <a:p>
             <a:r>
               <a:rPr lang="en-GB" sz="3600" dirty="0"/>
-              <a:t>Experimental Hyperparameter Configuration and Grid Sampling Strategy</a:t>
+              <a:t>Experiment-1 </a:t>
             </a:r>
           </a:p>
         </p:txBody>
@@ -10604,69 +10616,6 @@
           </a:graphicData>
         </a:graphic>
       </p:graphicFrame>
-      <p:graphicFrame>
-        <p:nvGraphicFramePr>
-          <p:cNvPr id="5" name="Object 4">
-            <a:extLst>
-              <a:ext uri="{FF2B5EF4-FFF2-40B4-BE49-F238E27FC236}">
-                <a16:creationId xmlns:a16="http://schemas.microsoft.com/office/drawing/2014/main" id="{444F33AC-EFEC-546C-5FDB-FD651F66FAD0}"/>
-              </a:ext>
-            </a:extLst>
-          </p:cNvPr>
-          <p:cNvGraphicFramePr>
-            <a:graphicFrameLocks noChangeAspect="1"/>
-          </p:cNvGraphicFramePr>
-          <p:nvPr>
-            <p:extLst>
-              <p:ext uri="{D42A27DB-BD31-4B8C-83A1-F6EECF244321}">
-                <p14:modId xmlns:p14="http://schemas.microsoft.com/office/powerpoint/2010/main" val="3387111536"/>
-              </p:ext>
-            </p:extLst>
-          </p:nvPr>
-        </p:nvGraphicFramePr>
-        <p:xfrm>
-          <a:off x="6202545" y="6086475"/>
-          <a:ext cx="914400" cy="771525"/>
-        </p:xfrm>
-        <a:graphic>
-          <a:graphicData uri="http://schemas.openxmlformats.org/presentationml/2006/ole">
-            <mc:AlternateContent xmlns:mc="http://schemas.openxmlformats.org/markup-compatibility/2006">
-              <mc:Choice xmlns:v="urn:schemas-microsoft-com:vml" Requires="v">
-                <p:oleObj name="Macro-Enabled Worksheet" showAsIcon="1" r:id="rId2" imgW="914400" imgH="771656" progId="Excel.SheetMacroEnabled.12">
-                  <p:embed/>
-                </p:oleObj>
-              </mc:Choice>
-              <mc:Fallback>
-                <p:oleObj name="Macro-Enabled Worksheet" showAsIcon="1" r:id="rId2" imgW="914400" imgH="771656" progId="Excel.SheetMacroEnabled.12">
-                  <p:embed/>
-                  <p:pic>
-                    <p:nvPicPr>
-                      <p:cNvPr id="0" name=""/>
-                      <p:cNvPicPr/>
-                      <p:nvPr/>
-                    </p:nvPicPr>
-                    <p:blipFill>
-                      <a:blip r:embed="rId3"/>
-                      <a:stretch>
-                        <a:fillRect/>
-                      </a:stretch>
-                    </p:blipFill>
-                    <p:spPr>
-                      <a:xfrm>
-                        <a:off x="6202545" y="6086475"/>
-                        <a:ext cx="914400" cy="771525"/>
-                      </a:xfrm>
-                      <a:prstGeom prst="rect">
-                        <a:avLst/>
-                      </a:prstGeom>
-                    </p:spPr>
-                  </p:pic>
-                </p:oleObj>
-              </mc:Fallback>
-            </mc:AlternateContent>
-          </a:graphicData>
-        </a:graphic>
-      </p:graphicFrame>
     </p:spTree>
     <p:extLst>
       <p:ext uri="{BB962C8B-B14F-4D97-AF65-F5344CB8AC3E}">
@@ -10843,9 +10792,15 @@
         <p:spPr/>
         <p:txBody>
           <a:bodyPr>
-            <a:normAutofit fontScale="47500" lnSpcReduction="20000"/>
+            <a:normAutofit fontScale="40000" lnSpcReduction="20000"/>
           </a:bodyPr>
           <a:lstStyle/>
+          <a:p>
+            <a:endParaRPr lang="en-GB" b="1" dirty="0"/>
+          </a:p>
+          <a:p>
+            <a:endParaRPr lang="en-GB" b="1" dirty="0"/>
+          </a:p>
           <a:p>
             <a:r>
               <a:rPr lang="en-GB" b="1" dirty="0"/>
@@ -11055,6 +11010,144 @@
           </a:p>
         </p:txBody>
       </p:sp>
+      <p:graphicFrame>
+        <p:nvGraphicFramePr>
+          <p:cNvPr id="4" name="Object 3">
+            <a:extLst>
+              <a:ext uri="{FF2B5EF4-FFF2-40B4-BE49-F238E27FC236}">
+                <a16:creationId xmlns:a16="http://schemas.microsoft.com/office/drawing/2014/main" id="{78B00F93-CBFD-5BF3-732A-8DA51C0DCCBF}"/>
+              </a:ext>
+            </a:extLst>
+          </p:cNvPr>
+          <p:cNvGraphicFramePr>
+            <a:graphicFrameLocks noChangeAspect="1"/>
+          </p:cNvGraphicFramePr>
+          <p:nvPr>
+            <p:extLst>
+              <p:ext uri="{D42A27DB-BD31-4B8C-83A1-F6EECF244321}">
+                <p14:modId xmlns:p14="http://schemas.microsoft.com/office/powerpoint/2010/main" val="3955911131"/>
+              </p:ext>
+            </p:extLst>
+          </p:nvPr>
+        </p:nvGraphicFramePr>
+        <p:xfrm>
+          <a:off x="7288395" y="1600200"/>
+          <a:ext cx="914400" cy="771525"/>
+        </p:xfrm>
+        <a:graphic>
+          <a:graphicData uri="http://schemas.openxmlformats.org/presentationml/2006/ole">
+            <mc:AlternateContent xmlns:mc="http://schemas.openxmlformats.org/markup-compatibility/2006">
+              <mc:Choice xmlns:v="urn:schemas-microsoft-com:vml" Requires="v">
+                <p:oleObj name="Macro-Enabled Worksheet" showAsIcon="1" r:id="rId2" imgW="914400" imgH="771656" progId="Excel.SheetMacroEnabled.12">
+                  <p:embed/>
+                </p:oleObj>
+              </mc:Choice>
+              <mc:Fallback>
+                <p:oleObj name="Macro-Enabled Worksheet" showAsIcon="1" r:id="rId2" imgW="914400" imgH="771656" progId="Excel.SheetMacroEnabled.12">
+                  <p:embed/>
+                  <p:pic>
+                    <p:nvPicPr>
+                      <p:cNvPr id="4" name="Object 3">
+                        <a:extLst>
+                          <a:ext uri="{FF2B5EF4-FFF2-40B4-BE49-F238E27FC236}">
+                            <a16:creationId xmlns:a16="http://schemas.microsoft.com/office/drawing/2014/main" id="{78B00F93-CBFD-5BF3-732A-8DA51C0DCCBF}"/>
+                          </a:ext>
+                        </a:extLst>
+                      </p:cNvPr>
+                      <p:cNvPicPr/>
+                      <p:nvPr/>
+                    </p:nvPicPr>
+                    <p:blipFill>
+                      <a:blip r:embed="rId3"/>
+                      <a:stretch>
+                        <a:fillRect/>
+                      </a:stretch>
+                    </p:blipFill>
+                    <p:spPr>
+                      <a:xfrm>
+                        <a:off x="7288395" y="1600200"/>
+                        <a:ext cx="914400" cy="771525"/>
+                      </a:xfrm>
+                      <a:prstGeom prst="rect">
+                        <a:avLst/>
+                      </a:prstGeom>
+                    </p:spPr>
+                  </p:pic>
+                </p:oleObj>
+              </mc:Fallback>
+            </mc:AlternateContent>
+          </a:graphicData>
+        </a:graphic>
+      </p:graphicFrame>
+      <p:graphicFrame>
+        <p:nvGraphicFramePr>
+          <p:cNvPr id="5" name="Object 4">
+            <a:extLst>
+              <a:ext uri="{FF2B5EF4-FFF2-40B4-BE49-F238E27FC236}">
+                <a16:creationId xmlns:a16="http://schemas.microsoft.com/office/drawing/2014/main" id="{095D5053-3A95-7D76-584C-0C896AE7FBB5}"/>
+              </a:ext>
+            </a:extLst>
+          </p:cNvPr>
+          <p:cNvGraphicFramePr>
+            <a:graphicFrameLocks noChangeAspect="1"/>
+          </p:cNvGraphicFramePr>
+          <p:nvPr>
+            <p:extLst>
+              <p:ext uri="{D42A27DB-BD31-4B8C-83A1-F6EECF244321}">
+                <p14:modId xmlns:p14="http://schemas.microsoft.com/office/powerpoint/2010/main" val="1725842378"/>
+              </p:ext>
+            </p:extLst>
+          </p:nvPr>
+        </p:nvGraphicFramePr>
+        <p:xfrm>
+          <a:off x="7181850" y="2657475"/>
+          <a:ext cx="914400" cy="771525"/>
+        </p:xfrm>
+        <a:graphic>
+          <a:graphicData uri="http://schemas.openxmlformats.org/presentationml/2006/ole">
+            <mc:AlternateContent xmlns:mc="http://schemas.openxmlformats.org/markup-compatibility/2006">
+              <mc:Choice xmlns:v="urn:schemas-microsoft-com:vml" Requires="v">
+                <p:oleObj name="Packager Shell Object" showAsIcon="1" r:id="rId4" imgW="914400" imgH="771656" progId="Package">
+                  <p:embed/>
+                </p:oleObj>
+              </mc:Choice>
+              <mc:Fallback>
+                <p:oleObj name="Packager Shell Object" showAsIcon="1" r:id="rId4" imgW="914400" imgH="771656" progId="Package">
+                  <p:embed/>
+                  <p:pic>
+                    <p:nvPicPr>
+                      <p:cNvPr id="5" name="Object 4">
+                        <a:extLst>
+                          <a:ext uri="{FF2B5EF4-FFF2-40B4-BE49-F238E27FC236}">
+                            <a16:creationId xmlns:a16="http://schemas.microsoft.com/office/drawing/2014/main" id="{095D5053-3A95-7D76-584C-0C896AE7FBB5}"/>
+                          </a:ext>
+                        </a:extLst>
+                      </p:cNvPr>
+                      <p:cNvPicPr/>
+                      <p:nvPr/>
+                    </p:nvPicPr>
+                    <p:blipFill>
+                      <a:blip r:embed="rId5"/>
+                      <a:stretch>
+                        <a:fillRect/>
+                      </a:stretch>
+                    </p:blipFill>
+                    <p:spPr>
+                      <a:xfrm>
+                        <a:off x="7181850" y="2657475"/>
+                        <a:ext cx="914400" cy="771525"/>
+                      </a:xfrm>
+                      <a:prstGeom prst="rect">
+                        <a:avLst/>
+                      </a:prstGeom>
+                    </p:spPr>
+                  </p:pic>
+                </p:oleObj>
+              </mc:Fallback>
+            </mc:AlternateContent>
+          </a:graphicData>
+        </a:graphic>
+      </p:graphicFrame>
     </p:spTree>
     <p:extLst>
       <p:ext uri="{BB962C8B-B14F-4D97-AF65-F5344CB8AC3E}">
@@ -11069,6 +11162,1166 @@
 </file>
 
 <file path=ppt/slides/slide31.xml><?xml version="1.0" encoding="utf-8"?>
+<p:sld xmlns:a="http://schemas.openxmlformats.org/drawingml/2006/main" xmlns:r="http://schemas.openxmlformats.org/officeDocument/2006/relationships" xmlns:p="http://schemas.openxmlformats.org/presentationml/2006/main">
+  <p:cSld>
+    <p:spTree>
+      <p:nvGrpSpPr>
+        <p:cNvPr id="1" name="">
+          <a:extLst>
+            <a:ext uri="{FF2B5EF4-FFF2-40B4-BE49-F238E27FC236}">
+              <a16:creationId xmlns:a16="http://schemas.microsoft.com/office/drawing/2014/main" id="{9C756BBB-EAA3-B8BB-658C-2F999A5D24D6}"/>
+            </a:ext>
+          </a:extLst>
+        </p:cNvPr>
+        <p:cNvGrpSpPr/>
+        <p:nvPr/>
+      </p:nvGrpSpPr>
+      <p:grpSpPr>
+        <a:xfrm>
+          <a:off x="0" y="0"/>
+          <a:ext cx="0" cy="0"/>
+          <a:chOff x="0" y="0"/>
+          <a:chExt cx="0" cy="0"/>
+        </a:xfrm>
+      </p:grpSpPr>
+      <p:sp>
+        <p:nvSpPr>
+          <p:cNvPr id="2" name="Title 1">
+            <a:extLst>
+              <a:ext uri="{FF2B5EF4-FFF2-40B4-BE49-F238E27FC236}">
+                <a16:creationId xmlns:a16="http://schemas.microsoft.com/office/drawing/2014/main" id="{D99EE912-0FBF-EF85-87AD-721115DF442B}"/>
+              </a:ext>
+            </a:extLst>
+          </p:cNvPr>
+          <p:cNvSpPr>
+            <a:spLocks noGrp="1"/>
+          </p:cNvSpPr>
+          <p:nvPr>
+            <p:ph type="title"/>
+          </p:nvPr>
+        </p:nvSpPr>
+        <p:spPr>
+          <a:xfrm>
+            <a:off x="457200" y="274638"/>
+            <a:ext cx="8229600" cy="721092"/>
+          </a:xfrm>
+        </p:spPr>
+        <p:txBody>
+          <a:bodyPr>
+            <a:noAutofit/>
+          </a:bodyPr>
+          <a:lstStyle/>
+          <a:p>
+            <a:r>
+              <a:rPr lang="en-GB" dirty="0"/>
+              <a:t>ML Training &amp; Validation Summary</a:t>
+            </a:r>
+            <a:endParaRPr lang="en-GB" sz="3600" dirty="0"/>
+          </a:p>
+        </p:txBody>
+      </p:sp>
+      <p:sp>
+        <p:nvSpPr>
+          <p:cNvPr id="3" name="Content Placeholder 2">
+            <a:extLst>
+              <a:ext uri="{FF2B5EF4-FFF2-40B4-BE49-F238E27FC236}">
+                <a16:creationId xmlns:a16="http://schemas.microsoft.com/office/drawing/2014/main" id="{48B0AF41-D408-F462-03D9-25D282D6B53F}"/>
+              </a:ext>
+            </a:extLst>
+          </p:cNvPr>
+          <p:cNvSpPr>
+            <a:spLocks noGrp="1"/>
+          </p:cNvSpPr>
+          <p:nvPr>
+            <p:ph idx="1"/>
+          </p:nvPr>
+        </p:nvSpPr>
+        <p:spPr>
+          <a:xfrm>
+            <a:off x="457201" y="1440383"/>
+            <a:ext cx="3936774" cy="2419518"/>
+          </a:xfrm>
+          <a:solidFill>
+            <a:schemeClr val="bg2"/>
+          </a:solidFill>
+        </p:spPr>
+        <p:txBody>
+          <a:bodyPr>
+            <a:normAutofit fontScale="47500" lnSpcReduction="20000"/>
+          </a:bodyPr>
+          <a:lstStyle/>
+          <a:p>
+            <a:pPr marL="0" indent="0">
+              <a:buNone/>
+            </a:pPr>
+            <a:r>
+              <a:rPr lang="en-GB" b="1" dirty="0"/>
+              <a:t>Best Performing Model &amp; Hyperparameters</a:t>
+            </a:r>
+          </a:p>
+          <a:p>
+            <a:r>
+              <a:rPr lang="en-GB" b="1" dirty="0"/>
+              <a:t>Model</a:t>
+            </a:r>
+            <a:r>
+              <a:rPr lang="en-GB" dirty="0"/>
+              <a:t>: MobileNetV3_1D_LSTM</a:t>
+            </a:r>
+          </a:p>
+          <a:p>
+            <a:r>
+              <a:rPr lang="en-GB" b="1" dirty="0"/>
+              <a:t>Val Accuracy</a:t>
+            </a:r>
+            <a:r>
+              <a:rPr lang="en-GB" dirty="0"/>
+              <a:t>: 0.9876</a:t>
+            </a:r>
+          </a:p>
+          <a:p>
+            <a:r>
+              <a:rPr lang="en-GB" b="1" dirty="0"/>
+              <a:t>Val F1</a:t>
+            </a:r>
+            <a:r>
+              <a:rPr lang="en-GB" dirty="0"/>
+              <a:t>: 0.9876</a:t>
+            </a:r>
+          </a:p>
+          <a:p>
+            <a:r>
+              <a:rPr lang="en-GB" b="1" dirty="0"/>
+              <a:t>Hyperparameters</a:t>
+            </a:r>
+            <a:r>
+              <a:rPr lang="en-GB" dirty="0"/>
+              <a:t>:</a:t>
+            </a:r>
+          </a:p>
+          <a:p>
+            <a:pPr lvl="1"/>
+            <a:r>
+              <a:rPr lang="en-GB" b="1" dirty="0"/>
+              <a:t>Learning Rate</a:t>
+            </a:r>
+            <a:r>
+              <a:rPr lang="en-GB" dirty="0"/>
+              <a:t>: 0.0005</a:t>
+            </a:r>
+          </a:p>
+          <a:p>
+            <a:pPr lvl="1"/>
+            <a:r>
+              <a:rPr lang="en-GB" b="1" dirty="0"/>
+              <a:t>Batch Size</a:t>
+            </a:r>
+            <a:r>
+              <a:rPr lang="en-GB" dirty="0"/>
+              <a:t>: 64</a:t>
+            </a:r>
+          </a:p>
+          <a:p>
+            <a:pPr lvl="1"/>
+            <a:r>
+              <a:rPr lang="en-GB" b="1" dirty="0"/>
+              <a:t>Optimizer</a:t>
+            </a:r>
+            <a:r>
+              <a:rPr lang="en-GB" dirty="0"/>
+              <a:t>: Adam</a:t>
+            </a:r>
+          </a:p>
+          <a:p>
+            <a:pPr lvl="1"/>
+            <a:r>
+              <a:rPr lang="en-GB" b="1" dirty="0"/>
+              <a:t>Weight Decay</a:t>
+            </a:r>
+            <a:r>
+              <a:rPr lang="en-GB" dirty="0"/>
+              <a:t>: 1e-05</a:t>
+            </a:r>
+          </a:p>
+          <a:p>
+            <a:pPr lvl="1"/>
+            <a:r>
+              <a:rPr lang="en-GB" b="1" dirty="0"/>
+              <a:t>Epochs</a:t>
+            </a:r>
+            <a:r>
+              <a:rPr lang="en-GB" dirty="0"/>
+              <a:t>: 10</a:t>
+            </a:r>
+          </a:p>
+        </p:txBody>
+      </p:sp>
+      <p:sp>
+        <p:nvSpPr>
+          <p:cNvPr id="6" name="Content Placeholder 2">
+            <a:extLst>
+              <a:ext uri="{FF2B5EF4-FFF2-40B4-BE49-F238E27FC236}">
+                <a16:creationId xmlns:a16="http://schemas.microsoft.com/office/drawing/2014/main" id="{DE21E2CF-91DF-1B9B-8F47-EADA35679CD6}"/>
+              </a:ext>
+            </a:extLst>
+          </p:cNvPr>
+          <p:cNvSpPr txBox="1">
+            <a:spLocks/>
+          </p:cNvSpPr>
+          <p:nvPr/>
+        </p:nvSpPr>
+        <p:spPr>
+          <a:xfrm>
+            <a:off x="4602764" y="1440384"/>
+            <a:ext cx="4073246" cy="2419518"/>
+          </a:xfrm>
+          <a:prstGeom prst="rect">
+            <a:avLst/>
+          </a:prstGeom>
+          <a:solidFill>
+            <a:schemeClr val="bg1">
+              <a:lumMod val="95000"/>
+            </a:schemeClr>
+          </a:solidFill>
+        </p:spPr>
+        <p:txBody>
+          <a:bodyPr vert="horz" lIns="91440" tIns="45720" rIns="91440" bIns="45720" rtlCol="0">
+            <a:normAutofit fontScale="40000" lnSpcReduction="20000"/>
+          </a:bodyPr>
+          <a:lstStyle>
+            <a:lvl1pPr marL="342900" indent="-342900" algn="l" defTabSz="457200" rtl="0" eaLnBrk="1" latinLnBrk="0" hangingPunct="1">
+              <a:spcBef>
+                <a:spcPct val="20000"/>
+              </a:spcBef>
+              <a:buFont typeface="Arial"/>
+              <a:buChar char="•"/>
+              <a:defRPr sz="3200" kern="1200">
+                <a:solidFill>
+                  <a:schemeClr val="tx1"/>
+                </a:solidFill>
+                <a:latin typeface="+mn-lt"/>
+                <a:ea typeface="+mn-ea"/>
+                <a:cs typeface="+mn-cs"/>
+              </a:defRPr>
+            </a:lvl1pPr>
+            <a:lvl2pPr marL="742950" indent="-285750" algn="l" defTabSz="457200" rtl="0" eaLnBrk="1" latinLnBrk="0" hangingPunct="1">
+              <a:spcBef>
+                <a:spcPct val="20000"/>
+              </a:spcBef>
+              <a:buFont typeface="Arial"/>
+              <a:buChar char="–"/>
+              <a:defRPr sz="2800" kern="1200">
+                <a:solidFill>
+                  <a:schemeClr val="tx1"/>
+                </a:solidFill>
+                <a:latin typeface="+mn-lt"/>
+                <a:ea typeface="+mn-ea"/>
+                <a:cs typeface="+mn-cs"/>
+              </a:defRPr>
+            </a:lvl2pPr>
+            <a:lvl3pPr marL="1143000" indent="-228600" algn="l" defTabSz="457200" rtl="0" eaLnBrk="1" latinLnBrk="0" hangingPunct="1">
+              <a:spcBef>
+                <a:spcPct val="20000"/>
+              </a:spcBef>
+              <a:buFont typeface="Arial"/>
+              <a:buChar char="•"/>
+              <a:defRPr sz="2400" kern="1200">
+                <a:solidFill>
+                  <a:schemeClr val="tx1"/>
+                </a:solidFill>
+                <a:latin typeface="+mn-lt"/>
+                <a:ea typeface="+mn-ea"/>
+                <a:cs typeface="+mn-cs"/>
+              </a:defRPr>
+            </a:lvl3pPr>
+            <a:lvl4pPr marL="1600200" indent="-228600" algn="l" defTabSz="457200" rtl="0" eaLnBrk="1" latinLnBrk="0" hangingPunct="1">
+              <a:spcBef>
+                <a:spcPct val="20000"/>
+              </a:spcBef>
+              <a:buFont typeface="Arial"/>
+              <a:buChar char="–"/>
+              <a:defRPr sz="2000" kern="1200">
+                <a:solidFill>
+                  <a:schemeClr val="tx1"/>
+                </a:solidFill>
+                <a:latin typeface="+mn-lt"/>
+                <a:ea typeface="+mn-ea"/>
+                <a:cs typeface="+mn-cs"/>
+              </a:defRPr>
+            </a:lvl4pPr>
+            <a:lvl5pPr marL="2057400" indent="-228600" algn="l" defTabSz="457200" rtl="0" eaLnBrk="1" latinLnBrk="0" hangingPunct="1">
+              <a:spcBef>
+                <a:spcPct val="20000"/>
+              </a:spcBef>
+              <a:buFont typeface="Arial"/>
+              <a:buChar char="»"/>
+              <a:defRPr sz="2000" kern="1200">
+                <a:solidFill>
+                  <a:schemeClr val="tx1"/>
+                </a:solidFill>
+                <a:latin typeface="+mn-lt"/>
+                <a:ea typeface="+mn-ea"/>
+                <a:cs typeface="+mn-cs"/>
+              </a:defRPr>
+            </a:lvl5pPr>
+            <a:lvl6pPr marL="2514600" indent="-228600" algn="l" defTabSz="457200" rtl="0" eaLnBrk="1" latinLnBrk="0" hangingPunct="1">
+              <a:spcBef>
+                <a:spcPct val="20000"/>
+              </a:spcBef>
+              <a:buFont typeface="Arial"/>
+              <a:buChar char="•"/>
+              <a:defRPr sz="2000" kern="1200">
+                <a:solidFill>
+                  <a:schemeClr val="tx1"/>
+                </a:solidFill>
+                <a:latin typeface="+mn-lt"/>
+                <a:ea typeface="+mn-ea"/>
+                <a:cs typeface="+mn-cs"/>
+              </a:defRPr>
+            </a:lvl6pPr>
+            <a:lvl7pPr marL="2971800" indent="-228600" algn="l" defTabSz="457200" rtl="0" eaLnBrk="1" latinLnBrk="0" hangingPunct="1">
+              <a:spcBef>
+                <a:spcPct val="20000"/>
+              </a:spcBef>
+              <a:buFont typeface="Arial"/>
+              <a:buChar char="•"/>
+              <a:defRPr sz="2000" kern="1200">
+                <a:solidFill>
+                  <a:schemeClr val="tx1"/>
+                </a:solidFill>
+                <a:latin typeface="+mn-lt"/>
+                <a:ea typeface="+mn-ea"/>
+                <a:cs typeface="+mn-cs"/>
+              </a:defRPr>
+            </a:lvl7pPr>
+            <a:lvl8pPr marL="3429000" indent="-228600" algn="l" defTabSz="457200" rtl="0" eaLnBrk="1" latinLnBrk="0" hangingPunct="1">
+              <a:spcBef>
+                <a:spcPct val="20000"/>
+              </a:spcBef>
+              <a:buFont typeface="Arial"/>
+              <a:buChar char="•"/>
+              <a:defRPr sz="2000" kern="1200">
+                <a:solidFill>
+                  <a:schemeClr val="tx1"/>
+                </a:solidFill>
+                <a:latin typeface="+mn-lt"/>
+                <a:ea typeface="+mn-ea"/>
+                <a:cs typeface="+mn-cs"/>
+              </a:defRPr>
+            </a:lvl8pPr>
+            <a:lvl9pPr marL="3886200" indent="-228600" algn="l" defTabSz="457200" rtl="0" eaLnBrk="1" latinLnBrk="0" hangingPunct="1">
+              <a:spcBef>
+                <a:spcPct val="20000"/>
+              </a:spcBef>
+              <a:buFont typeface="Arial"/>
+              <a:buChar char="•"/>
+              <a:defRPr sz="2000" kern="1200">
+                <a:solidFill>
+                  <a:schemeClr val="tx1"/>
+                </a:solidFill>
+                <a:latin typeface="+mn-lt"/>
+                <a:ea typeface="+mn-ea"/>
+                <a:cs typeface="+mn-cs"/>
+              </a:defRPr>
+            </a:lvl9pPr>
+          </a:lstStyle>
+          <a:p>
+            <a:pPr marL="0" indent="0">
+              <a:buNone/>
+            </a:pPr>
+            <a:r>
+              <a:rPr lang="en-GB" b="1" dirty="0"/>
+              <a:t>⚠️Combinations That Did Not Work</a:t>
+            </a:r>
+          </a:p>
+          <a:p>
+            <a:r>
+              <a:rPr lang="en-GB" dirty="0"/>
+              <a:t>Many runs with:</a:t>
+            </a:r>
+          </a:p>
+          <a:p>
+            <a:pPr lvl="1"/>
+            <a:r>
+              <a:rPr lang="en-GB" b="1" dirty="0"/>
+              <a:t>Batch Size</a:t>
+            </a:r>
+            <a:r>
+              <a:rPr lang="en-GB" dirty="0"/>
+              <a:t> = 128</a:t>
+            </a:r>
+          </a:p>
+          <a:p>
+            <a:pPr lvl="1"/>
+            <a:r>
+              <a:rPr lang="en-GB" b="1" dirty="0"/>
+              <a:t>SGD</a:t>
+            </a:r>
+            <a:r>
+              <a:rPr lang="en-GB" dirty="0"/>
+              <a:t> optimizer, or </a:t>
+            </a:r>
+            <a:r>
+              <a:rPr lang="en-GB" b="1" dirty="0"/>
+              <a:t>Adam</a:t>
+            </a:r>
+            <a:r>
+              <a:rPr lang="en-GB" dirty="0"/>
+              <a:t> with LR 0.001</a:t>
+            </a:r>
+          </a:p>
+          <a:p>
+            <a:pPr lvl="1"/>
+            <a:r>
+              <a:rPr lang="en-GB" b="1" dirty="0"/>
+              <a:t>Weight Decay</a:t>
+            </a:r>
+            <a:r>
+              <a:rPr lang="en-GB" dirty="0"/>
+              <a:t> ≥ 0.001 or exactly zero</a:t>
+            </a:r>
+          </a:p>
+          <a:p>
+            <a:pPr lvl="1"/>
+            <a:r>
+              <a:rPr lang="en-GB" b="1" dirty="0"/>
+              <a:t>Models</a:t>
+            </a:r>
+            <a:r>
+              <a:rPr lang="en-GB" dirty="0"/>
+              <a:t>: EfficientNet1DLSTM, </a:t>
+            </a:r>
+            <a:r>
+              <a:rPr lang="en-GB" dirty="0" err="1"/>
+              <a:t>CSILSTMNet</a:t>
+            </a:r>
+            <a:r>
+              <a:rPr lang="en-GB" dirty="0"/>
+              <a:t>, DenseNet1D, MobileNetV3_1D_LSTM</a:t>
+            </a:r>
+            <a:br>
+              <a:rPr lang="en-GB" dirty="0"/>
+            </a:br>
+            <a:r>
+              <a:rPr lang="en-GB" dirty="0"/>
+              <a:t>yielded Val Accuracy and Val F1 close to 0 or under 0.70.</a:t>
+            </a:r>
+          </a:p>
+          <a:p>
+            <a:r>
+              <a:rPr lang="en-GB" dirty="0"/>
+              <a:t>Especially for EfficientNet1DLSTM, MobileNetV3_1D_LSTM, and </a:t>
+            </a:r>
+            <a:r>
+              <a:rPr lang="en-GB" dirty="0" err="1"/>
+              <a:t>CSILSTMNet</a:t>
+            </a:r>
+            <a:r>
+              <a:rPr lang="en-GB" dirty="0"/>
+              <a:t>, SGD and high batch size failed to generalize, leading to under-utilization of gradient noise.</a:t>
+            </a:r>
+          </a:p>
+          <a:p>
+            <a:pPr marL="0" indent="0">
+              <a:buNone/>
+            </a:pPr>
+            <a:endParaRPr lang="en-GB" b="1" dirty="0"/>
+          </a:p>
+        </p:txBody>
+      </p:sp>
+      <p:graphicFrame>
+        <p:nvGraphicFramePr>
+          <p:cNvPr id="4" name="Object 3">
+            <a:extLst>
+              <a:ext uri="{FF2B5EF4-FFF2-40B4-BE49-F238E27FC236}">
+                <a16:creationId xmlns:a16="http://schemas.microsoft.com/office/drawing/2014/main" id="{AD65B440-6341-515C-1FB0-DBBC5C287D9A}"/>
+              </a:ext>
+            </a:extLst>
+          </p:cNvPr>
+          <p:cNvGraphicFramePr>
+            <a:graphicFrameLocks noChangeAspect="1"/>
+          </p:cNvGraphicFramePr>
+          <p:nvPr/>
+        </p:nvGraphicFramePr>
+        <p:xfrm>
+          <a:off x="3607444" y="4337370"/>
+          <a:ext cx="914400" cy="771525"/>
+        </p:xfrm>
+        <a:graphic>
+          <a:graphicData uri="http://schemas.openxmlformats.org/presentationml/2006/ole">
+            <mc:AlternateContent xmlns:mc="http://schemas.openxmlformats.org/markup-compatibility/2006">
+              <mc:Choice xmlns:v="urn:schemas-microsoft-com:vml" Requires="v">
+                <p:oleObj name="Packager Shell Object" showAsIcon="1" r:id="rId2" imgW="914400" imgH="771656" progId="Package">
+                  <p:embed/>
+                </p:oleObj>
+              </mc:Choice>
+              <mc:Fallback>
+                <p:oleObj name="Packager Shell Object" showAsIcon="1" r:id="rId2" imgW="914400" imgH="771656" progId="Package">
+                  <p:embed/>
+                  <p:pic>
+                    <p:nvPicPr>
+                      <p:cNvPr id="4" name="Object 3">
+                        <a:extLst>
+                          <a:ext uri="{FF2B5EF4-FFF2-40B4-BE49-F238E27FC236}">
+                            <a16:creationId xmlns:a16="http://schemas.microsoft.com/office/drawing/2014/main" id="{0B8C0A97-041B-3659-532F-21CF82593372}"/>
+                          </a:ext>
+                        </a:extLst>
+                      </p:cNvPr>
+                      <p:cNvPicPr/>
+                      <p:nvPr/>
+                    </p:nvPicPr>
+                    <p:blipFill>
+                      <a:blip r:embed="rId3"/>
+                      <a:stretch>
+                        <a:fillRect/>
+                      </a:stretch>
+                    </p:blipFill>
+                    <p:spPr>
+                      <a:xfrm>
+                        <a:off x="3607444" y="4337370"/>
+                        <a:ext cx="914400" cy="771525"/>
+                      </a:xfrm>
+                      <a:prstGeom prst="rect">
+                        <a:avLst/>
+                      </a:prstGeom>
+                    </p:spPr>
+                  </p:pic>
+                </p:oleObj>
+              </mc:Fallback>
+            </mc:AlternateContent>
+          </a:graphicData>
+        </a:graphic>
+      </p:graphicFrame>
+      <p:sp>
+        <p:nvSpPr>
+          <p:cNvPr id="8" name="Content Placeholder 2">
+            <a:extLst>
+              <a:ext uri="{FF2B5EF4-FFF2-40B4-BE49-F238E27FC236}">
+                <a16:creationId xmlns:a16="http://schemas.microsoft.com/office/drawing/2014/main" id="{71393EC3-932A-4A27-5EE3-E727F12AC436}"/>
+              </a:ext>
+            </a:extLst>
+          </p:cNvPr>
+          <p:cNvSpPr txBox="1">
+            <a:spLocks/>
+          </p:cNvSpPr>
+          <p:nvPr/>
+        </p:nvSpPr>
+        <p:spPr>
+          <a:xfrm>
+            <a:off x="467990" y="3932729"/>
+            <a:ext cx="3936774" cy="2354783"/>
+          </a:xfrm>
+          <a:prstGeom prst="rect">
+            <a:avLst/>
+          </a:prstGeom>
+          <a:solidFill>
+            <a:schemeClr val="bg2"/>
+          </a:solidFill>
+        </p:spPr>
+        <p:txBody>
+          <a:bodyPr vert="horz" lIns="91440" tIns="45720" rIns="91440" bIns="45720" rtlCol="0">
+            <a:normAutofit fontScale="47500" lnSpcReduction="20000"/>
+          </a:bodyPr>
+          <a:lstStyle>
+            <a:lvl1pPr marL="342900" indent="-342900" algn="l" defTabSz="457200" rtl="0" eaLnBrk="1" latinLnBrk="0" hangingPunct="1">
+              <a:spcBef>
+                <a:spcPct val="20000"/>
+              </a:spcBef>
+              <a:buFont typeface="Arial"/>
+              <a:buChar char="•"/>
+              <a:defRPr sz="3200" kern="1200">
+                <a:solidFill>
+                  <a:schemeClr val="tx1"/>
+                </a:solidFill>
+                <a:latin typeface="+mn-lt"/>
+                <a:ea typeface="+mn-ea"/>
+                <a:cs typeface="+mn-cs"/>
+              </a:defRPr>
+            </a:lvl1pPr>
+            <a:lvl2pPr marL="742950" indent="-285750" algn="l" defTabSz="457200" rtl="0" eaLnBrk="1" latinLnBrk="0" hangingPunct="1">
+              <a:spcBef>
+                <a:spcPct val="20000"/>
+              </a:spcBef>
+              <a:buFont typeface="Arial"/>
+              <a:buChar char="–"/>
+              <a:defRPr sz="2800" kern="1200">
+                <a:solidFill>
+                  <a:schemeClr val="tx1"/>
+                </a:solidFill>
+                <a:latin typeface="+mn-lt"/>
+                <a:ea typeface="+mn-ea"/>
+                <a:cs typeface="+mn-cs"/>
+              </a:defRPr>
+            </a:lvl2pPr>
+            <a:lvl3pPr marL="1143000" indent="-228600" algn="l" defTabSz="457200" rtl="0" eaLnBrk="1" latinLnBrk="0" hangingPunct="1">
+              <a:spcBef>
+                <a:spcPct val="20000"/>
+              </a:spcBef>
+              <a:buFont typeface="Arial"/>
+              <a:buChar char="•"/>
+              <a:defRPr sz="2400" kern="1200">
+                <a:solidFill>
+                  <a:schemeClr val="tx1"/>
+                </a:solidFill>
+                <a:latin typeface="+mn-lt"/>
+                <a:ea typeface="+mn-ea"/>
+                <a:cs typeface="+mn-cs"/>
+              </a:defRPr>
+            </a:lvl3pPr>
+            <a:lvl4pPr marL="1600200" indent="-228600" algn="l" defTabSz="457200" rtl="0" eaLnBrk="1" latinLnBrk="0" hangingPunct="1">
+              <a:spcBef>
+                <a:spcPct val="20000"/>
+              </a:spcBef>
+              <a:buFont typeface="Arial"/>
+              <a:buChar char="–"/>
+              <a:defRPr sz="2000" kern="1200">
+                <a:solidFill>
+                  <a:schemeClr val="tx1"/>
+                </a:solidFill>
+                <a:latin typeface="+mn-lt"/>
+                <a:ea typeface="+mn-ea"/>
+                <a:cs typeface="+mn-cs"/>
+              </a:defRPr>
+            </a:lvl4pPr>
+            <a:lvl5pPr marL="2057400" indent="-228600" algn="l" defTabSz="457200" rtl="0" eaLnBrk="1" latinLnBrk="0" hangingPunct="1">
+              <a:spcBef>
+                <a:spcPct val="20000"/>
+              </a:spcBef>
+              <a:buFont typeface="Arial"/>
+              <a:buChar char="»"/>
+              <a:defRPr sz="2000" kern="1200">
+                <a:solidFill>
+                  <a:schemeClr val="tx1"/>
+                </a:solidFill>
+                <a:latin typeface="+mn-lt"/>
+                <a:ea typeface="+mn-ea"/>
+                <a:cs typeface="+mn-cs"/>
+              </a:defRPr>
+            </a:lvl5pPr>
+            <a:lvl6pPr marL="2514600" indent="-228600" algn="l" defTabSz="457200" rtl="0" eaLnBrk="1" latinLnBrk="0" hangingPunct="1">
+              <a:spcBef>
+                <a:spcPct val="20000"/>
+              </a:spcBef>
+              <a:buFont typeface="Arial"/>
+              <a:buChar char="•"/>
+              <a:defRPr sz="2000" kern="1200">
+                <a:solidFill>
+                  <a:schemeClr val="tx1"/>
+                </a:solidFill>
+                <a:latin typeface="+mn-lt"/>
+                <a:ea typeface="+mn-ea"/>
+                <a:cs typeface="+mn-cs"/>
+              </a:defRPr>
+            </a:lvl6pPr>
+            <a:lvl7pPr marL="2971800" indent="-228600" algn="l" defTabSz="457200" rtl="0" eaLnBrk="1" latinLnBrk="0" hangingPunct="1">
+              <a:spcBef>
+                <a:spcPct val="20000"/>
+              </a:spcBef>
+              <a:buFont typeface="Arial"/>
+              <a:buChar char="•"/>
+              <a:defRPr sz="2000" kern="1200">
+                <a:solidFill>
+                  <a:schemeClr val="tx1"/>
+                </a:solidFill>
+                <a:latin typeface="+mn-lt"/>
+                <a:ea typeface="+mn-ea"/>
+                <a:cs typeface="+mn-cs"/>
+              </a:defRPr>
+            </a:lvl7pPr>
+            <a:lvl8pPr marL="3429000" indent="-228600" algn="l" defTabSz="457200" rtl="0" eaLnBrk="1" latinLnBrk="0" hangingPunct="1">
+              <a:spcBef>
+                <a:spcPct val="20000"/>
+              </a:spcBef>
+              <a:buFont typeface="Arial"/>
+              <a:buChar char="•"/>
+              <a:defRPr sz="2000" kern="1200">
+                <a:solidFill>
+                  <a:schemeClr val="tx1"/>
+                </a:solidFill>
+                <a:latin typeface="+mn-lt"/>
+                <a:ea typeface="+mn-ea"/>
+                <a:cs typeface="+mn-cs"/>
+              </a:defRPr>
+            </a:lvl8pPr>
+            <a:lvl9pPr marL="3886200" indent="-228600" algn="l" defTabSz="457200" rtl="0" eaLnBrk="1" latinLnBrk="0" hangingPunct="1">
+              <a:spcBef>
+                <a:spcPct val="20000"/>
+              </a:spcBef>
+              <a:buFont typeface="Arial"/>
+              <a:buChar char="•"/>
+              <a:defRPr sz="2000" kern="1200">
+                <a:solidFill>
+                  <a:schemeClr val="tx1"/>
+                </a:solidFill>
+                <a:latin typeface="+mn-lt"/>
+                <a:ea typeface="+mn-ea"/>
+                <a:cs typeface="+mn-cs"/>
+              </a:defRPr>
+            </a:lvl9pPr>
+          </a:lstStyle>
+          <a:p>
+            <a:pPr marL="0" indent="0">
+              <a:buNone/>
+            </a:pPr>
+            <a:r>
+              <a:rPr lang="en-GB" b="1" dirty="0"/>
+              <a:t>Other High Performers:</a:t>
+            </a:r>
+          </a:p>
+          <a:p>
+            <a:r>
+              <a:rPr lang="en-GB" b="1" dirty="0"/>
+              <a:t>MobileNetV3_1D_LSTM</a:t>
+            </a:r>
+            <a:r>
+              <a:rPr lang="en-GB" dirty="0"/>
+              <a:t> </a:t>
+            </a:r>
+          </a:p>
+          <a:p>
+            <a:pPr lvl="1"/>
+            <a:r>
+              <a:rPr lang="en-GB" dirty="0"/>
+              <a:t>(LR=0.0005, BS=32, Adam, WD=1e-05)</a:t>
+            </a:r>
+          </a:p>
+          <a:p>
+            <a:pPr lvl="1"/>
+            <a:r>
+              <a:rPr lang="en-GB" dirty="0"/>
+              <a:t>Val Accuracy: 0.9833</a:t>
+            </a:r>
+          </a:p>
+          <a:p>
+            <a:r>
+              <a:rPr lang="en-GB" b="1" dirty="0"/>
+              <a:t>DenseNet1D</a:t>
+            </a:r>
+            <a:r>
+              <a:rPr lang="en-GB" dirty="0"/>
+              <a:t> </a:t>
+            </a:r>
+          </a:p>
+          <a:p>
+            <a:pPr lvl="1"/>
+            <a:r>
+              <a:rPr lang="en-GB" dirty="0"/>
+              <a:t>(LR=0.0005, BS=64, Adam, WD=0.0)</a:t>
+            </a:r>
+          </a:p>
+          <a:p>
+            <a:pPr lvl="1"/>
+            <a:r>
+              <a:rPr lang="en-GB" dirty="0"/>
+              <a:t>Val Accuracy: 0.9746</a:t>
+            </a:r>
+          </a:p>
+          <a:p>
+            <a:r>
+              <a:rPr lang="en-GB" b="1" dirty="0"/>
+              <a:t>EfficientNet1DLSTM</a:t>
+            </a:r>
+            <a:r>
+              <a:rPr lang="en-GB" dirty="0"/>
+              <a:t> </a:t>
+            </a:r>
+          </a:p>
+          <a:p>
+            <a:pPr lvl="1"/>
+            <a:r>
+              <a:rPr lang="en-GB" dirty="0"/>
+              <a:t>(LR=0.0005, BS=32, Adam, WD=1e-05)</a:t>
+            </a:r>
+          </a:p>
+          <a:p>
+            <a:pPr lvl="1"/>
+            <a:r>
+              <a:rPr lang="en-GB" dirty="0"/>
+              <a:t>Val Accuracy: 0.9729</a:t>
+            </a:r>
+          </a:p>
+          <a:p>
+            <a:pPr marL="0" indent="0">
+              <a:buNone/>
+            </a:pPr>
+            <a:endParaRPr lang="en-GB" b="1" dirty="0"/>
+          </a:p>
+        </p:txBody>
+      </p:sp>
+      <p:sp>
+        <p:nvSpPr>
+          <p:cNvPr id="9" name="Content Placeholder 2">
+            <a:extLst>
+              <a:ext uri="{FF2B5EF4-FFF2-40B4-BE49-F238E27FC236}">
+                <a16:creationId xmlns:a16="http://schemas.microsoft.com/office/drawing/2014/main" id="{9140F2B5-D87F-F718-201B-5BC1D4C05415}"/>
+              </a:ext>
+            </a:extLst>
+          </p:cNvPr>
+          <p:cNvSpPr txBox="1">
+            <a:spLocks/>
+          </p:cNvSpPr>
+          <p:nvPr/>
+        </p:nvSpPr>
+        <p:spPr>
+          <a:xfrm>
+            <a:off x="4593324" y="3931372"/>
+            <a:ext cx="4073246" cy="2419518"/>
+          </a:xfrm>
+          <a:prstGeom prst="rect">
+            <a:avLst/>
+          </a:prstGeom>
+          <a:solidFill>
+            <a:schemeClr val="bg1">
+              <a:lumMod val="95000"/>
+            </a:schemeClr>
+          </a:solidFill>
+        </p:spPr>
+        <p:txBody>
+          <a:bodyPr vert="horz" lIns="91440" tIns="45720" rIns="91440" bIns="45720" rtlCol="0">
+            <a:normAutofit fontScale="40000" lnSpcReduction="20000"/>
+          </a:bodyPr>
+          <a:lstStyle>
+            <a:lvl1pPr marL="342900" indent="-342900" algn="l" defTabSz="457200" rtl="0" eaLnBrk="1" latinLnBrk="0" hangingPunct="1">
+              <a:spcBef>
+                <a:spcPct val="20000"/>
+              </a:spcBef>
+              <a:buFont typeface="Arial"/>
+              <a:buChar char="•"/>
+              <a:defRPr sz="3200" kern="1200">
+                <a:solidFill>
+                  <a:schemeClr val="tx1"/>
+                </a:solidFill>
+                <a:latin typeface="+mn-lt"/>
+                <a:ea typeface="+mn-ea"/>
+                <a:cs typeface="+mn-cs"/>
+              </a:defRPr>
+            </a:lvl1pPr>
+            <a:lvl2pPr marL="742950" indent="-285750" algn="l" defTabSz="457200" rtl="0" eaLnBrk="1" latinLnBrk="0" hangingPunct="1">
+              <a:spcBef>
+                <a:spcPct val="20000"/>
+              </a:spcBef>
+              <a:buFont typeface="Arial"/>
+              <a:buChar char="–"/>
+              <a:defRPr sz="2800" kern="1200">
+                <a:solidFill>
+                  <a:schemeClr val="tx1"/>
+                </a:solidFill>
+                <a:latin typeface="+mn-lt"/>
+                <a:ea typeface="+mn-ea"/>
+                <a:cs typeface="+mn-cs"/>
+              </a:defRPr>
+            </a:lvl2pPr>
+            <a:lvl3pPr marL="1143000" indent="-228600" algn="l" defTabSz="457200" rtl="0" eaLnBrk="1" latinLnBrk="0" hangingPunct="1">
+              <a:spcBef>
+                <a:spcPct val="20000"/>
+              </a:spcBef>
+              <a:buFont typeface="Arial"/>
+              <a:buChar char="•"/>
+              <a:defRPr sz="2400" kern="1200">
+                <a:solidFill>
+                  <a:schemeClr val="tx1"/>
+                </a:solidFill>
+                <a:latin typeface="+mn-lt"/>
+                <a:ea typeface="+mn-ea"/>
+                <a:cs typeface="+mn-cs"/>
+              </a:defRPr>
+            </a:lvl3pPr>
+            <a:lvl4pPr marL="1600200" indent="-228600" algn="l" defTabSz="457200" rtl="0" eaLnBrk="1" latinLnBrk="0" hangingPunct="1">
+              <a:spcBef>
+                <a:spcPct val="20000"/>
+              </a:spcBef>
+              <a:buFont typeface="Arial"/>
+              <a:buChar char="–"/>
+              <a:defRPr sz="2000" kern="1200">
+                <a:solidFill>
+                  <a:schemeClr val="tx1"/>
+                </a:solidFill>
+                <a:latin typeface="+mn-lt"/>
+                <a:ea typeface="+mn-ea"/>
+                <a:cs typeface="+mn-cs"/>
+              </a:defRPr>
+            </a:lvl4pPr>
+            <a:lvl5pPr marL="2057400" indent="-228600" algn="l" defTabSz="457200" rtl="0" eaLnBrk="1" latinLnBrk="0" hangingPunct="1">
+              <a:spcBef>
+                <a:spcPct val="20000"/>
+              </a:spcBef>
+              <a:buFont typeface="Arial"/>
+              <a:buChar char="»"/>
+              <a:defRPr sz="2000" kern="1200">
+                <a:solidFill>
+                  <a:schemeClr val="tx1"/>
+                </a:solidFill>
+                <a:latin typeface="+mn-lt"/>
+                <a:ea typeface="+mn-ea"/>
+                <a:cs typeface="+mn-cs"/>
+              </a:defRPr>
+            </a:lvl5pPr>
+            <a:lvl6pPr marL="2514600" indent="-228600" algn="l" defTabSz="457200" rtl="0" eaLnBrk="1" latinLnBrk="0" hangingPunct="1">
+              <a:spcBef>
+                <a:spcPct val="20000"/>
+              </a:spcBef>
+              <a:buFont typeface="Arial"/>
+              <a:buChar char="•"/>
+              <a:defRPr sz="2000" kern="1200">
+                <a:solidFill>
+                  <a:schemeClr val="tx1"/>
+                </a:solidFill>
+                <a:latin typeface="+mn-lt"/>
+                <a:ea typeface="+mn-ea"/>
+                <a:cs typeface="+mn-cs"/>
+              </a:defRPr>
+            </a:lvl6pPr>
+            <a:lvl7pPr marL="2971800" indent="-228600" algn="l" defTabSz="457200" rtl="0" eaLnBrk="1" latinLnBrk="0" hangingPunct="1">
+              <a:spcBef>
+                <a:spcPct val="20000"/>
+              </a:spcBef>
+              <a:buFont typeface="Arial"/>
+              <a:buChar char="•"/>
+              <a:defRPr sz="2000" kern="1200">
+                <a:solidFill>
+                  <a:schemeClr val="tx1"/>
+                </a:solidFill>
+                <a:latin typeface="+mn-lt"/>
+                <a:ea typeface="+mn-ea"/>
+                <a:cs typeface="+mn-cs"/>
+              </a:defRPr>
+            </a:lvl7pPr>
+            <a:lvl8pPr marL="3429000" indent="-228600" algn="l" defTabSz="457200" rtl="0" eaLnBrk="1" latinLnBrk="0" hangingPunct="1">
+              <a:spcBef>
+                <a:spcPct val="20000"/>
+              </a:spcBef>
+              <a:buFont typeface="Arial"/>
+              <a:buChar char="•"/>
+              <a:defRPr sz="2000" kern="1200">
+                <a:solidFill>
+                  <a:schemeClr val="tx1"/>
+                </a:solidFill>
+                <a:latin typeface="+mn-lt"/>
+                <a:ea typeface="+mn-ea"/>
+                <a:cs typeface="+mn-cs"/>
+              </a:defRPr>
+            </a:lvl8pPr>
+            <a:lvl9pPr marL="3886200" indent="-228600" algn="l" defTabSz="457200" rtl="0" eaLnBrk="1" latinLnBrk="0" hangingPunct="1">
+              <a:spcBef>
+                <a:spcPct val="20000"/>
+              </a:spcBef>
+              <a:buFont typeface="Arial"/>
+              <a:buChar char="•"/>
+              <a:defRPr sz="2000" kern="1200">
+                <a:solidFill>
+                  <a:schemeClr val="tx1"/>
+                </a:solidFill>
+                <a:latin typeface="+mn-lt"/>
+                <a:ea typeface="+mn-ea"/>
+                <a:cs typeface="+mn-cs"/>
+              </a:defRPr>
+            </a:lvl9pPr>
+          </a:lstStyle>
+          <a:p>
+            <a:pPr marL="0" indent="0">
+              <a:buNone/>
+            </a:pPr>
+            <a:r>
+              <a:rPr lang="en-GB" b="1" dirty="0"/>
+              <a:t>Slide Takeaways:</a:t>
+            </a:r>
+          </a:p>
+          <a:p>
+            <a:r>
+              <a:rPr lang="en-GB" dirty="0"/>
+              <a:t>MobileNetV3_1D_LSTM with LR=0.0005, Batch Size=64, Adam, WD=1e-05 gave the </a:t>
+            </a:r>
+            <a:r>
+              <a:rPr lang="en-GB" b="1" dirty="0"/>
+              <a:t>best validation metrics</a:t>
+            </a:r>
+            <a:r>
+              <a:rPr lang="en-GB" dirty="0"/>
+              <a:t>.</a:t>
+            </a:r>
+          </a:p>
+          <a:p>
+            <a:r>
+              <a:rPr lang="en-GB" dirty="0"/>
+              <a:t>DenseNet1D and EfficientNet1DLSTM performed well at lower learning rates and smaller batch sizes with Adam optimizer.</a:t>
+            </a:r>
+          </a:p>
+          <a:p>
+            <a:r>
+              <a:rPr lang="en-GB" b="1" dirty="0"/>
+              <a:t>Avoid config</a:t>
+            </a:r>
+            <a:r>
+              <a:rPr lang="en-GB" dirty="0"/>
+              <a:t>: Batch Size 128, SGD, or LR=0.001 with Adam (caused low/zero accuracy for all models).</a:t>
+            </a:r>
+          </a:p>
+          <a:p>
+            <a:r>
+              <a:rPr lang="en-GB" dirty="0"/>
+              <a:t>For future long epoch runs (≥50), focus on: LR ∈ [0.0005, 0.001], **Batch Size ∈ **, Adam optimizer, and weight decay 1e-4 or 1e-5.</a:t>
+            </a:r>
+          </a:p>
+          <a:p>
+            <a:pPr marL="0" indent="0">
+              <a:buNone/>
+            </a:pPr>
+            <a:endParaRPr lang="en-GB" b="1" dirty="0"/>
+          </a:p>
+        </p:txBody>
+      </p:sp>
+      <p:graphicFrame>
+        <p:nvGraphicFramePr>
+          <p:cNvPr id="10" name="Object 9">
+            <a:extLst>
+              <a:ext uri="{FF2B5EF4-FFF2-40B4-BE49-F238E27FC236}">
+                <a16:creationId xmlns:a16="http://schemas.microsoft.com/office/drawing/2014/main" id="{2B46E5C9-1E65-FC61-3243-683E2509D430}"/>
+              </a:ext>
+            </a:extLst>
+          </p:cNvPr>
+          <p:cNvGraphicFramePr>
+            <a:graphicFrameLocks noChangeAspect="1"/>
+          </p:cNvGraphicFramePr>
+          <p:nvPr>
+            <p:extLst>
+              <p:ext uri="{D42A27DB-BD31-4B8C-83A1-F6EECF244321}">
+                <p14:modId xmlns:p14="http://schemas.microsoft.com/office/powerpoint/2010/main" val="2221597167"/>
+              </p:ext>
+            </p:extLst>
+          </p:nvPr>
+        </p:nvGraphicFramePr>
+        <p:xfrm>
+          <a:off x="7288395" y="828675"/>
+          <a:ext cx="914400" cy="771525"/>
+        </p:xfrm>
+        <a:graphic>
+          <a:graphicData uri="http://schemas.openxmlformats.org/presentationml/2006/ole">
+            <mc:AlternateContent xmlns:mc="http://schemas.openxmlformats.org/markup-compatibility/2006">
+              <mc:Choice xmlns:v="urn:schemas-microsoft-com:vml" Requires="v">
+                <p:oleObj name="Macro-Enabled Worksheet" showAsIcon="1" r:id="rId4" imgW="914400" imgH="771656" progId="Excel.SheetMacroEnabled.12">
+                  <p:embed/>
+                </p:oleObj>
+              </mc:Choice>
+              <mc:Fallback>
+                <p:oleObj name="Macro-Enabled Worksheet" showAsIcon="1" r:id="rId4" imgW="914400" imgH="771656" progId="Excel.SheetMacroEnabled.12">
+                  <p:embed/>
+                  <p:pic>
+                    <p:nvPicPr>
+                      <p:cNvPr id="4" name="Object 3">
+                        <a:extLst>
+                          <a:ext uri="{FF2B5EF4-FFF2-40B4-BE49-F238E27FC236}">
+                            <a16:creationId xmlns:a16="http://schemas.microsoft.com/office/drawing/2014/main" id="{78B00F93-CBFD-5BF3-732A-8DA51C0DCCBF}"/>
+                          </a:ext>
+                        </a:extLst>
+                      </p:cNvPr>
+                      <p:cNvPicPr/>
+                      <p:nvPr/>
+                    </p:nvPicPr>
+                    <p:blipFill>
+                      <a:blip r:embed="rId5"/>
+                      <a:stretch>
+                        <a:fillRect/>
+                      </a:stretch>
+                    </p:blipFill>
+                    <p:spPr>
+                      <a:xfrm>
+                        <a:off x="7288395" y="828675"/>
+                        <a:ext cx="914400" cy="771525"/>
+                      </a:xfrm>
+                      <a:prstGeom prst="rect">
+                        <a:avLst/>
+                      </a:prstGeom>
+                    </p:spPr>
+                  </p:pic>
+                </p:oleObj>
+              </mc:Fallback>
+            </mc:AlternateContent>
+          </a:graphicData>
+        </a:graphic>
+      </p:graphicFrame>
+      <p:graphicFrame>
+        <p:nvGraphicFramePr>
+          <p:cNvPr id="11" name="Object 10">
+            <a:extLst>
+              <a:ext uri="{FF2B5EF4-FFF2-40B4-BE49-F238E27FC236}">
+                <a16:creationId xmlns:a16="http://schemas.microsoft.com/office/drawing/2014/main" id="{4E0703F5-8409-4C6E-26C9-5D084DCAF2F8}"/>
+              </a:ext>
+            </a:extLst>
+          </p:cNvPr>
+          <p:cNvGraphicFramePr>
+            <a:graphicFrameLocks noChangeAspect="1"/>
+          </p:cNvGraphicFramePr>
+          <p:nvPr>
+            <p:extLst>
+              <p:ext uri="{D42A27DB-BD31-4B8C-83A1-F6EECF244321}">
+                <p14:modId xmlns:p14="http://schemas.microsoft.com/office/powerpoint/2010/main" val="3232039424"/>
+              </p:ext>
+            </p:extLst>
+          </p:nvPr>
+        </p:nvGraphicFramePr>
+        <p:xfrm>
+          <a:off x="6089425" y="828675"/>
+          <a:ext cx="914400" cy="771525"/>
+        </p:xfrm>
+        <a:graphic>
+          <a:graphicData uri="http://schemas.openxmlformats.org/presentationml/2006/ole">
+            <mc:AlternateContent xmlns:mc="http://schemas.openxmlformats.org/markup-compatibility/2006">
+              <mc:Choice xmlns:v="urn:schemas-microsoft-com:vml" Requires="v">
+                <p:oleObj name="Packager Shell Object" showAsIcon="1" r:id="rId6" imgW="914400" imgH="771656" progId="Package">
+                  <p:embed/>
+                </p:oleObj>
+              </mc:Choice>
+              <mc:Fallback>
+                <p:oleObj name="Packager Shell Object" showAsIcon="1" r:id="rId6" imgW="914400" imgH="771656" progId="Package">
+                  <p:embed/>
+                  <p:pic>
+                    <p:nvPicPr>
+                      <p:cNvPr id="5" name="Object 4">
+                        <a:extLst>
+                          <a:ext uri="{FF2B5EF4-FFF2-40B4-BE49-F238E27FC236}">
+                            <a16:creationId xmlns:a16="http://schemas.microsoft.com/office/drawing/2014/main" id="{095D5053-3A95-7D76-584C-0C896AE7FBB5}"/>
+                          </a:ext>
+                        </a:extLst>
+                      </p:cNvPr>
+                      <p:cNvPicPr/>
+                      <p:nvPr/>
+                    </p:nvPicPr>
+                    <p:blipFill>
+                      <a:blip r:embed="rId3"/>
+                      <a:stretch>
+                        <a:fillRect/>
+                      </a:stretch>
+                    </p:blipFill>
+                    <p:spPr>
+                      <a:xfrm>
+                        <a:off x="6089425" y="828675"/>
+                        <a:ext cx="914400" cy="771525"/>
+                      </a:xfrm>
+                      <a:prstGeom prst="rect">
+                        <a:avLst/>
+                      </a:prstGeom>
+                    </p:spPr>
+                  </p:pic>
+                </p:oleObj>
+              </mc:Fallback>
+            </mc:AlternateContent>
+          </a:graphicData>
+        </a:graphic>
+      </p:graphicFrame>
+    </p:spTree>
+    <p:extLst>
+      <p:ext uri="{BB962C8B-B14F-4D97-AF65-F5344CB8AC3E}">
+        <p14:creationId xmlns:p14="http://schemas.microsoft.com/office/powerpoint/2010/main" val="2727786197"/>
+      </p:ext>
+    </p:extLst>
+  </p:cSld>
+  <p:clrMapOvr>
+    <a:masterClrMapping/>
+  </p:clrMapOvr>
+</p:sld>
+</file>
+
+<file path=ppt/slides/slide32.xml><?xml version="1.0" encoding="utf-8"?>
 <p:sld xmlns:a="http://schemas.openxmlformats.org/drawingml/2006/main" xmlns:r="http://schemas.openxmlformats.org/officeDocument/2006/relationships" xmlns:p="http://schemas.openxmlformats.org/presentationml/2006/main">
   <p:cSld>
     <p:spTree>
@@ -11116,7 +12369,7 @@
           <a:p>
             <a:r>
               <a:rPr lang="en-GB" sz="3600" dirty="0"/>
-              <a:t>Experimental Hyperparameter Configuration and Grid Sampling Strategy</a:t>
+              <a:t>Experiment-2</a:t>
             </a:r>
           </a:p>
         </p:txBody>
@@ -11712,7 +12965,7 @@
           <p:nvPr>
             <p:extLst>
               <p:ext uri="{D42A27DB-BD31-4B8C-83A1-F6EECF244321}">
-                <p14:modId xmlns:p14="http://schemas.microsoft.com/office/powerpoint/2010/main" val="4166918337"/>
+                <p14:modId xmlns:p14="http://schemas.microsoft.com/office/powerpoint/2010/main" val="154521859"/>
               </p:ext>
             </p:extLst>
           </p:nvPr>
@@ -12006,44 +13259,738 @@
           </a:graphicData>
         </a:graphic>
       </p:graphicFrame>
+    </p:spTree>
+    <p:extLst>
+      <p:ext uri="{BB962C8B-B14F-4D97-AF65-F5344CB8AC3E}">
+        <p14:creationId xmlns:p14="http://schemas.microsoft.com/office/powerpoint/2010/main" val="255328758"/>
+      </p:ext>
+    </p:extLst>
+  </p:cSld>
+  <p:clrMapOvr>
+    <a:masterClrMapping/>
+  </p:clrMapOvr>
+</p:sld>
+</file>
+
+<file path=ppt/slides/slide33.xml><?xml version="1.0" encoding="utf-8"?>
+<p:sld xmlns:a="http://schemas.openxmlformats.org/drawingml/2006/main" xmlns:r="http://schemas.openxmlformats.org/officeDocument/2006/relationships" xmlns:p="http://schemas.openxmlformats.org/presentationml/2006/main">
+  <p:cSld>
+    <p:spTree>
+      <p:nvGrpSpPr>
+        <p:cNvPr id="1" name="">
+          <a:extLst>
+            <a:ext uri="{FF2B5EF4-FFF2-40B4-BE49-F238E27FC236}">
+              <a16:creationId xmlns:a16="http://schemas.microsoft.com/office/drawing/2014/main" id="{9E28B4D8-D638-7A03-8EB7-F487F1701253}"/>
+            </a:ext>
+          </a:extLst>
+        </p:cNvPr>
+        <p:cNvGrpSpPr/>
+        <p:nvPr/>
+      </p:nvGrpSpPr>
+      <p:grpSpPr>
+        <a:xfrm>
+          <a:off x="0" y="0"/>
+          <a:ext cx="0" cy="0"/>
+          <a:chOff x="0" y="0"/>
+          <a:chExt cx="0" cy="0"/>
+        </a:xfrm>
+      </p:grpSpPr>
+      <p:sp>
+        <p:nvSpPr>
+          <p:cNvPr id="2" name="Title 1">
+            <a:extLst>
+              <a:ext uri="{FF2B5EF4-FFF2-40B4-BE49-F238E27FC236}">
+                <a16:creationId xmlns:a16="http://schemas.microsoft.com/office/drawing/2014/main" id="{07DD3303-2BF8-07A9-593C-B8BC8F390066}"/>
+              </a:ext>
+            </a:extLst>
+          </p:cNvPr>
+          <p:cNvSpPr>
+            <a:spLocks noGrp="1"/>
+          </p:cNvSpPr>
+          <p:nvPr>
+            <p:ph type="title"/>
+          </p:nvPr>
+        </p:nvSpPr>
+        <p:spPr/>
+        <p:txBody>
+          <a:bodyPr>
+            <a:noAutofit/>
+          </a:bodyPr>
+          <a:lstStyle/>
+          <a:p>
+            <a:r>
+              <a:rPr lang="en-GB" i="1" dirty="0"/>
+              <a:t>ML Model Validation — Performance Analysis</a:t>
+            </a:r>
+            <a:endParaRPr lang="en-GB" sz="3600" dirty="0"/>
+          </a:p>
+        </p:txBody>
+      </p:sp>
+      <p:sp>
+        <p:nvSpPr>
+          <p:cNvPr id="3" name="Content Placeholder 2">
+            <a:extLst>
+              <a:ext uri="{FF2B5EF4-FFF2-40B4-BE49-F238E27FC236}">
+                <a16:creationId xmlns:a16="http://schemas.microsoft.com/office/drawing/2014/main" id="{C422CB94-23DA-B31B-E2B8-6D342B209067}"/>
+              </a:ext>
+            </a:extLst>
+          </p:cNvPr>
+          <p:cNvSpPr>
+            <a:spLocks noGrp="1"/>
+          </p:cNvSpPr>
+          <p:nvPr>
+            <p:ph idx="1"/>
+          </p:nvPr>
+        </p:nvSpPr>
+        <p:spPr>
+          <a:xfrm>
+            <a:off x="457200" y="1600201"/>
+            <a:ext cx="4022521" cy="3483527"/>
+          </a:xfrm>
+          <a:solidFill>
+            <a:schemeClr val="bg2"/>
+          </a:solidFill>
+        </p:spPr>
+        <p:txBody>
+          <a:bodyPr>
+            <a:normAutofit fontScale="62500" lnSpcReduction="20000"/>
+          </a:bodyPr>
+          <a:lstStyle/>
+          <a:p>
+            <a:pPr marL="0" indent="0">
+              <a:buNone/>
+            </a:pPr>
+            <a:r>
+              <a:rPr lang="en-GB" dirty="0"/>
+              <a:t>⭐ Best Performing Model &amp; Hyperparameters</a:t>
+            </a:r>
+          </a:p>
+          <a:p>
+            <a:r>
+              <a:rPr lang="en-GB" b="1" dirty="0"/>
+              <a:t>Model</a:t>
+            </a:r>
+            <a:r>
+              <a:rPr lang="en-GB" dirty="0"/>
+              <a:t>: DenseNet1D</a:t>
+            </a:r>
+          </a:p>
+          <a:p>
+            <a:r>
+              <a:rPr lang="en-GB" b="1" dirty="0"/>
+              <a:t>Val Accuracy</a:t>
+            </a:r>
+            <a:r>
+              <a:rPr lang="en-GB" dirty="0"/>
+              <a:t>: 0.9917</a:t>
+            </a:r>
+          </a:p>
+          <a:p>
+            <a:r>
+              <a:rPr lang="en-GB" b="1" dirty="0"/>
+              <a:t>Val F1</a:t>
+            </a:r>
+            <a:r>
+              <a:rPr lang="en-GB" dirty="0"/>
+              <a:t>: 0.9917</a:t>
+            </a:r>
+          </a:p>
+          <a:p>
+            <a:r>
+              <a:rPr lang="en-GB" b="1" dirty="0"/>
+              <a:t>Hyperparameters</a:t>
+            </a:r>
+            <a:r>
+              <a:rPr lang="en-GB" dirty="0"/>
+              <a:t>:</a:t>
+            </a:r>
+          </a:p>
+          <a:p>
+            <a:pPr lvl="1"/>
+            <a:r>
+              <a:rPr lang="en-GB" b="1" dirty="0"/>
+              <a:t>Learning Rate</a:t>
+            </a:r>
+            <a:r>
+              <a:rPr lang="en-GB" dirty="0"/>
+              <a:t>: 0.0005</a:t>
+            </a:r>
+          </a:p>
+          <a:p>
+            <a:pPr lvl="1"/>
+            <a:r>
+              <a:rPr lang="en-GB" b="1" dirty="0"/>
+              <a:t>Batch Size</a:t>
+            </a:r>
+            <a:r>
+              <a:rPr lang="en-GB" dirty="0"/>
+              <a:t>: 64</a:t>
+            </a:r>
+          </a:p>
+          <a:p>
+            <a:pPr lvl="1"/>
+            <a:r>
+              <a:rPr lang="en-GB" b="1" dirty="0"/>
+              <a:t>Optimizer</a:t>
+            </a:r>
+            <a:r>
+              <a:rPr lang="en-GB" dirty="0"/>
+              <a:t>: Adam</a:t>
+            </a:r>
+          </a:p>
+          <a:p>
+            <a:pPr lvl="1"/>
+            <a:r>
+              <a:rPr lang="en-GB" b="1" dirty="0"/>
+              <a:t>Weight Decay</a:t>
+            </a:r>
+            <a:r>
+              <a:rPr lang="en-GB" dirty="0"/>
+              <a:t>: 0.0001</a:t>
+            </a:r>
+          </a:p>
+          <a:p>
+            <a:pPr lvl="1"/>
+            <a:r>
+              <a:rPr lang="en-GB" b="1" dirty="0"/>
+              <a:t>Epochs</a:t>
+            </a:r>
+            <a:r>
+              <a:rPr lang="en-GB" dirty="0"/>
+              <a:t>: 100</a:t>
+            </a:r>
+          </a:p>
+          <a:p>
+            <a:pPr marL="0" indent="0">
+              <a:buNone/>
+            </a:pPr>
+            <a:endParaRPr lang="en-GB" b="1" dirty="0"/>
+          </a:p>
+        </p:txBody>
+      </p:sp>
+      <p:sp>
+        <p:nvSpPr>
+          <p:cNvPr id="6" name="Content Placeholder 2">
+            <a:extLst>
+              <a:ext uri="{FF2B5EF4-FFF2-40B4-BE49-F238E27FC236}">
+                <a16:creationId xmlns:a16="http://schemas.microsoft.com/office/drawing/2014/main" id="{4CB9910E-C118-5E12-9F10-62A6C66A837F}"/>
+              </a:ext>
+            </a:extLst>
+          </p:cNvPr>
+          <p:cNvSpPr txBox="1">
+            <a:spLocks/>
+          </p:cNvSpPr>
+          <p:nvPr/>
+        </p:nvSpPr>
+        <p:spPr>
+          <a:xfrm>
+            <a:off x="4602764" y="1600200"/>
+            <a:ext cx="4022521" cy="3483527"/>
+          </a:xfrm>
+          <a:prstGeom prst="rect">
+            <a:avLst/>
+          </a:prstGeom>
+          <a:solidFill>
+            <a:schemeClr val="bg2"/>
+          </a:solidFill>
+        </p:spPr>
+        <p:txBody>
+          <a:bodyPr vert="horz" lIns="91440" tIns="45720" rIns="91440" bIns="45720" rtlCol="0">
+            <a:normAutofit fontScale="47500" lnSpcReduction="20000"/>
+          </a:bodyPr>
+          <a:lstStyle>
+            <a:lvl1pPr marL="342900" indent="-342900" algn="l" defTabSz="457200" rtl="0" eaLnBrk="1" latinLnBrk="0" hangingPunct="1">
+              <a:spcBef>
+                <a:spcPct val="20000"/>
+              </a:spcBef>
+              <a:buFont typeface="Arial"/>
+              <a:buChar char="•"/>
+              <a:defRPr sz="3200" kern="1200">
+                <a:solidFill>
+                  <a:schemeClr val="tx1"/>
+                </a:solidFill>
+                <a:latin typeface="+mn-lt"/>
+                <a:ea typeface="+mn-ea"/>
+                <a:cs typeface="+mn-cs"/>
+              </a:defRPr>
+            </a:lvl1pPr>
+            <a:lvl2pPr marL="742950" indent="-285750" algn="l" defTabSz="457200" rtl="0" eaLnBrk="1" latinLnBrk="0" hangingPunct="1">
+              <a:spcBef>
+                <a:spcPct val="20000"/>
+              </a:spcBef>
+              <a:buFont typeface="Arial"/>
+              <a:buChar char="–"/>
+              <a:defRPr sz="2800" kern="1200">
+                <a:solidFill>
+                  <a:schemeClr val="tx1"/>
+                </a:solidFill>
+                <a:latin typeface="+mn-lt"/>
+                <a:ea typeface="+mn-ea"/>
+                <a:cs typeface="+mn-cs"/>
+              </a:defRPr>
+            </a:lvl2pPr>
+            <a:lvl3pPr marL="1143000" indent="-228600" algn="l" defTabSz="457200" rtl="0" eaLnBrk="1" latinLnBrk="0" hangingPunct="1">
+              <a:spcBef>
+                <a:spcPct val="20000"/>
+              </a:spcBef>
+              <a:buFont typeface="Arial"/>
+              <a:buChar char="•"/>
+              <a:defRPr sz="2400" kern="1200">
+                <a:solidFill>
+                  <a:schemeClr val="tx1"/>
+                </a:solidFill>
+                <a:latin typeface="+mn-lt"/>
+                <a:ea typeface="+mn-ea"/>
+                <a:cs typeface="+mn-cs"/>
+              </a:defRPr>
+            </a:lvl3pPr>
+            <a:lvl4pPr marL="1600200" indent="-228600" algn="l" defTabSz="457200" rtl="0" eaLnBrk="1" latinLnBrk="0" hangingPunct="1">
+              <a:spcBef>
+                <a:spcPct val="20000"/>
+              </a:spcBef>
+              <a:buFont typeface="Arial"/>
+              <a:buChar char="–"/>
+              <a:defRPr sz="2000" kern="1200">
+                <a:solidFill>
+                  <a:schemeClr val="tx1"/>
+                </a:solidFill>
+                <a:latin typeface="+mn-lt"/>
+                <a:ea typeface="+mn-ea"/>
+                <a:cs typeface="+mn-cs"/>
+              </a:defRPr>
+            </a:lvl4pPr>
+            <a:lvl5pPr marL="2057400" indent="-228600" algn="l" defTabSz="457200" rtl="0" eaLnBrk="1" latinLnBrk="0" hangingPunct="1">
+              <a:spcBef>
+                <a:spcPct val="20000"/>
+              </a:spcBef>
+              <a:buFont typeface="Arial"/>
+              <a:buChar char="»"/>
+              <a:defRPr sz="2000" kern="1200">
+                <a:solidFill>
+                  <a:schemeClr val="tx1"/>
+                </a:solidFill>
+                <a:latin typeface="+mn-lt"/>
+                <a:ea typeface="+mn-ea"/>
+                <a:cs typeface="+mn-cs"/>
+              </a:defRPr>
+            </a:lvl5pPr>
+            <a:lvl6pPr marL="2514600" indent="-228600" algn="l" defTabSz="457200" rtl="0" eaLnBrk="1" latinLnBrk="0" hangingPunct="1">
+              <a:spcBef>
+                <a:spcPct val="20000"/>
+              </a:spcBef>
+              <a:buFont typeface="Arial"/>
+              <a:buChar char="•"/>
+              <a:defRPr sz="2000" kern="1200">
+                <a:solidFill>
+                  <a:schemeClr val="tx1"/>
+                </a:solidFill>
+                <a:latin typeface="+mn-lt"/>
+                <a:ea typeface="+mn-ea"/>
+                <a:cs typeface="+mn-cs"/>
+              </a:defRPr>
+            </a:lvl6pPr>
+            <a:lvl7pPr marL="2971800" indent="-228600" algn="l" defTabSz="457200" rtl="0" eaLnBrk="1" latinLnBrk="0" hangingPunct="1">
+              <a:spcBef>
+                <a:spcPct val="20000"/>
+              </a:spcBef>
+              <a:buFont typeface="Arial"/>
+              <a:buChar char="•"/>
+              <a:defRPr sz="2000" kern="1200">
+                <a:solidFill>
+                  <a:schemeClr val="tx1"/>
+                </a:solidFill>
+                <a:latin typeface="+mn-lt"/>
+                <a:ea typeface="+mn-ea"/>
+                <a:cs typeface="+mn-cs"/>
+              </a:defRPr>
+            </a:lvl7pPr>
+            <a:lvl8pPr marL="3429000" indent="-228600" algn="l" defTabSz="457200" rtl="0" eaLnBrk="1" latinLnBrk="0" hangingPunct="1">
+              <a:spcBef>
+                <a:spcPct val="20000"/>
+              </a:spcBef>
+              <a:buFont typeface="Arial"/>
+              <a:buChar char="•"/>
+              <a:defRPr sz="2000" kern="1200">
+                <a:solidFill>
+                  <a:schemeClr val="tx1"/>
+                </a:solidFill>
+                <a:latin typeface="+mn-lt"/>
+                <a:ea typeface="+mn-ea"/>
+                <a:cs typeface="+mn-cs"/>
+              </a:defRPr>
+            </a:lvl8pPr>
+            <a:lvl9pPr marL="3886200" indent="-228600" algn="l" defTabSz="457200" rtl="0" eaLnBrk="1" latinLnBrk="0" hangingPunct="1">
+              <a:spcBef>
+                <a:spcPct val="20000"/>
+              </a:spcBef>
+              <a:buFont typeface="Arial"/>
+              <a:buChar char="•"/>
+              <a:defRPr sz="2000" kern="1200">
+                <a:solidFill>
+                  <a:schemeClr val="tx1"/>
+                </a:solidFill>
+                <a:latin typeface="+mn-lt"/>
+                <a:ea typeface="+mn-ea"/>
+                <a:cs typeface="+mn-cs"/>
+              </a:defRPr>
+            </a:lvl9pPr>
+          </a:lstStyle>
+          <a:p>
+            <a:pPr marL="0" indent="0">
+              <a:buNone/>
+            </a:pPr>
+            <a:r>
+              <a:rPr lang="en-GB" dirty="0"/>
+              <a:t>⚠️ Models &amp; Hyperparameters That Did Not Work -</a:t>
+            </a:r>
+            <a:r>
+              <a:rPr lang="en-GB" b="1" dirty="0"/>
+              <a:t>DenseNet1D, EfficientNet1DLSTM, MobileNetV3_1D_LSTM:</a:t>
+            </a:r>
+          </a:p>
+          <a:p>
+            <a:pPr lvl="1"/>
+            <a:r>
+              <a:rPr lang="en-GB" b="1" dirty="0"/>
+              <a:t>LR</a:t>
+            </a:r>
+            <a:r>
+              <a:rPr lang="en-GB" dirty="0"/>
+              <a:t>: 0.001 or 0.0005</a:t>
+            </a:r>
+          </a:p>
+          <a:p>
+            <a:pPr lvl="1"/>
+            <a:r>
+              <a:rPr lang="en-GB" b="1" dirty="0"/>
+              <a:t>Batch Size</a:t>
+            </a:r>
+            <a:r>
+              <a:rPr lang="en-GB" dirty="0"/>
+              <a:t>: 32 or 64</a:t>
+            </a:r>
+          </a:p>
+          <a:p>
+            <a:pPr lvl="1"/>
+            <a:r>
+              <a:rPr lang="en-GB" b="1" dirty="0"/>
+              <a:t>Optimizer</a:t>
+            </a:r>
+            <a:r>
+              <a:rPr lang="en-GB" dirty="0"/>
+              <a:t>: Adam</a:t>
+            </a:r>
+          </a:p>
+          <a:p>
+            <a:pPr lvl="1"/>
+            <a:r>
+              <a:rPr lang="en-GB" b="1" dirty="0"/>
+              <a:t>Weight Decay</a:t>
+            </a:r>
+            <a:r>
+              <a:rPr lang="en-GB" dirty="0"/>
+              <a:t>: 0.0001</a:t>
+            </a:r>
+          </a:p>
+          <a:p>
+            <a:pPr lvl="1"/>
+            <a:r>
+              <a:rPr lang="en-GB" b="1" dirty="0"/>
+              <a:t>Epochs</a:t>
+            </a:r>
+            <a:r>
+              <a:rPr lang="en-GB" dirty="0"/>
+              <a:t>: 50 or 100</a:t>
+            </a:r>
+          </a:p>
+          <a:p>
+            <a:r>
+              <a:rPr lang="en-GB" dirty="0"/>
+              <a:t>Failure observed for </a:t>
+            </a:r>
+            <a:r>
+              <a:rPr lang="en-GB" b="1" dirty="0"/>
+              <a:t>EfficientNet1DLSTM</a:t>
+            </a:r>
+            <a:r>
+              <a:rPr lang="en-GB" dirty="0"/>
+              <a:t> and </a:t>
+            </a:r>
+            <a:r>
+              <a:rPr lang="en-GB" b="1" dirty="0"/>
+              <a:t>MobileNetV3_1D_LSTM</a:t>
+            </a:r>
+            <a:r>
+              <a:rPr lang="en-GB" dirty="0"/>
+              <a:t> in nearly all tested configurations.</a:t>
+            </a:r>
+          </a:p>
+          <a:p>
+            <a:r>
+              <a:rPr lang="en-GB" b="1" dirty="0"/>
+              <a:t>DenseNet1D</a:t>
+            </a:r>
+            <a:r>
+              <a:rPr lang="en-GB" dirty="0"/>
+              <a:t> failed with LR=0.001 and BS=32/64 for short runs.</a:t>
+            </a:r>
+          </a:p>
+          <a:p>
+            <a:pPr marL="0" indent="0">
+              <a:buFont typeface="Arial"/>
+              <a:buNone/>
+            </a:pPr>
+            <a:endParaRPr lang="en-GB" b="1" dirty="0"/>
+          </a:p>
+        </p:txBody>
+      </p:sp>
+      <p:sp>
+        <p:nvSpPr>
+          <p:cNvPr id="7" name="Content Placeholder 2">
+            <a:extLst>
+              <a:ext uri="{FF2B5EF4-FFF2-40B4-BE49-F238E27FC236}">
+                <a16:creationId xmlns:a16="http://schemas.microsoft.com/office/drawing/2014/main" id="{3F7A0A1D-2243-F9C0-5494-78010A78EC60}"/>
+              </a:ext>
+            </a:extLst>
+          </p:cNvPr>
+          <p:cNvSpPr txBox="1">
+            <a:spLocks/>
+          </p:cNvSpPr>
+          <p:nvPr/>
+        </p:nvSpPr>
+        <p:spPr>
+          <a:xfrm>
+            <a:off x="457201" y="5167619"/>
+            <a:ext cx="8168084" cy="1232482"/>
+          </a:xfrm>
+          <a:prstGeom prst="rect">
+            <a:avLst/>
+          </a:prstGeom>
+          <a:solidFill>
+            <a:schemeClr val="bg2"/>
+          </a:solidFill>
+        </p:spPr>
+        <p:txBody>
+          <a:bodyPr vert="horz" lIns="91440" tIns="45720" rIns="91440" bIns="45720" rtlCol="0">
+            <a:normAutofit fontScale="47500" lnSpcReduction="20000"/>
+          </a:bodyPr>
+          <a:lstStyle>
+            <a:lvl1pPr marL="342900" indent="-342900" algn="l" defTabSz="457200" rtl="0" eaLnBrk="1" latinLnBrk="0" hangingPunct="1">
+              <a:spcBef>
+                <a:spcPct val="20000"/>
+              </a:spcBef>
+              <a:buFont typeface="Arial"/>
+              <a:buChar char="•"/>
+              <a:defRPr sz="3200" kern="1200">
+                <a:solidFill>
+                  <a:schemeClr val="tx1"/>
+                </a:solidFill>
+                <a:latin typeface="+mn-lt"/>
+                <a:ea typeface="+mn-ea"/>
+                <a:cs typeface="+mn-cs"/>
+              </a:defRPr>
+            </a:lvl1pPr>
+            <a:lvl2pPr marL="742950" indent="-285750" algn="l" defTabSz="457200" rtl="0" eaLnBrk="1" latinLnBrk="0" hangingPunct="1">
+              <a:spcBef>
+                <a:spcPct val="20000"/>
+              </a:spcBef>
+              <a:buFont typeface="Arial"/>
+              <a:buChar char="–"/>
+              <a:defRPr sz="2800" kern="1200">
+                <a:solidFill>
+                  <a:schemeClr val="tx1"/>
+                </a:solidFill>
+                <a:latin typeface="+mn-lt"/>
+                <a:ea typeface="+mn-ea"/>
+                <a:cs typeface="+mn-cs"/>
+              </a:defRPr>
+            </a:lvl2pPr>
+            <a:lvl3pPr marL="1143000" indent="-228600" algn="l" defTabSz="457200" rtl="0" eaLnBrk="1" latinLnBrk="0" hangingPunct="1">
+              <a:spcBef>
+                <a:spcPct val="20000"/>
+              </a:spcBef>
+              <a:buFont typeface="Arial"/>
+              <a:buChar char="•"/>
+              <a:defRPr sz="2400" kern="1200">
+                <a:solidFill>
+                  <a:schemeClr val="tx1"/>
+                </a:solidFill>
+                <a:latin typeface="+mn-lt"/>
+                <a:ea typeface="+mn-ea"/>
+                <a:cs typeface="+mn-cs"/>
+              </a:defRPr>
+            </a:lvl3pPr>
+            <a:lvl4pPr marL="1600200" indent="-228600" algn="l" defTabSz="457200" rtl="0" eaLnBrk="1" latinLnBrk="0" hangingPunct="1">
+              <a:spcBef>
+                <a:spcPct val="20000"/>
+              </a:spcBef>
+              <a:buFont typeface="Arial"/>
+              <a:buChar char="–"/>
+              <a:defRPr sz="2000" kern="1200">
+                <a:solidFill>
+                  <a:schemeClr val="tx1"/>
+                </a:solidFill>
+                <a:latin typeface="+mn-lt"/>
+                <a:ea typeface="+mn-ea"/>
+                <a:cs typeface="+mn-cs"/>
+              </a:defRPr>
+            </a:lvl4pPr>
+            <a:lvl5pPr marL="2057400" indent="-228600" algn="l" defTabSz="457200" rtl="0" eaLnBrk="1" latinLnBrk="0" hangingPunct="1">
+              <a:spcBef>
+                <a:spcPct val="20000"/>
+              </a:spcBef>
+              <a:buFont typeface="Arial"/>
+              <a:buChar char="»"/>
+              <a:defRPr sz="2000" kern="1200">
+                <a:solidFill>
+                  <a:schemeClr val="tx1"/>
+                </a:solidFill>
+                <a:latin typeface="+mn-lt"/>
+                <a:ea typeface="+mn-ea"/>
+                <a:cs typeface="+mn-cs"/>
+              </a:defRPr>
+            </a:lvl5pPr>
+            <a:lvl6pPr marL="2514600" indent="-228600" algn="l" defTabSz="457200" rtl="0" eaLnBrk="1" latinLnBrk="0" hangingPunct="1">
+              <a:spcBef>
+                <a:spcPct val="20000"/>
+              </a:spcBef>
+              <a:buFont typeface="Arial"/>
+              <a:buChar char="•"/>
+              <a:defRPr sz="2000" kern="1200">
+                <a:solidFill>
+                  <a:schemeClr val="tx1"/>
+                </a:solidFill>
+                <a:latin typeface="+mn-lt"/>
+                <a:ea typeface="+mn-ea"/>
+                <a:cs typeface="+mn-cs"/>
+              </a:defRPr>
+            </a:lvl6pPr>
+            <a:lvl7pPr marL="2971800" indent="-228600" algn="l" defTabSz="457200" rtl="0" eaLnBrk="1" latinLnBrk="0" hangingPunct="1">
+              <a:spcBef>
+                <a:spcPct val="20000"/>
+              </a:spcBef>
+              <a:buFont typeface="Arial"/>
+              <a:buChar char="•"/>
+              <a:defRPr sz="2000" kern="1200">
+                <a:solidFill>
+                  <a:schemeClr val="tx1"/>
+                </a:solidFill>
+                <a:latin typeface="+mn-lt"/>
+                <a:ea typeface="+mn-ea"/>
+                <a:cs typeface="+mn-cs"/>
+              </a:defRPr>
+            </a:lvl7pPr>
+            <a:lvl8pPr marL="3429000" indent="-228600" algn="l" defTabSz="457200" rtl="0" eaLnBrk="1" latinLnBrk="0" hangingPunct="1">
+              <a:spcBef>
+                <a:spcPct val="20000"/>
+              </a:spcBef>
+              <a:buFont typeface="Arial"/>
+              <a:buChar char="•"/>
+              <a:defRPr sz="2000" kern="1200">
+                <a:solidFill>
+                  <a:schemeClr val="tx1"/>
+                </a:solidFill>
+                <a:latin typeface="+mn-lt"/>
+                <a:ea typeface="+mn-ea"/>
+                <a:cs typeface="+mn-cs"/>
+              </a:defRPr>
+            </a:lvl8pPr>
+            <a:lvl9pPr marL="3886200" indent="-228600" algn="l" defTabSz="457200" rtl="0" eaLnBrk="1" latinLnBrk="0" hangingPunct="1">
+              <a:spcBef>
+                <a:spcPct val="20000"/>
+              </a:spcBef>
+              <a:buFont typeface="Arial"/>
+              <a:buChar char="•"/>
+              <a:defRPr sz="2000" kern="1200">
+                <a:solidFill>
+                  <a:schemeClr val="tx1"/>
+                </a:solidFill>
+                <a:latin typeface="+mn-lt"/>
+                <a:ea typeface="+mn-ea"/>
+                <a:cs typeface="+mn-cs"/>
+              </a:defRPr>
+            </a:lvl9pPr>
+          </a:lstStyle>
+          <a:p>
+            <a:pPr marL="0" indent="0">
+              <a:buNone/>
+            </a:pPr>
+            <a:r>
+              <a:rPr lang="en-GB" dirty="0"/>
+              <a:t>🔎 </a:t>
+            </a:r>
+            <a:r>
+              <a:rPr lang="en-GB" b="1" dirty="0"/>
+              <a:t>Key Insights</a:t>
+            </a:r>
+          </a:p>
+          <a:p>
+            <a:r>
+              <a:rPr lang="en-GB" dirty="0"/>
+              <a:t>Lower LR (0.0005), higher batch size (64), and Adam optimizer significantly boost </a:t>
+            </a:r>
+            <a:r>
+              <a:rPr lang="en-GB" b="1" dirty="0"/>
+              <a:t>DenseNet1D</a:t>
+            </a:r>
+            <a:r>
+              <a:rPr lang="en-GB" dirty="0"/>
+              <a:t> performance in extended runs.</a:t>
+            </a:r>
+          </a:p>
+          <a:p>
+            <a:r>
+              <a:rPr lang="en-GB" dirty="0"/>
+              <a:t>Remove or modify configurations that consistently showed near-zero validation accuracy.</a:t>
+            </a:r>
+          </a:p>
+          <a:p>
+            <a:pPr marL="0" indent="0">
+              <a:buFont typeface="Arial"/>
+              <a:buNone/>
+            </a:pPr>
+            <a:endParaRPr lang="en-GB" b="1" dirty="0"/>
+          </a:p>
+        </p:txBody>
+      </p:sp>
       <p:graphicFrame>
         <p:nvGraphicFramePr>
-          <p:cNvPr id="5" name="Object 4">
+          <p:cNvPr id="4" name="Object 3">
             <a:extLst>
               <a:ext uri="{FF2B5EF4-FFF2-40B4-BE49-F238E27FC236}">
-                <a16:creationId xmlns:a16="http://schemas.microsoft.com/office/drawing/2014/main" id="{78A5D3C6-8FBA-5A86-C034-06C4A1C45027}"/>
+                <a16:creationId xmlns:a16="http://schemas.microsoft.com/office/drawing/2014/main" id="{0B8C0A97-041B-3659-532F-21CF82593372}"/>
               </a:ext>
             </a:extLst>
           </p:cNvPr>
           <p:cNvGraphicFramePr>
             <a:graphicFrameLocks noChangeAspect="1"/>
           </p:cNvGraphicFramePr>
-          <p:nvPr/>
+          <p:nvPr>
+            <p:extLst>
+              <p:ext uri="{D42A27DB-BD31-4B8C-83A1-F6EECF244321}">
+                <p14:modId xmlns:p14="http://schemas.microsoft.com/office/powerpoint/2010/main" val="2668726906"/>
+              </p:ext>
+            </p:extLst>
+          </p:nvPr>
         </p:nvGraphicFramePr>
         <p:xfrm>
-          <a:off x="6202545" y="6086475"/>
+          <a:off x="3607444" y="4337370"/>
           <a:ext cx="914400" cy="771525"/>
         </p:xfrm>
         <a:graphic>
           <a:graphicData uri="http://schemas.openxmlformats.org/presentationml/2006/ole">
             <mc:AlternateContent xmlns:mc="http://schemas.openxmlformats.org/markup-compatibility/2006">
               <mc:Choice xmlns:v="urn:schemas-microsoft-com:vml" Requires="v">
-                <p:oleObj name="Macro-Enabled Worksheet" showAsIcon="1" r:id="rId2" imgW="914400" imgH="771656" progId="Excel.SheetMacroEnabled.12">
+                <p:oleObj name="Packager Shell Object" showAsIcon="1" r:id="rId2" imgW="914400" imgH="771656" progId="Package">
                   <p:embed/>
                 </p:oleObj>
               </mc:Choice>
               <mc:Fallback>
-                <p:oleObj name="Macro-Enabled Worksheet" showAsIcon="1" r:id="rId2" imgW="914400" imgH="771656" progId="Excel.SheetMacroEnabled.12">
+                <p:oleObj name="Packager Shell Object" showAsIcon="1" r:id="rId2" imgW="914400" imgH="771656" progId="Package">
                   <p:embed/>
                   <p:pic>
                     <p:nvPicPr>
-                      <p:cNvPr id="5" name="Object 4">
-                        <a:extLst>
-                          <a:ext uri="{FF2B5EF4-FFF2-40B4-BE49-F238E27FC236}">
-                            <a16:creationId xmlns:a16="http://schemas.microsoft.com/office/drawing/2014/main" id="{444F33AC-EFEC-546C-5FDB-FD651F66FAD0}"/>
-                          </a:ext>
-                        </a:extLst>
-                      </p:cNvPr>
+                      <p:cNvPr id="0" name=""/>
                       <p:cNvPicPr/>
                       <p:nvPr/>
                     </p:nvPicPr>
@@ -12055,7 +14002,70 @@
                     </p:blipFill>
                     <p:spPr>
                       <a:xfrm>
-                        <a:off x="6202545" y="6086475"/>
+                        <a:off x="3607444" y="4337370"/>
+                        <a:ext cx="914400" cy="771525"/>
+                      </a:xfrm>
+                      <a:prstGeom prst="rect">
+                        <a:avLst/>
+                      </a:prstGeom>
+                    </p:spPr>
+                  </p:pic>
+                </p:oleObj>
+              </mc:Fallback>
+            </mc:AlternateContent>
+          </a:graphicData>
+        </a:graphic>
+      </p:graphicFrame>
+      <p:graphicFrame>
+        <p:nvGraphicFramePr>
+          <p:cNvPr id="5" name="Object 4">
+            <a:extLst>
+              <a:ext uri="{FF2B5EF4-FFF2-40B4-BE49-F238E27FC236}">
+                <a16:creationId xmlns:a16="http://schemas.microsoft.com/office/drawing/2014/main" id="{823B0DAB-BB4A-C8D2-647D-9B6884F68333}"/>
+              </a:ext>
+            </a:extLst>
+          </p:cNvPr>
+          <p:cNvGraphicFramePr>
+            <a:graphicFrameLocks noChangeAspect="1"/>
+          </p:cNvGraphicFramePr>
+          <p:nvPr>
+            <p:extLst>
+              <p:ext uri="{D42A27DB-BD31-4B8C-83A1-F6EECF244321}">
+                <p14:modId xmlns:p14="http://schemas.microsoft.com/office/powerpoint/2010/main" val="1802924745"/>
+              </p:ext>
+            </p:extLst>
+          </p:nvPr>
+        </p:nvGraphicFramePr>
+        <p:xfrm>
+          <a:off x="7540173" y="1031875"/>
+          <a:ext cx="914400" cy="771525"/>
+        </p:xfrm>
+        <a:graphic>
+          <a:graphicData uri="http://schemas.openxmlformats.org/presentationml/2006/ole">
+            <mc:AlternateContent xmlns:mc="http://schemas.openxmlformats.org/markup-compatibility/2006">
+              <mc:Choice xmlns:v="urn:schemas-microsoft-com:vml" Requires="v">
+                <p:oleObj name="Macro-Enabled Worksheet" showAsIcon="1" r:id="rId4" imgW="914400" imgH="771656" progId="Excel.SheetMacroEnabled.12">
+                  <p:embed/>
+                </p:oleObj>
+              </mc:Choice>
+              <mc:Fallback>
+                <p:oleObj name="Macro-Enabled Worksheet" showAsIcon="1" r:id="rId4" imgW="914400" imgH="771656" progId="Excel.SheetMacroEnabled.12">
+                  <p:embed/>
+                  <p:pic>
+                    <p:nvPicPr>
+                      <p:cNvPr id="0" name=""/>
+                      <p:cNvPicPr/>
+                      <p:nvPr/>
+                    </p:nvPicPr>
+                    <p:blipFill>
+                      <a:blip r:embed="rId5"/>
+                      <a:stretch>
+                        <a:fillRect/>
+                      </a:stretch>
+                    </p:blipFill>
+                    <p:spPr>
+                      <a:xfrm>
+                        <a:off x="7540173" y="1031875"/>
                         <a:ext cx="914400" cy="771525"/>
                       </a:xfrm>
                       <a:prstGeom prst="rect">
@@ -12072,7 +14082,3043 @@
     </p:spTree>
     <p:extLst>
       <p:ext uri="{BB962C8B-B14F-4D97-AF65-F5344CB8AC3E}">
-        <p14:creationId xmlns:p14="http://schemas.microsoft.com/office/powerpoint/2010/main" val="255328758"/>
+        <p14:creationId xmlns:p14="http://schemas.microsoft.com/office/powerpoint/2010/main" val="949626858"/>
+      </p:ext>
+    </p:extLst>
+  </p:cSld>
+  <p:clrMapOvr>
+    <a:masterClrMapping/>
+  </p:clrMapOvr>
+</p:sld>
+</file>
+
+<file path=ppt/slides/slide34.xml><?xml version="1.0" encoding="utf-8"?>
+<p:sld xmlns:a="http://schemas.openxmlformats.org/drawingml/2006/main" xmlns:r="http://schemas.openxmlformats.org/officeDocument/2006/relationships" xmlns:p="http://schemas.openxmlformats.org/presentationml/2006/main">
+  <p:cSld>
+    <p:spTree>
+      <p:nvGrpSpPr>
+        <p:cNvPr id="1" name="">
+          <a:extLst>
+            <a:ext uri="{FF2B5EF4-FFF2-40B4-BE49-F238E27FC236}">
+              <a16:creationId xmlns:a16="http://schemas.microsoft.com/office/drawing/2014/main" id="{D0DC5A6A-13E9-22A0-1D64-3352A22F06C7}"/>
+            </a:ext>
+          </a:extLst>
+        </p:cNvPr>
+        <p:cNvGrpSpPr/>
+        <p:nvPr/>
+      </p:nvGrpSpPr>
+      <p:grpSpPr>
+        <a:xfrm>
+          <a:off x="0" y="0"/>
+          <a:ext cx="0" cy="0"/>
+          <a:chOff x="0" y="0"/>
+          <a:chExt cx="0" cy="0"/>
+        </a:xfrm>
+      </p:grpSpPr>
+      <p:sp>
+        <p:nvSpPr>
+          <p:cNvPr id="2" name="Title 1">
+            <a:extLst>
+              <a:ext uri="{FF2B5EF4-FFF2-40B4-BE49-F238E27FC236}">
+                <a16:creationId xmlns:a16="http://schemas.microsoft.com/office/drawing/2014/main" id="{24788C38-5A6D-6640-B7BA-89FC9F9AFCD7}"/>
+              </a:ext>
+            </a:extLst>
+          </p:cNvPr>
+          <p:cNvSpPr>
+            <a:spLocks noGrp="1"/>
+          </p:cNvSpPr>
+          <p:nvPr>
+            <p:ph type="title"/>
+          </p:nvPr>
+        </p:nvSpPr>
+        <p:spPr/>
+        <p:txBody>
+          <a:bodyPr>
+            <a:noAutofit/>
+          </a:bodyPr>
+          <a:lstStyle/>
+          <a:p>
+            <a:r>
+              <a:rPr lang="en-GB" sz="3600" dirty="0"/>
+              <a:t>Experiment-3</a:t>
+            </a:r>
+          </a:p>
+        </p:txBody>
+      </p:sp>
+      <p:graphicFrame>
+        <p:nvGraphicFramePr>
+          <p:cNvPr id="4" name="Content Placeholder 3">
+            <a:extLst>
+              <a:ext uri="{FF2B5EF4-FFF2-40B4-BE49-F238E27FC236}">
+                <a16:creationId xmlns:a16="http://schemas.microsoft.com/office/drawing/2014/main" id="{A6FC5955-4651-67CF-8847-51C46ED3DAE1}"/>
+              </a:ext>
+            </a:extLst>
+          </p:cNvPr>
+          <p:cNvGraphicFramePr>
+            <a:graphicFrameLocks noGrp="1"/>
+          </p:cNvGraphicFramePr>
+          <p:nvPr>
+            <p:ph idx="1"/>
+          </p:nvPr>
+        </p:nvGraphicFramePr>
+        <p:xfrm>
+          <a:off x="606902" y="1497456"/>
+          <a:ext cx="7727894" cy="2184400"/>
+        </p:xfrm>
+        <a:graphic>
+          <a:graphicData uri="http://schemas.openxmlformats.org/drawingml/2006/table">
+            <a:tbl>
+              <a:tblPr firstRow="1" bandRow="1">
+                <a:tableStyleId>{5C22544A-7EE6-4342-B048-85BDC9FD1C3A}</a:tableStyleId>
+              </a:tblPr>
+              <a:tblGrid>
+                <a:gridCol w="1883645">
+                  <a:extLst>
+                    <a:ext uri="{9D8B030D-6E8A-4147-A177-3AD203B41FA5}">
+                      <a16:colId xmlns:a16="http://schemas.microsoft.com/office/drawing/2014/main" val="4008570941"/>
+                    </a:ext>
+                  </a:extLst>
+                </a:gridCol>
+                <a:gridCol w="1875120">
+                  <a:extLst>
+                    <a:ext uri="{9D8B030D-6E8A-4147-A177-3AD203B41FA5}">
+                      <a16:colId xmlns:a16="http://schemas.microsoft.com/office/drawing/2014/main" val="323992706"/>
+                    </a:ext>
+                  </a:extLst>
+                </a:gridCol>
+                <a:gridCol w="1381257">
+                  <a:extLst>
+                    <a:ext uri="{9D8B030D-6E8A-4147-A177-3AD203B41FA5}">
+                      <a16:colId xmlns:a16="http://schemas.microsoft.com/office/drawing/2014/main" val="3738054000"/>
+                    </a:ext>
+                  </a:extLst>
+                </a:gridCol>
+                <a:gridCol w="1524146">
+                  <a:extLst>
+                    <a:ext uri="{9D8B030D-6E8A-4147-A177-3AD203B41FA5}">
+                      <a16:colId xmlns:a16="http://schemas.microsoft.com/office/drawing/2014/main" val="2578734096"/>
+                    </a:ext>
+                  </a:extLst>
+                </a:gridCol>
+                <a:gridCol w="1063726">
+                  <a:extLst>
+                    <a:ext uri="{9D8B030D-6E8A-4147-A177-3AD203B41FA5}">
+                      <a16:colId xmlns:a16="http://schemas.microsoft.com/office/drawing/2014/main" val="2069725364"/>
+                    </a:ext>
+                  </a:extLst>
+                </a:gridCol>
+              </a:tblGrid>
+              <a:tr h="370840">
+                <a:tc>
+                  <a:txBody>
+                    <a:bodyPr/>
+                    <a:lstStyle/>
+                    <a:p>
+                      <a:pPr algn="l" fontAlgn="t" latinLnBrk="0">
+                        <a:buNone/>
+                      </a:pPr>
+                      <a:r>
+                        <a:rPr lang="en-GB" b="0" dirty="0">
+                          <a:effectLst/>
+                        </a:rPr>
+                        <a:t>Model Name</a:t>
+                      </a:r>
+                    </a:p>
+                  </a:txBody>
+                  <a:tcPr marL="76200" marR="76200" marT="76200" marB="76200"/>
+                </a:tc>
+                <a:tc>
+                  <a:txBody>
+                    <a:bodyPr/>
+                    <a:lstStyle/>
+                    <a:p>
+                      <a:pPr algn="l" fontAlgn="t" latinLnBrk="0">
+                        <a:buNone/>
+                      </a:pPr>
+                      <a:r>
+                        <a:rPr lang="en-GB" b="0" dirty="0">
+                          <a:effectLst/>
+                        </a:rPr>
+                        <a:t>CSI Input Size / Channels</a:t>
+                      </a:r>
+                    </a:p>
+                  </a:txBody>
+                  <a:tcPr marL="76200" marR="76200" marT="76200" marB="76200"/>
+                </a:tc>
+                <a:tc>
+                  <a:txBody>
+                    <a:bodyPr/>
+                    <a:lstStyle/>
+                    <a:p>
+                      <a:pPr algn="l" fontAlgn="t" latinLnBrk="0">
+                        <a:buNone/>
+                      </a:pPr>
+                      <a:r>
+                        <a:rPr lang="en-GB" b="0">
+                          <a:effectLst/>
+                        </a:rPr>
+                        <a:t>Meta Features</a:t>
+                      </a:r>
+                    </a:p>
+                  </a:txBody>
+                  <a:tcPr marL="76200" marR="76200" marT="76200" marB="76200"/>
+                </a:tc>
+                <a:tc>
+                  <a:txBody>
+                    <a:bodyPr/>
+                    <a:lstStyle/>
+                    <a:p>
+                      <a:pPr algn="l" fontAlgn="t" latinLnBrk="0">
+                        <a:buNone/>
+                      </a:pPr>
+                      <a:r>
+                        <a:rPr lang="en-GB" b="0">
+                          <a:effectLst/>
+                        </a:rPr>
+                        <a:t>Sequence / Window Size</a:t>
+                      </a:r>
+                    </a:p>
+                  </a:txBody>
+                  <a:tcPr marL="76200" marR="76200" marT="76200" marB="76200"/>
+                </a:tc>
+                <a:tc>
+                  <a:txBody>
+                    <a:bodyPr/>
+                    <a:lstStyle/>
+                    <a:p>
+                      <a:pPr algn="l" fontAlgn="t" latinLnBrk="0">
+                        <a:buNone/>
+                      </a:pPr>
+                      <a:r>
+                        <a:rPr lang="en-GB" b="0">
+                          <a:effectLst/>
+                        </a:rPr>
+                        <a:t>Output Classes</a:t>
+                      </a:r>
+                    </a:p>
+                  </a:txBody>
+                  <a:tcPr marL="76200" marR="76200" marT="76200" marB="76200"/>
+                </a:tc>
+                <a:extLst>
+                  <a:ext uri="{0D108BD9-81ED-4DB2-BD59-A6C34878D82A}">
+                    <a16:rowId xmlns:a16="http://schemas.microsoft.com/office/drawing/2014/main" val="3271397179"/>
+                  </a:ext>
+                </a:extLst>
+              </a:tr>
+              <a:tr h="370840">
+                <a:tc>
+                  <a:txBody>
+                    <a:bodyPr/>
+                    <a:lstStyle/>
+                    <a:p>
+                      <a:pPr fontAlgn="base" latinLnBrk="0">
+                        <a:buNone/>
+                      </a:pPr>
+                      <a:r>
+                        <a:rPr lang="en-GB" sz="1200" b="1" dirty="0" err="1">
+                          <a:effectLst/>
+                          <a:latin typeface="+mn-lt"/>
+                        </a:rPr>
+                        <a:t>CSILSTMNet</a:t>
+                      </a:r>
+                      <a:endParaRPr lang="en-GB" sz="1200" b="1" dirty="0">
+                        <a:effectLst/>
+                        <a:latin typeface="+mn-lt"/>
+                      </a:endParaRPr>
+                    </a:p>
+                  </a:txBody>
+                  <a:tcPr marL="76200" marR="76200" anchor="ctr"/>
+                </a:tc>
+                <a:tc>
+                  <a:txBody>
+                    <a:bodyPr/>
+                    <a:lstStyle/>
+                    <a:p>
+                      <a:pPr fontAlgn="base" latinLnBrk="0">
+                        <a:buNone/>
+                      </a:pPr>
+                      <a:r>
+                        <a:rPr lang="en-GB" sz="1200">
+                          <a:effectLst/>
+                          <a:latin typeface="+mn-lt"/>
+                        </a:rPr>
+                        <a:t>99</a:t>
+                      </a:r>
+                    </a:p>
+                  </a:txBody>
+                  <a:tcPr marL="76200" marR="76200" anchor="ctr"/>
+                </a:tc>
+                <a:tc>
+                  <a:txBody>
+                    <a:bodyPr/>
+                    <a:lstStyle/>
+                    <a:p>
+                      <a:pPr fontAlgn="base" latinLnBrk="0">
+                        <a:buNone/>
+                      </a:pPr>
+                      <a:r>
+                        <a:rPr lang="en-GB" sz="1200">
+                          <a:effectLst/>
+                          <a:latin typeface="+mn-lt"/>
+                        </a:rPr>
+                        <a:t>12</a:t>
+                      </a:r>
+                    </a:p>
+                  </a:txBody>
+                  <a:tcPr marL="76200" marR="76200" anchor="ctr"/>
+                </a:tc>
+                <a:tc>
+                  <a:txBody>
+                    <a:bodyPr/>
+                    <a:lstStyle/>
+                    <a:p>
+                      <a:pPr fontAlgn="base" latinLnBrk="0">
+                        <a:buNone/>
+                      </a:pPr>
+                      <a:r>
+                        <a:rPr lang="en-GB" sz="1200">
+                          <a:effectLst/>
+                          <a:latin typeface="+mn-lt"/>
+                        </a:rPr>
+                        <a:t>128</a:t>
+                      </a:r>
+                    </a:p>
+                  </a:txBody>
+                  <a:tcPr marL="76200" marR="76200" anchor="ctr"/>
+                </a:tc>
+                <a:tc>
+                  <a:txBody>
+                    <a:bodyPr/>
+                    <a:lstStyle/>
+                    <a:p>
+                      <a:pPr fontAlgn="base" latinLnBrk="0">
+                        <a:buNone/>
+                      </a:pPr>
+                      <a:r>
+                        <a:rPr lang="en-GB" sz="1200">
+                          <a:effectLst/>
+                          <a:latin typeface="+mn-lt"/>
+                        </a:rPr>
+                        <a:t>31</a:t>
+                      </a:r>
+                    </a:p>
+                  </a:txBody>
+                  <a:tcPr marL="76200" marR="76200" anchor="ctr"/>
+                </a:tc>
+                <a:extLst>
+                  <a:ext uri="{0D108BD9-81ED-4DB2-BD59-A6C34878D82A}">
+                    <a16:rowId xmlns:a16="http://schemas.microsoft.com/office/drawing/2014/main" val="1267054606"/>
+                  </a:ext>
+                </a:extLst>
+              </a:tr>
+              <a:tr h="370840">
+                <a:tc>
+                  <a:txBody>
+                    <a:bodyPr/>
+                    <a:lstStyle/>
+                    <a:p>
+                      <a:pPr fontAlgn="base" latinLnBrk="0">
+                        <a:buNone/>
+                      </a:pPr>
+                      <a:r>
+                        <a:rPr lang="en-GB" sz="1200" b="1">
+                          <a:effectLst/>
+                          <a:latin typeface="+mn-lt"/>
+                        </a:rPr>
+                        <a:t>DenseNet1D</a:t>
+                      </a:r>
+                    </a:p>
+                  </a:txBody>
+                  <a:tcPr marL="76200" marR="76200" anchor="ctr"/>
+                </a:tc>
+                <a:tc>
+                  <a:txBody>
+                    <a:bodyPr/>
+                    <a:lstStyle/>
+                    <a:p>
+                      <a:pPr fontAlgn="base" latinLnBrk="0">
+                        <a:buNone/>
+                      </a:pPr>
+                      <a:r>
+                        <a:rPr lang="en-GB" sz="1200">
+                          <a:effectLst/>
+                          <a:latin typeface="+mn-lt"/>
+                        </a:rPr>
+                        <a:t>99</a:t>
+                      </a:r>
+                    </a:p>
+                  </a:txBody>
+                  <a:tcPr marL="76200" marR="76200" anchor="ctr"/>
+                </a:tc>
+                <a:tc>
+                  <a:txBody>
+                    <a:bodyPr/>
+                    <a:lstStyle/>
+                    <a:p>
+                      <a:pPr fontAlgn="base" latinLnBrk="0">
+                        <a:buNone/>
+                      </a:pPr>
+                      <a:r>
+                        <a:rPr lang="en-GB" sz="1200">
+                          <a:effectLst/>
+                          <a:latin typeface="+mn-lt"/>
+                        </a:rPr>
+                        <a:t>12</a:t>
+                      </a:r>
+                    </a:p>
+                  </a:txBody>
+                  <a:tcPr marL="76200" marR="76200" anchor="ctr"/>
+                </a:tc>
+                <a:tc>
+                  <a:txBody>
+                    <a:bodyPr/>
+                    <a:lstStyle/>
+                    <a:p>
+                      <a:pPr fontAlgn="base" latinLnBrk="0">
+                        <a:buNone/>
+                      </a:pPr>
+                      <a:r>
+                        <a:rPr lang="en-GB" sz="1200">
+                          <a:effectLst/>
+                          <a:latin typeface="+mn-lt"/>
+                        </a:rPr>
+                        <a:t>—</a:t>
+                      </a:r>
+                    </a:p>
+                  </a:txBody>
+                  <a:tcPr marL="76200" marR="76200" anchor="ctr"/>
+                </a:tc>
+                <a:tc>
+                  <a:txBody>
+                    <a:bodyPr/>
+                    <a:lstStyle/>
+                    <a:p>
+                      <a:pPr fontAlgn="base" latinLnBrk="0">
+                        <a:buNone/>
+                      </a:pPr>
+                      <a:r>
+                        <a:rPr lang="en-GB" sz="1200">
+                          <a:effectLst/>
+                          <a:latin typeface="+mn-lt"/>
+                        </a:rPr>
+                        <a:t>31</a:t>
+                      </a:r>
+                    </a:p>
+                  </a:txBody>
+                  <a:tcPr marL="76200" marR="76200" anchor="ctr"/>
+                </a:tc>
+                <a:extLst>
+                  <a:ext uri="{0D108BD9-81ED-4DB2-BD59-A6C34878D82A}">
+                    <a16:rowId xmlns:a16="http://schemas.microsoft.com/office/drawing/2014/main" val="1890405566"/>
+                  </a:ext>
+                </a:extLst>
+              </a:tr>
+              <a:tr h="370840">
+                <a:tc>
+                  <a:txBody>
+                    <a:bodyPr/>
+                    <a:lstStyle/>
+                    <a:p>
+                      <a:pPr fontAlgn="base" latinLnBrk="0">
+                        <a:buNone/>
+                      </a:pPr>
+                      <a:r>
+                        <a:rPr lang="en-GB" sz="1200" b="1">
+                          <a:effectLst/>
+                          <a:latin typeface="+mn-lt"/>
+                        </a:rPr>
+                        <a:t>EfficientNet1DLSTM</a:t>
+                      </a:r>
+                    </a:p>
+                  </a:txBody>
+                  <a:tcPr marL="76200" marR="76200" anchor="ctr"/>
+                </a:tc>
+                <a:tc>
+                  <a:txBody>
+                    <a:bodyPr/>
+                    <a:lstStyle/>
+                    <a:p>
+                      <a:pPr fontAlgn="base" latinLnBrk="0">
+                        <a:buNone/>
+                      </a:pPr>
+                      <a:r>
+                        <a:rPr lang="en-GB" sz="1200" dirty="0">
+                          <a:effectLst/>
+                          <a:latin typeface="+mn-lt"/>
+                        </a:rPr>
+                        <a:t>99</a:t>
+                      </a:r>
+                    </a:p>
+                  </a:txBody>
+                  <a:tcPr marL="76200" marR="76200" anchor="ctr"/>
+                </a:tc>
+                <a:tc>
+                  <a:txBody>
+                    <a:bodyPr/>
+                    <a:lstStyle/>
+                    <a:p>
+                      <a:pPr fontAlgn="base" latinLnBrk="0">
+                        <a:buNone/>
+                      </a:pPr>
+                      <a:r>
+                        <a:rPr lang="en-GB" sz="1200">
+                          <a:effectLst/>
+                          <a:latin typeface="+mn-lt"/>
+                        </a:rPr>
+                        <a:t>12</a:t>
+                      </a:r>
+                    </a:p>
+                  </a:txBody>
+                  <a:tcPr marL="76200" marR="76200" anchor="ctr"/>
+                </a:tc>
+                <a:tc>
+                  <a:txBody>
+                    <a:bodyPr/>
+                    <a:lstStyle/>
+                    <a:p>
+                      <a:pPr fontAlgn="base" latinLnBrk="0">
+                        <a:buNone/>
+                      </a:pPr>
+                      <a:r>
+                        <a:rPr lang="en-GB" sz="1200">
+                          <a:effectLst/>
+                          <a:latin typeface="+mn-lt"/>
+                        </a:rPr>
+                        <a:t>128</a:t>
+                      </a:r>
+                    </a:p>
+                  </a:txBody>
+                  <a:tcPr marL="76200" marR="76200" anchor="ctr"/>
+                </a:tc>
+                <a:tc>
+                  <a:txBody>
+                    <a:bodyPr/>
+                    <a:lstStyle/>
+                    <a:p>
+                      <a:pPr fontAlgn="base" latinLnBrk="0">
+                        <a:buNone/>
+                      </a:pPr>
+                      <a:r>
+                        <a:rPr lang="en-GB" sz="1200">
+                          <a:effectLst/>
+                          <a:latin typeface="+mn-lt"/>
+                        </a:rPr>
+                        <a:t>31</a:t>
+                      </a:r>
+                    </a:p>
+                  </a:txBody>
+                  <a:tcPr marL="76200" marR="76200" anchor="ctr"/>
+                </a:tc>
+                <a:extLst>
+                  <a:ext uri="{0D108BD9-81ED-4DB2-BD59-A6C34878D82A}">
+                    <a16:rowId xmlns:a16="http://schemas.microsoft.com/office/drawing/2014/main" val="1037789132"/>
+                  </a:ext>
+                </a:extLst>
+              </a:tr>
+              <a:tr h="370840">
+                <a:tc>
+                  <a:txBody>
+                    <a:bodyPr/>
+                    <a:lstStyle/>
+                    <a:p>
+                      <a:pPr fontAlgn="base" latinLnBrk="0">
+                        <a:buNone/>
+                      </a:pPr>
+                      <a:r>
+                        <a:rPr lang="en-GB" sz="1200" b="1" dirty="0">
+                          <a:effectLst/>
+                          <a:latin typeface="+mn-lt"/>
+                        </a:rPr>
+                        <a:t>MobileNetV3_1D_LSTM</a:t>
+                      </a:r>
+                    </a:p>
+                  </a:txBody>
+                  <a:tcPr marL="76200" marR="76200" anchor="ctr"/>
+                </a:tc>
+                <a:tc>
+                  <a:txBody>
+                    <a:bodyPr/>
+                    <a:lstStyle/>
+                    <a:p>
+                      <a:pPr fontAlgn="base" latinLnBrk="0">
+                        <a:buNone/>
+                      </a:pPr>
+                      <a:r>
+                        <a:rPr lang="en-GB" sz="1200">
+                          <a:effectLst/>
+                          <a:latin typeface="+mn-lt"/>
+                        </a:rPr>
+                        <a:t>99</a:t>
+                      </a:r>
+                    </a:p>
+                  </a:txBody>
+                  <a:tcPr marL="76200" marR="76200" anchor="ctr"/>
+                </a:tc>
+                <a:tc>
+                  <a:txBody>
+                    <a:bodyPr/>
+                    <a:lstStyle/>
+                    <a:p>
+                      <a:pPr fontAlgn="base" latinLnBrk="0">
+                        <a:buNone/>
+                      </a:pPr>
+                      <a:r>
+                        <a:rPr lang="en-GB" sz="1200">
+                          <a:effectLst/>
+                          <a:latin typeface="+mn-lt"/>
+                        </a:rPr>
+                        <a:t>12</a:t>
+                      </a:r>
+                    </a:p>
+                  </a:txBody>
+                  <a:tcPr marL="76200" marR="76200" anchor="ctr"/>
+                </a:tc>
+                <a:tc>
+                  <a:txBody>
+                    <a:bodyPr/>
+                    <a:lstStyle/>
+                    <a:p>
+                      <a:pPr fontAlgn="base" latinLnBrk="0">
+                        <a:buNone/>
+                      </a:pPr>
+                      <a:r>
+                        <a:rPr lang="en-GB" sz="1200">
+                          <a:effectLst/>
+                          <a:latin typeface="+mn-lt"/>
+                        </a:rPr>
+                        <a:t>—</a:t>
+                      </a:r>
+                    </a:p>
+                  </a:txBody>
+                  <a:tcPr marL="76200" marR="76200" anchor="ctr"/>
+                </a:tc>
+                <a:tc>
+                  <a:txBody>
+                    <a:bodyPr/>
+                    <a:lstStyle/>
+                    <a:p>
+                      <a:pPr fontAlgn="base" latinLnBrk="0">
+                        <a:buNone/>
+                      </a:pPr>
+                      <a:r>
+                        <a:rPr lang="en-GB" sz="1200" dirty="0">
+                          <a:effectLst/>
+                          <a:latin typeface="+mn-lt"/>
+                        </a:rPr>
+                        <a:t>31</a:t>
+                      </a:r>
+                    </a:p>
+                  </a:txBody>
+                  <a:tcPr marL="76200" marR="76200" anchor="ctr"/>
+                </a:tc>
+                <a:extLst>
+                  <a:ext uri="{0D108BD9-81ED-4DB2-BD59-A6C34878D82A}">
+                    <a16:rowId xmlns:a16="http://schemas.microsoft.com/office/drawing/2014/main" val="2484458502"/>
+                  </a:ext>
+                </a:extLst>
+              </a:tr>
+            </a:tbl>
+          </a:graphicData>
+        </a:graphic>
+      </p:graphicFrame>
+      <p:graphicFrame>
+        <p:nvGraphicFramePr>
+          <p:cNvPr id="3" name="Table 2">
+            <a:extLst>
+              <a:ext uri="{FF2B5EF4-FFF2-40B4-BE49-F238E27FC236}">
+                <a16:creationId xmlns:a16="http://schemas.microsoft.com/office/drawing/2014/main" id="{ED96C4B3-7729-9692-AC89-709AA160F645}"/>
+              </a:ext>
+            </a:extLst>
+          </p:cNvPr>
+          <p:cNvGraphicFramePr>
+            <a:graphicFrameLocks noGrp="1"/>
+          </p:cNvGraphicFramePr>
+          <p:nvPr>
+            <p:extLst>
+              <p:ext uri="{D42A27DB-BD31-4B8C-83A1-F6EECF244321}">
+                <p14:modId xmlns:p14="http://schemas.microsoft.com/office/powerpoint/2010/main" val="3841205529"/>
+              </p:ext>
+            </p:extLst>
+          </p:nvPr>
+        </p:nvGraphicFramePr>
+        <p:xfrm>
+          <a:off x="606902" y="3800324"/>
+          <a:ext cx="7727894" cy="2225040"/>
+        </p:xfrm>
+        <a:graphic>
+          <a:graphicData uri="http://schemas.openxmlformats.org/drawingml/2006/table">
+            <a:tbl>
+              <a:tblPr firstRow="1" bandRow="1">
+                <a:tableStyleId>{5C22544A-7EE6-4342-B048-85BDC9FD1C3A}</a:tableStyleId>
+              </a:tblPr>
+              <a:tblGrid>
+                <a:gridCol w="3863947">
+                  <a:extLst>
+                    <a:ext uri="{9D8B030D-6E8A-4147-A177-3AD203B41FA5}">
+                      <a16:colId xmlns:a16="http://schemas.microsoft.com/office/drawing/2014/main" val="3398294999"/>
+                    </a:ext>
+                  </a:extLst>
+                </a:gridCol>
+                <a:gridCol w="3863947">
+                  <a:extLst>
+                    <a:ext uri="{9D8B030D-6E8A-4147-A177-3AD203B41FA5}">
+                      <a16:colId xmlns:a16="http://schemas.microsoft.com/office/drawing/2014/main" val="2376096010"/>
+                    </a:ext>
+                  </a:extLst>
+                </a:gridCol>
+              </a:tblGrid>
+              <a:tr h="370840">
+                <a:tc>
+                  <a:txBody>
+                    <a:bodyPr/>
+                    <a:lstStyle/>
+                    <a:p>
+                      <a:r>
+                        <a:rPr lang="en-IN" dirty="0"/>
+                        <a:t>Hyperparameter</a:t>
+                      </a:r>
+                      <a:endParaRPr lang="en-GB" dirty="0"/>
+                    </a:p>
+                  </a:txBody>
+                  <a:tcPr/>
+                </a:tc>
+                <a:tc>
+                  <a:txBody>
+                    <a:bodyPr/>
+                    <a:lstStyle/>
+                    <a:p>
+                      <a:r>
+                        <a:rPr lang="en-IN" dirty="0"/>
+                        <a:t>Values Tested</a:t>
+                      </a:r>
+                      <a:endParaRPr lang="en-GB" dirty="0"/>
+                    </a:p>
+                  </a:txBody>
+                  <a:tcPr/>
+                </a:tc>
+                <a:extLst>
+                  <a:ext uri="{0D108BD9-81ED-4DB2-BD59-A6C34878D82A}">
+                    <a16:rowId xmlns:a16="http://schemas.microsoft.com/office/drawing/2014/main" val="3705606927"/>
+                  </a:ext>
+                </a:extLst>
+              </a:tr>
+              <a:tr h="370840">
+                <a:tc>
+                  <a:txBody>
+                    <a:bodyPr/>
+                    <a:lstStyle/>
+                    <a:p>
+                      <a:r>
+                        <a:rPr lang="en-IN" dirty="0"/>
+                        <a:t>Learning Rate</a:t>
+                      </a:r>
+                      <a:endParaRPr lang="en-GB" dirty="0"/>
+                    </a:p>
+                  </a:txBody>
+                  <a:tcPr/>
+                </a:tc>
+                <a:tc>
+                  <a:txBody>
+                    <a:bodyPr/>
+                    <a:lstStyle/>
+                    <a:p>
+                      <a:r>
+                        <a:rPr lang="en-IN" dirty="0"/>
+                        <a:t>0.001, 0.0005</a:t>
+                      </a:r>
+                      <a:endParaRPr lang="en-GB" dirty="0"/>
+                    </a:p>
+                  </a:txBody>
+                  <a:tcPr/>
+                </a:tc>
+                <a:extLst>
+                  <a:ext uri="{0D108BD9-81ED-4DB2-BD59-A6C34878D82A}">
+                    <a16:rowId xmlns:a16="http://schemas.microsoft.com/office/drawing/2014/main" val="850416615"/>
+                  </a:ext>
+                </a:extLst>
+              </a:tr>
+              <a:tr h="370840">
+                <a:tc>
+                  <a:txBody>
+                    <a:bodyPr/>
+                    <a:lstStyle/>
+                    <a:p>
+                      <a:r>
+                        <a:rPr lang="en-IN" dirty="0"/>
+                        <a:t>Batch Size </a:t>
+                      </a:r>
+                      <a:endParaRPr lang="en-GB" dirty="0"/>
+                    </a:p>
+                  </a:txBody>
+                  <a:tcPr/>
+                </a:tc>
+                <a:tc>
+                  <a:txBody>
+                    <a:bodyPr/>
+                    <a:lstStyle/>
+                    <a:p>
+                      <a:pPr marL="0" marR="0" lvl="0" indent="0" algn="l" defTabSz="457200" rtl="0" eaLnBrk="1" fontAlgn="auto" latinLnBrk="0" hangingPunct="1">
+                        <a:lnSpc>
+                          <a:spcPct val="100000"/>
+                        </a:lnSpc>
+                        <a:spcBef>
+                          <a:spcPts val="0"/>
+                        </a:spcBef>
+                        <a:spcAft>
+                          <a:spcPts val="0"/>
+                        </a:spcAft>
+                        <a:buClrTx/>
+                        <a:buSzTx/>
+                        <a:buFontTx/>
+                        <a:buNone/>
+                        <a:tabLst/>
+                        <a:defRPr/>
+                      </a:pPr>
+                      <a:r>
+                        <a:rPr lang="en-GB" sz="1800" b="0" kern="1200" dirty="0">
+                          <a:solidFill>
+                            <a:schemeClr val="dk1"/>
+                          </a:solidFill>
+                          <a:effectLst/>
+                          <a:latin typeface="+mn-lt"/>
+                          <a:ea typeface="+mn-ea"/>
+                          <a:cs typeface="+mn-cs"/>
+                        </a:rPr>
+                        <a:t>16, 32</a:t>
+                      </a:r>
+                    </a:p>
+                  </a:txBody>
+                  <a:tcPr/>
+                </a:tc>
+                <a:extLst>
+                  <a:ext uri="{0D108BD9-81ED-4DB2-BD59-A6C34878D82A}">
+                    <a16:rowId xmlns:a16="http://schemas.microsoft.com/office/drawing/2014/main" val="3765307749"/>
+                  </a:ext>
+                </a:extLst>
+              </a:tr>
+              <a:tr h="370840">
+                <a:tc>
+                  <a:txBody>
+                    <a:bodyPr/>
+                    <a:lstStyle/>
+                    <a:p>
+                      <a:r>
+                        <a:rPr lang="en-GB" sz="1800" b="0" i="0" kern="1200" dirty="0">
+                          <a:solidFill>
+                            <a:schemeClr val="dk1"/>
+                          </a:solidFill>
+                          <a:effectLst/>
+                          <a:latin typeface="+mn-lt"/>
+                          <a:ea typeface="+mn-ea"/>
+                          <a:cs typeface="+mn-cs"/>
+                        </a:rPr>
+                        <a:t>Optimizer</a:t>
+                      </a:r>
+                      <a:endParaRPr lang="en-GB" dirty="0"/>
+                    </a:p>
+                  </a:txBody>
+                  <a:tcPr/>
+                </a:tc>
+                <a:tc>
+                  <a:txBody>
+                    <a:bodyPr/>
+                    <a:lstStyle/>
+                    <a:p>
+                      <a:r>
+                        <a:rPr lang="en-IN" dirty="0"/>
+                        <a:t>Adam</a:t>
+                      </a:r>
+                      <a:endParaRPr lang="en-GB" dirty="0"/>
+                    </a:p>
+                  </a:txBody>
+                  <a:tcPr/>
+                </a:tc>
+                <a:extLst>
+                  <a:ext uri="{0D108BD9-81ED-4DB2-BD59-A6C34878D82A}">
+                    <a16:rowId xmlns:a16="http://schemas.microsoft.com/office/drawing/2014/main" val="53225989"/>
+                  </a:ext>
+                </a:extLst>
+              </a:tr>
+              <a:tr h="370840">
+                <a:tc>
+                  <a:txBody>
+                    <a:bodyPr/>
+                    <a:lstStyle/>
+                    <a:p>
+                      <a:pPr fontAlgn="base" latinLnBrk="0">
+                        <a:buNone/>
+                      </a:pPr>
+                      <a:r>
+                        <a:rPr lang="en-GB" dirty="0">
+                          <a:effectLst/>
+                        </a:rPr>
+                        <a:t>Weight Decay</a:t>
+                      </a:r>
+                    </a:p>
+                  </a:txBody>
+                  <a:tcPr marL="76200" marR="76200" anchor="ctr"/>
+                </a:tc>
+                <a:tc>
+                  <a:txBody>
+                    <a:bodyPr/>
+                    <a:lstStyle/>
+                    <a:p>
+                      <a:pPr fontAlgn="base" latinLnBrk="0">
+                        <a:buNone/>
+                      </a:pPr>
+                      <a:r>
+                        <a:rPr lang="en-GB" sz="1800" b="0" i="0" kern="1200" dirty="0">
+                          <a:solidFill>
+                            <a:schemeClr val="dk1"/>
+                          </a:solidFill>
+                          <a:effectLst/>
+                          <a:latin typeface="+mn-lt"/>
+                          <a:ea typeface="+mn-ea"/>
+                          <a:cs typeface="+mn-cs"/>
+                        </a:rPr>
+                        <a:t>1e-4</a:t>
+                      </a:r>
+                      <a:endParaRPr lang="en-GB" dirty="0">
+                        <a:effectLst/>
+                      </a:endParaRPr>
+                    </a:p>
+                  </a:txBody>
+                  <a:tcPr marL="76200" marR="76200" anchor="ctr"/>
+                </a:tc>
+                <a:extLst>
+                  <a:ext uri="{0D108BD9-81ED-4DB2-BD59-A6C34878D82A}">
+                    <a16:rowId xmlns:a16="http://schemas.microsoft.com/office/drawing/2014/main" val="2372432037"/>
+                  </a:ext>
+                </a:extLst>
+              </a:tr>
+              <a:tr h="370840">
+                <a:tc>
+                  <a:txBody>
+                    <a:bodyPr/>
+                    <a:lstStyle/>
+                    <a:p>
+                      <a:r>
+                        <a:rPr lang="en-IN" dirty="0"/>
+                        <a:t>Epochs</a:t>
+                      </a:r>
+                      <a:endParaRPr lang="en-GB" dirty="0"/>
+                    </a:p>
+                  </a:txBody>
+                  <a:tcPr/>
+                </a:tc>
+                <a:tc>
+                  <a:txBody>
+                    <a:bodyPr/>
+                    <a:lstStyle/>
+                    <a:p>
+                      <a:r>
+                        <a:rPr lang="en-IN" dirty="0"/>
+                        <a:t>100</a:t>
+                      </a:r>
+                      <a:endParaRPr lang="en-GB" dirty="0"/>
+                    </a:p>
+                  </a:txBody>
+                  <a:tcPr/>
+                </a:tc>
+                <a:extLst>
+                  <a:ext uri="{0D108BD9-81ED-4DB2-BD59-A6C34878D82A}">
+                    <a16:rowId xmlns:a16="http://schemas.microsoft.com/office/drawing/2014/main" val="1293429995"/>
+                  </a:ext>
+                </a:extLst>
+              </a:tr>
+            </a:tbl>
+          </a:graphicData>
+        </a:graphic>
+      </p:graphicFrame>
+    </p:spTree>
+    <p:extLst>
+      <p:ext uri="{BB962C8B-B14F-4D97-AF65-F5344CB8AC3E}">
+        <p14:creationId xmlns:p14="http://schemas.microsoft.com/office/powerpoint/2010/main" val="1814630152"/>
+      </p:ext>
+    </p:extLst>
+  </p:cSld>
+  <p:clrMapOvr>
+    <a:masterClrMapping/>
+  </p:clrMapOvr>
+</p:sld>
+</file>
+
+<file path=ppt/slides/slide35.xml><?xml version="1.0" encoding="utf-8"?>
+<p:sld xmlns:a="http://schemas.openxmlformats.org/drawingml/2006/main" xmlns:r="http://schemas.openxmlformats.org/officeDocument/2006/relationships" xmlns:p="http://schemas.openxmlformats.org/presentationml/2006/main">
+  <p:cSld>
+    <p:spTree>
+      <p:nvGrpSpPr>
+        <p:cNvPr id="1" name="">
+          <a:extLst>
+            <a:ext uri="{FF2B5EF4-FFF2-40B4-BE49-F238E27FC236}">
+              <a16:creationId xmlns:a16="http://schemas.microsoft.com/office/drawing/2014/main" id="{F22D3574-A692-11FA-7387-6F6E6457BC6D}"/>
+            </a:ext>
+          </a:extLst>
+        </p:cNvPr>
+        <p:cNvGrpSpPr/>
+        <p:nvPr/>
+      </p:nvGrpSpPr>
+      <p:grpSpPr>
+        <a:xfrm>
+          <a:off x="0" y="0"/>
+          <a:ext cx="0" cy="0"/>
+          <a:chOff x="0" y="0"/>
+          <a:chExt cx="0" cy="0"/>
+        </a:xfrm>
+      </p:grpSpPr>
+      <p:sp>
+        <p:nvSpPr>
+          <p:cNvPr id="2" name="Title 1">
+            <a:extLst>
+              <a:ext uri="{FF2B5EF4-FFF2-40B4-BE49-F238E27FC236}">
+                <a16:creationId xmlns:a16="http://schemas.microsoft.com/office/drawing/2014/main" id="{D1F164F0-6F50-AD49-F4BA-86E1098B1A44}"/>
+              </a:ext>
+            </a:extLst>
+          </p:cNvPr>
+          <p:cNvSpPr>
+            <a:spLocks noGrp="1"/>
+          </p:cNvSpPr>
+          <p:nvPr>
+            <p:ph type="title"/>
+          </p:nvPr>
+        </p:nvSpPr>
+        <p:spPr>
+          <a:xfrm>
+            <a:off x="457200" y="274638"/>
+            <a:ext cx="8229600" cy="721092"/>
+          </a:xfrm>
+        </p:spPr>
+        <p:txBody>
+          <a:bodyPr>
+            <a:noAutofit/>
+          </a:bodyPr>
+          <a:lstStyle/>
+          <a:p>
+            <a:r>
+              <a:rPr lang="en-GB" dirty="0"/>
+              <a:t>ML Training &amp; Validation Summary</a:t>
+            </a:r>
+            <a:endParaRPr lang="en-GB" sz="3600" dirty="0"/>
+          </a:p>
+        </p:txBody>
+      </p:sp>
+      <p:sp>
+        <p:nvSpPr>
+          <p:cNvPr id="3" name="Content Placeholder 2">
+            <a:extLst>
+              <a:ext uri="{FF2B5EF4-FFF2-40B4-BE49-F238E27FC236}">
+                <a16:creationId xmlns:a16="http://schemas.microsoft.com/office/drawing/2014/main" id="{6C4822A8-DBEE-3F5C-FEA5-A997F6B7A5C2}"/>
+              </a:ext>
+            </a:extLst>
+          </p:cNvPr>
+          <p:cNvSpPr>
+            <a:spLocks noGrp="1"/>
+          </p:cNvSpPr>
+          <p:nvPr>
+            <p:ph idx="1"/>
+          </p:nvPr>
+        </p:nvSpPr>
+        <p:spPr>
+          <a:xfrm>
+            <a:off x="457201" y="1440383"/>
+            <a:ext cx="3936774" cy="2419518"/>
+          </a:xfrm>
+          <a:solidFill>
+            <a:schemeClr val="bg2"/>
+          </a:solidFill>
+        </p:spPr>
+        <p:txBody>
+          <a:bodyPr>
+            <a:normAutofit fontScale="47500" lnSpcReduction="20000"/>
+          </a:bodyPr>
+          <a:lstStyle/>
+          <a:p>
+            <a:pPr marL="0" indent="0">
+              <a:buNone/>
+            </a:pPr>
+            <a:r>
+              <a:rPr lang="en-GB" b="1" dirty="0"/>
+              <a:t>Best Performing Model &amp; Hyperparameters</a:t>
+            </a:r>
+          </a:p>
+          <a:p>
+            <a:r>
+              <a:rPr lang="en-GB" b="1" dirty="0"/>
+              <a:t>Model</a:t>
+            </a:r>
+            <a:r>
+              <a:rPr lang="en-GB" dirty="0"/>
+              <a:t>: DenseNet1D </a:t>
+            </a:r>
+          </a:p>
+          <a:p>
+            <a:r>
+              <a:rPr lang="en-GB" b="1" dirty="0"/>
+              <a:t>Val Accuracy</a:t>
+            </a:r>
+            <a:r>
+              <a:rPr lang="en-GB" dirty="0"/>
+              <a:t>: 0.984025187 </a:t>
+            </a:r>
+          </a:p>
+          <a:p>
+            <a:r>
+              <a:rPr lang="en-GB" b="1" dirty="0"/>
+              <a:t>Val F1</a:t>
+            </a:r>
+            <a:r>
+              <a:rPr lang="en-GB" dirty="0"/>
+              <a:t>: 0.984000433 </a:t>
+            </a:r>
+          </a:p>
+          <a:p>
+            <a:r>
+              <a:rPr lang="en-GB" b="1" dirty="0"/>
+              <a:t>Hyperparameters</a:t>
+            </a:r>
+            <a:r>
+              <a:rPr lang="en-GB" dirty="0"/>
+              <a:t>:</a:t>
+            </a:r>
+          </a:p>
+          <a:p>
+            <a:pPr lvl="1"/>
+            <a:r>
+              <a:rPr lang="en-GB" b="1" dirty="0"/>
+              <a:t>Learning Rate</a:t>
+            </a:r>
+            <a:r>
+              <a:rPr lang="en-GB" dirty="0"/>
+              <a:t>: 0.0005</a:t>
+            </a:r>
+          </a:p>
+          <a:p>
+            <a:pPr lvl="1"/>
+            <a:r>
+              <a:rPr lang="en-GB" b="1" dirty="0"/>
+              <a:t>Batch Size</a:t>
+            </a:r>
+            <a:r>
+              <a:rPr lang="en-GB" dirty="0"/>
+              <a:t>: 16</a:t>
+            </a:r>
+          </a:p>
+          <a:p>
+            <a:pPr lvl="1"/>
+            <a:r>
+              <a:rPr lang="en-GB" b="1" dirty="0"/>
+              <a:t>Optimizer</a:t>
+            </a:r>
+            <a:r>
+              <a:rPr lang="en-GB" dirty="0"/>
+              <a:t>: Adam</a:t>
+            </a:r>
+          </a:p>
+          <a:p>
+            <a:pPr lvl="1"/>
+            <a:r>
+              <a:rPr lang="en-GB" b="1" dirty="0"/>
+              <a:t>Weight Decay</a:t>
+            </a:r>
+            <a:r>
+              <a:rPr lang="en-GB" dirty="0"/>
+              <a:t>: 1e-04</a:t>
+            </a:r>
+          </a:p>
+          <a:p>
+            <a:pPr lvl="1"/>
+            <a:r>
+              <a:rPr lang="en-GB" b="1" dirty="0"/>
+              <a:t>Epochs</a:t>
+            </a:r>
+            <a:r>
+              <a:rPr lang="en-GB" dirty="0"/>
+              <a:t>: 100</a:t>
+            </a:r>
+          </a:p>
+        </p:txBody>
+      </p:sp>
+      <p:sp>
+        <p:nvSpPr>
+          <p:cNvPr id="6" name="Content Placeholder 2">
+            <a:extLst>
+              <a:ext uri="{FF2B5EF4-FFF2-40B4-BE49-F238E27FC236}">
+                <a16:creationId xmlns:a16="http://schemas.microsoft.com/office/drawing/2014/main" id="{B36D42B4-1035-4C78-933F-B7F426EDC2D0}"/>
+              </a:ext>
+            </a:extLst>
+          </p:cNvPr>
+          <p:cNvSpPr txBox="1">
+            <a:spLocks/>
+          </p:cNvSpPr>
+          <p:nvPr/>
+        </p:nvSpPr>
+        <p:spPr>
+          <a:xfrm>
+            <a:off x="4602764" y="1440384"/>
+            <a:ext cx="4073246" cy="2419518"/>
+          </a:xfrm>
+          <a:prstGeom prst="rect">
+            <a:avLst/>
+          </a:prstGeom>
+          <a:solidFill>
+            <a:schemeClr val="bg1">
+              <a:lumMod val="95000"/>
+            </a:schemeClr>
+          </a:solidFill>
+        </p:spPr>
+        <p:txBody>
+          <a:bodyPr vert="horz" lIns="91440" tIns="45720" rIns="91440" bIns="45720" rtlCol="0">
+            <a:normAutofit fontScale="40000" lnSpcReduction="20000"/>
+          </a:bodyPr>
+          <a:lstStyle>
+            <a:lvl1pPr marL="342900" indent="-342900" algn="l" defTabSz="457200" rtl="0" eaLnBrk="1" latinLnBrk="0" hangingPunct="1">
+              <a:spcBef>
+                <a:spcPct val="20000"/>
+              </a:spcBef>
+              <a:buFont typeface="Arial"/>
+              <a:buChar char="•"/>
+              <a:defRPr sz="3200" kern="1200">
+                <a:solidFill>
+                  <a:schemeClr val="tx1"/>
+                </a:solidFill>
+                <a:latin typeface="+mn-lt"/>
+                <a:ea typeface="+mn-ea"/>
+                <a:cs typeface="+mn-cs"/>
+              </a:defRPr>
+            </a:lvl1pPr>
+            <a:lvl2pPr marL="742950" indent="-285750" algn="l" defTabSz="457200" rtl="0" eaLnBrk="1" latinLnBrk="0" hangingPunct="1">
+              <a:spcBef>
+                <a:spcPct val="20000"/>
+              </a:spcBef>
+              <a:buFont typeface="Arial"/>
+              <a:buChar char="–"/>
+              <a:defRPr sz="2800" kern="1200">
+                <a:solidFill>
+                  <a:schemeClr val="tx1"/>
+                </a:solidFill>
+                <a:latin typeface="+mn-lt"/>
+                <a:ea typeface="+mn-ea"/>
+                <a:cs typeface="+mn-cs"/>
+              </a:defRPr>
+            </a:lvl2pPr>
+            <a:lvl3pPr marL="1143000" indent="-228600" algn="l" defTabSz="457200" rtl="0" eaLnBrk="1" latinLnBrk="0" hangingPunct="1">
+              <a:spcBef>
+                <a:spcPct val="20000"/>
+              </a:spcBef>
+              <a:buFont typeface="Arial"/>
+              <a:buChar char="•"/>
+              <a:defRPr sz="2400" kern="1200">
+                <a:solidFill>
+                  <a:schemeClr val="tx1"/>
+                </a:solidFill>
+                <a:latin typeface="+mn-lt"/>
+                <a:ea typeface="+mn-ea"/>
+                <a:cs typeface="+mn-cs"/>
+              </a:defRPr>
+            </a:lvl3pPr>
+            <a:lvl4pPr marL="1600200" indent="-228600" algn="l" defTabSz="457200" rtl="0" eaLnBrk="1" latinLnBrk="0" hangingPunct="1">
+              <a:spcBef>
+                <a:spcPct val="20000"/>
+              </a:spcBef>
+              <a:buFont typeface="Arial"/>
+              <a:buChar char="–"/>
+              <a:defRPr sz="2000" kern="1200">
+                <a:solidFill>
+                  <a:schemeClr val="tx1"/>
+                </a:solidFill>
+                <a:latin typeface="+mn-lt"/>
+                <a:ea typeface="+mn-ea"/>
+                <a:cs typeface="+mn-cs"/>
+              </a:defRPr>
+            </a:lvl4pPr>
+            <a:lvl5pPr marL="2057400" indent="-228600" algn="l" defTabSz="457200" rtl="0" eaLnBrk="1" latinLnBrk="0" hangingPunct="1">
+              <a:spcBef>
+                <a:spcPct val="20000"/>
+              </a:spcBef>
+              <a:buFont typeface="Arial"/>
+              <a:buChar char="»"/>
+              <a:defRPr sz="2000" kern="1200">
+                <a:solidFill>
+                  <a:schemeClr val="tx1"/>
+                </a:solidFill>
+                <a:latin typeface="+mn-lt"/>
+                <a:ea typeface="+mn-ea"/>
+                <a:cs typeface="+mn-cs"/>
+              </a:defRPr>
+            </a:lvl5pPr>
+            <a:lvl6pPr marL="2514600" indent="-228600" algn="l" defTabSz="457200" rtl="0" eaLnBrk="1" latinLnBrk="0" hangingPunct="1">
+              <a:spcBef>
+                <a:spcPct val="20000"/>
+              </a:spcBef>
+              <a:buFont typeface="Arial"/>
+              <a:buChar char="•"/>
+              <a:defRPr sz="2000" kern="1200">
+                <a:solidFill>
+                  <a:schemeClr val="tx1"/>
+                </a:solidFill>
+                <a:latin typeface="+mn-lt"/>
+                <a:ea typeface="+mn-ea"/>
+                <a:cs typeface="+mn-cs"/>
+              </a:defRPr>
+            </a:lvl6pPr>
+            <a:lvl7pPr marL="2971800" indent="-228600" algn="l" defTabSz="457200" rtl="0" eaLnBrk="1" latinLnBrk="0" hangingPunct="1">
+              <a:spcBef>
+                <a:spcPct val="20000"/>
+              </a:spcBef>
+              <a:buFont typeface="Arial"/>
+              <a:buChar char="•"/>
+              <a:defRPr sz="2000" kern="1200">
+                <a:solidFill>
+                  <a:schemeClr val="tx1"/>
+                </a:solidFill>
+                <a:latin typeface="+mn-lt"/>
+                <a:ea typeface="+mn-ea"/>
+                <a:cs typeface="+mn-cs"/>
+              </a:defRPr>
+            </a:lvl7pPr>
+            <a:lvl8pPr marL="3429000" indent="-228600" algn="l" defTabSz="457200" rtl="0" eaLnBrk="1" latinLnBrk="0" hangingPunct="1">
+              <a:spcBef>
+                <a:spcPct val="20000"/>
+              </a:spcBef>
+              <a:buFont typeface="Arial"/>
+              <a:buChar char="•"/>
+              <a:defRPr sz="2000" kern="1200">
+                <a:solidFill>
+                  <a:schemeClr val="tx1"/>
+                </a:solidFill>
+                <a:latin typeface="+mn-lt"/>
+                <a:ea typeface="+mn-ea"/>
+                <a:cs typeface="+mn-cs"/>
+              </a:defRPr>
+            </a:lvl8pPr>
+            <a:lvl9pPr marL="3886200" indent="-228600" algn="l" defTabSz="457200" rtl="0" eaLnBrk="1" latinLnBrk="0" hangingPunct="1">
+              <a:spcBef>
+                <a:spcPct val="20000"/>
+              </a:spcBef>
+              <a:buFont typeface="Arial"/>
+              <a:buChar char="•"/>
+              <a:defRPr sz="2000" kern="1200">
+                <a:solidFill>
+                  <a:schemeClr val="tx1"/>
+                </a:solidFill>
+                <a:latin typeface="+mn-lt"/>
+                <a:ea typeface="+mn-ea"/>
+                <a:cs typeface="+mn-cs"/>
+              </a:defRPr>
+            </a:lvl9pPr>
+          </a:lstStyle>
+          <a:p>
+            <a:pPr marL="0" indent="0">
+              <a:buNone/>
+            </a:pPr>
+            <a:r>
+              <a:rPr lang="en-GB" b="1" dirty="0"/>
+              <a:t>⚠️Combinations That Did Not Work</a:t>
+            </a:r>
+          </a:p>
+          <a:p>
+            <a:r>
+              <a:rPr lang="en-GB" dirty="0"/>
+              <a:t>Many runs with:</a:t>
+            </a:r>
+          </a:p>
+          <a:p>
+            <a:pPr lvl="1"/>
+            <a:r>
+              <a:rPr lang="en-GB" b="1" dirty="0"/>
+              <a:t>Batch Size</a:t>
+            </a:r>
+            <a:r>
+              <a:rPr lang="en-GB" dirty="0"/>
+              <a:t> = 32</a:t>
+            </a:r>
+          </a:p>
+          <a:p>
+            <a:pPr lvl="1"/>
+            <a:r>
+              <a:rPr lang="en-GB" b="1" dirty="0"/>
+              <a:t>Optimizer Adam</a:t>
+            </a:r>
+            <a:r>
+              <a:rPr lang="en-GB" dirty="0"/>
+              <a:t> with LR 0.001</a:t>
+            </a:r>
+          </a:p>
+          <a:p>
+            <a:pPr lvl="1"/>
+            <a:r>
+              <a:rPr lang="en-GB" b="1" dirty="0"/>
+              <a:t>Weight Decay</a:t>
+            </a:r>
+            <a:r>
+              <a:rPr lang="en-GB" dirty="0"/>
+              <a:t> = 0.0001 </a:t>
+            </a:r>
+          </a:p>
+          <a:p>
+            <a:pPr lvl="1"/>
+            <a:r>
+              <a:rPr lang="en-GB" b="1" dirty="0"/>
+              <a:t>Models</a:t>
+            </a:r>
+            <a:r>
+              <a:rPr lang="en-GB" dirty="0"/>
+              <a:t>: EfficientNet1DLSTM, </a:t>
+            </a:r>
+            <a:r>
+              <a:rPr lang="en-GB" dirty="0" err="1"/>
+              <a:t>CSILSTMNet</a:t>
+            </a:r>
+            <a:r>
+              <a:rPr lang="en-GB" dirty="0"/>
+              <a:t>, DenseNet1D, MobileNetV3_1D_LSTM</a:t>
+            </a:r>
+            <a:br>
+              <a:rPr lang="en-GB" dirty="0"/>
+            </a:br>
+            <a:r>
+              <a:rPr lang="en-GB" dirty="0"/>
+              <a:t>yielded Val Accuracy and Val F1 close to 0 or under 0.70.</a:t>
+            </a:r>
+          </a:p>
+          <a:p>
+            <a:r>
+              <a:rPr lang="en-GB" dirty="0"/>
+              <a:t>Especially for EfficientNet1DLSTM, MobileNetV3_1D_LSTM, and </a:t>
+            </a:r>
+            <a:r>
+              <a:rPr lang="en-GB" dirty="0" err="1"/>
+              <a:t>CSILSTMNet</a:t>
+            </a:r>
+            <a:r>
+              <a:rPr lang="en-GB" dirty="0"/>
+              <a:t> high batch size =32 failed to generalize, leading to under-utilization of gradient noise.</a:t>
+            </a:r>
+          </a:p>
+          <a:p>
+            <a:pPr marL="0" indent="0">
+              <a:buNone/>
+            </a:pPr>
+            <a:endParaRPr lang="en-GB" b="1" dirty="0"/>
+          </a:p>
+        </p:txBody>
+      </p:sp>
+      <p:graphicFrame>
+        <p:nvGraphicFramePr>
+          <p:cNvPr id="4" name="Object 3">
+            <a:extLst>
+              <a:ext uri="{FF2B5EF4-FFF2-40B4-BE49-F238E27FC236}">
+                <a16:creationId xmlns:a16="http://schemas.microsoft.com/office/drawing/2014/main" id="{96659DC8-5A1E-56C2-26FF-B862AECB166F}"/>
+              </a:ext>
+            </a:extLst>
+          </p:cNvPr>
+          <p:cNvGraphicFramePr>
+            <a:graphicFrameLocks noChangeAspect="1"/>
+          </p:cNvGraphicFramePr>
+          <p:nvPr/>
+        </p:nvGraphicFramePr>
+        <p:xfrm>
+          <a:off x="3607444" y="4337370"/>
+          <a:ext cx="914400" cy="771525"/>
+        </p:xfrm>
+        <a:graphic>
+          <a:graphicData uri="http://schemas.openxmlformats.org/presentationml/2006/ole">
+            <mc:AlternateContent xmlns:mc="http://schemas.openxmlformats.org/markup-compatibility/2006">
+              <mc:Choice xmlns:v="urn:schemas-microsoft-com:vml" Requires="v">
+                <p:oleObj name="Packager Shell Object" showAsIcon="1" r:id="rId2" imgW="914400" imgH="771656" progId="Package">
+                  <p:embed/>
+                </p:oleObj>
+              </mc:Choice>
+              <mc:Fallback>
+                <p:oleObj name="Packager Shell Object" showAsIcon="1" r:id="rId2" imgW="914400" imgH="771656" progId="Package">
+                  <p:embed/>
+                  <p:pic>
+                    <p:nvPicPr>
+                      <p:cNvPr id="4" name="Object 3">
+                        <a:extLst>
+                          <a:ext uri="{FF2B5EF4-FFF2-40B4-BE49-F238E27FC236}">
+                            <a16:creationId xmlns:a16="http://schemas.microsoft.com/office/drawing/2014/main" id="{AD65B440-6341-515C-1FB0-DBBC5C287D9A}"/>
+                          </a:ext>
+                        </a:extLst>
+                      </p:cNvPr>
+                      <p:cNvPicPr/>
+                      <p:nvPr/>
+                    </p:nvPicPr>
+                    <p:blipFill>
+                      <a:blip r:embed="rId3"/>
+                      <a:stretch>
+                        <a:fillRect/>
+                      </a:stretch>
+                    </p:blipFill>
+                    <p:spPr>
+                      <a:xfrm>
+                        <a:off x="3607444" y="4337370"/>
+                        <a:ext cx="914400" cy="771525"/>
+                      </a:xfrm>
+                      <a:prstGeom prst="rect">
+                        <a:avLst/>
+                      </a:prstGeom>
+                    </p:spPr>
+                  </p:pic>
+                </p:oleObj>
+              </mc:Fallback>
+            </mc:AlternateContent>
+          </a:graphicData>
+        </a:graphic>
+      </p:graphicFrame>
+      <p:sp>
+        <p:nvSpPr>
+          <p:cNvPr id="8" name="Content Placeholder 2">
+            <a:extLst>
+              <a:ext uri="{FF2B5EF4-FFF2-40B4-BE49-F238E27FC236}">
+                <a16:creationId xmlns:a16="http://schemas.microsoft.com/office/drawing/2014/main" id="{9CAFA419-337E-070C-0B0A-71688FEFC642}"/>
+              </a:ext>
+            </a:extLst>
+          </p:cNvPr>
+          <p:cNvSpPr txBox="1">
+            <a:spLocks/>
+          </p:cNvSpPr>
+          <p:nvPr/>
+        </p:nvSpPr>
+        <p:spPr>
+          <a:xfrm>
+            <a:off x="467990" y="3932729"/>
+            <a:ext cx="3936774" cy="2354783"/>
+          </a:xfrm>
+          <a:prstGeom prst="rect">
+            <a:avLst/>
+          </a:prstGeom>
+          <a:solidFill>
+            <a:schemeClr val="bg2"/>
+          </a:solidFill>
+        </p:spPr>
+        <p:txBody>
+          <a:bodyPr vert="horz" lIns="91440" tIns="45720" rIns="91440" bIns="45720" rtlCol="0">
+            <a:normAutofit fontScale="47500" lnSpcReduction="20000"/>
+          </a:bodyPr>
+          <a:lstStyle>
+            <a:lvl1pPr marL="342900" indent="-342900" algn="l" defTabSz="457200" rtl="0" eaLnBrk="1" latinLnBrk="0" hangingPunct="1">
+              <a:spcBef>
+                <a:spcPct val="20000"/>
+              </a:spcBef>
+              <a:buFont typeface="Arial"/>
+              <a:buChar char="•"/>
+              <a:defRPr sz="3200" kern="1200">
+                <a:solidFill>
+                  <a:schemeClr val="tx1"/>
+                </a:solidFill>
+                <a:latin typeface="+mn-lt"/>
+                <a:ea typeface="+mn-ea"/>
+                <a:cs typeface="+mn-cs"/>
+              </a:defRPr>
+            </a:lvl1pPr>
+            <a:lvl2pPr marL="742950" indent="-285750" algn="l" defTabSz="457200" rtl="0" eaLnBrk="1" latinLnBrk="0" hangingPunct="1">
+              <a:spcBef>
+                <a:spcPct val="20000"/>
+              </a:spcBef>
+              <a:buFont typeface="Arial"/>
+              <a:buChar char="–"/>
+              <a:defRPr sz="2800" kern="1200">
+                <a:solidFill>
+                  <a:schemeClr val="tx1"/>
+                </a:solidFill>
+                <a:latin typeface="+mn-lt"/>
+                <a:ea typeface="+mn-ea"/>
+                <a:cs typeface="+mn-cs"/>
+              </a:defRPr>
+            </a:lvl2pPr>
+            <a:lvl3pPr marL="1143000" indent="-228600" algn="l" defTabSz="457200" rtl="0" eaLnBrk="1" latinLnBrk="0" hangingPunct="1">
+              <a:spcBef>
+                <a:spcPct val="20000"/>
+              </a:spcBef>
+              <a:buFont typeface="Arial"/>
+              <a:buChar char="•"/>
+              <a:defRPr sz="2400" kern="1200">
+                <a:solidFill>
+                  <a:schemeClr val="tx1"/>
+                </a:solidFill>
+                <a:latin typeface="+mn-lt"/>
+                <a:ea typeface="+mn-ea"/>
+                <a:cs typeface="+mn-cs"/>
+              </a:defRPr>
+            </a:lvl3pPr>
+            <a:lvl4pPr marL="1600200" indent="-228600" algn="l" defTabSz="457200" rtl="0" eaLnBrk="1" latinLnBrk="0" hangingPunct="1">
+              <a:spcBef>
+                <a:spcPct val="20000"/>
+              </a:spcBef>
+              <a:buFont typeface="Arial"/>
+              <a:buChar char="–"/>
+              <a:defRPr sz="2000" kern="1200">
+                <a:solidFill>
+                  <a:schemeClr val="tx1"/>
+                </a:solidFill>
+                <a:latin typeface="+mn-lt"/>
+                <a:ea typeface="+mn-ea"/>
+                <a:cs typeface="+mn-cs"/>
+              </a:defRPr>
+            </a:lvl4pPr>
+            <a:lvl5pPr marL="2057400" indent="-228600" algn="l" defTabSz="457200" rtl="0" eaLnBrk="1" latinLnBrk="0" hangingPunct="1">
+              <a:spcBef>
+                <a:spcPct val="20000"/>
+              </a:spcBef>
+              <a:buFont typeface="Arial"/>
+              <a:buChar char="»"/>
+              <a:defRPr sz="2000" kern="1200">
+                <a:solidFill>
+                  <a:schemeClr val="tx1"/>
+                </a:solidFill>
+                <a:latin typeface="+mn-lt"/>
+                <a:ea typeface="+mn-ea"/>
+                <a:cs typeface="+mn-cs"/>
+              </a:defRPr>
+            </a:lvl5pPr>
+            <a:lvl6pPr marL="2514600" indent="-228600" algn="l" defTabSz="457200" rtl="0" eaLnBrk="1" latinLnBrk="0" hangingPunct="1">
+              <a:spcBef>
+                <a:spcPct val="20000"/>
+              </a:spcBef>
+              <a:buFont typeface="Arial"/>
+              <a:buChar char="•"/>
+              <a:defRPr sz="2000" kern="1200">
+                <a:solidFill>
+                  <a:schemeClr val="tx1"/>
+                </a:solidFill>
+                <a:latin typeface="+mn-lt"/>
+                <a:ea typeface="+mn-ea"/>
+                <a:cs typeface="+mn-cs"/>
+              </a:defRPr>
+            </a:lvl6pPr>
+            <a:lvl7pPr marL="2971800" indent="-228600" algn="l" defTabSz="457200" rtl="0" eaLnBrk="1" latinLnBrk="0" hangingPunct="1">
+              <a:spcBef>
+                <a:spcPct val="20000"/>
+              </a:spcBef>
+              <a:buFont typeface="Arial"/>
+              <a:buChar char="•"/>
+              <a:defRPr sz="2000" kern="1200">
+                <a:solidFill>
+                  <a:schemeClr val="tx1"/>
+                </a:solidFill>
+                <a:latin typeface="+mn-lt"/>
+                <a:ea typeface="+mn-ea"/>
+                <a:cs typeface="+mn-cs"/>
+              </a:defRPr>
+            </a:lvl7pPr>
+            <a:lvl8pPr marL="3429000" indent="-228600" algn="l" defTabSz="457200" rtl="0" eaLnBrk="1" latinLnBrk="0" hangingPunct="1">
+              <a:spcBef>
+                <a:spcPct val="20000"/>
+              </a:spcBef>
+              <a:buFont typeface="Arial"/>
+              <a:buChar char="•"/>
+              <a:defRPr sz="2000" kern="1200">
+                <a:solidFill>
+                  <a:schemeClr val="tx1"/>
+                </a:solidFill>
+                <a:latin typeface="+mn-lt"/>
+                <a:ea typeface="+mn-ea"/>
+                <a:cs typeface="+mn-cs"/>
+              </a:defRPr>
+            </a:lvl8pPr>
+            <a:lvl9pPr marL="3886200" indent="-228600" algn="l" defTabSz="457200" rtl="0" eaLnBrk="1" latinLnBrk="0" hangingPunct="1">
+              <a:spcBef>
+                <a:spcPct val="20000"/>
+              </a:spcBef>
+              <a:buFont typeface="Arial"/>
+              <a:buChar char="•"/>
+              <a:defRPr sz="2000" kern="1200">
+                <a:solidFill>
+                  <a:schemeClr val="tx1"/>
+                </a:solidFill>
+                <a:latin typeface="+mn-lt"/>
+                <a:ea typeface="+mn-ea"/>
+                <a:cs typeface="+mn-cs"/>
+              </a:defRPr>
+            </a:lvl9pPr>
+          </a:lstStyle>
+          <a:p>
+            <a:pPr marL="0" indent="0">
+              <a:buNone/>
+            </a:pPr>
+            <a:r>
+              <a:rPr lang="en-GB" b="1" dirty="0"/>
+              <a:t>Other High Performers:</a:t>
+            </a:r>
+          </a:p>
+          <a:p>
+            <a:r>
+              <a:rPr lang="en-GB" b="1" dirty="0" err="1"/>
+              <a:t>CSILSTMNet</a:t>
+            </a:r>
+            <a:r>
+              <a:rPr lang="en-GB" dirty="0"/>
+              <a:t>  </a:t>
+            </a:r>
+          </a:p>
+          <a:p>
+            <a:pPr lvl="1"/>
+            <a:r>
+              <a:rPr lang="en-GB" dirty="0"/>
+              <a:t>(LR=0.0005, BS=16, Adam, WD=1e-04)</a:t>
+            </a:r>
+          </a:p>
+          <a:p>
+            <a:pPr lvl="1"/>
+            <a:r>
+              <a:rPr lang="en-GB" dirty="0"/>
+              <a:t>Val Accuracy: 0.981576493 </a:t>
+            </a:r>
+          </a:p>
+          <a:p>
+            <a:r>
+              <a:rPr lang="en-GB" b="1" dirty="0"/>
+              <a:t>DenseNet1D</a:t>
+            </a:r>
+            <a:r>
+              <a:rPr lang="en-GB" dirty="0"/>
+              <a:t> </a:t>
+            </a:r>
+          </a:p>
+          <a:p>
+            <a:pPr lvl="1"/>
+            <a:r>
+              <a:rPr lang="en-GB" dirty="0"/>
+              <a:t>(LR=0.001, BS=16, Adam, WD= 1e-04)</a:t>
+            </a:r>
+          </a:p>
+          <a:p>
+            <a:pPr lvl="1"/>
+            <a:r>
+              <a:rPr lang="en-GB" dirty="0"/>
+              <a:t>Val Accuracy: 0.979827425 </a:t>
+            </a:r>
+          </a:p>
+          <a:p>
+            <a:r>
+              <a:rPr lang="en-GB" dirty="0" err="1"/>
+              <a:t>CSILSTMNet</a:t>
+            </a:r>
+            <a:r>
+              <a:rPr lang="en-GB" dirty="0"/>
+              <a:t> </a:t>
+            </a:r>
+          </a:p>
+          <a:p>
+            <a:pPr lvl="1"/>
+            <a:r>
+              <a:rPr lang="en-GB" dirty="0"/>
+              <a:t>(LR=0.001, BS=16, Adam, WD= 1e-04)</a:t>
+            </a:r>
+          </a:p>
+          <a:p>
+            <a:pPr lvl="1"/>
+            <a:r>
+              <a:rPr lang="en-GB" dirty="0"/>
+              <a:t>Val Accuracy: 0.979361007 </a:t>
+            </a:r>
+          </a:p>
+          <a:p>
+            <a:pPr marL="0" indent="0">
+              <a:buNone/>
+            </a:pPr>
+            <a:endParaRPr lang="en-GB" b="1" dirty="0"/>
+          </a:p>
+        </p:txBody>
+      </p:sp>
+      <p:sp>
+        <p:nvSpPr>
+          <p:cNvPr id="9" name="Content Placeholder 2">
+            <a:extLst>
+              <a:ext uri="{FF2B5EF4-FFF2-40B4-BE49-F238E27FC236}">
+                <a16:creationId xmlns:a16="http://schemas.microsoft.com/office/drawing/2014/main" id="{5DD40319-7E0C-D583-837A-95D6CAD5B32A}"/>
+              </a:ext>
+            </a:extLst>
+          </p:cNvPr>
+          <p:cNvSpPr txBox="1">
+            <a:spLocks/>
+          </p:cNvSpPr>
+          <p:nvPr/>
+        </p:nvSpPr>
+        <p:spPr>
+          <a:xfrm>
+            <a:off x="4593324" y="3931372"/>
+            <a:ext cx="4073246" cy="2419518"/>
+          </a:xfrm>
+          <a:prstGeom prst="rect">
+            <a:avLst/>
+          </a:prstGeom>
+          <a:solidFill>
+            <a:schemeClr val="bg1">
+              <a:lumMod val="95000"/>
+            </a:schemeClr>
+          </a:solidFill>
+        </p:spPr>
+        <p:txBody>
+          <a:bodyPr vert="horz" lIns="91440" tIns="45720" rIns="91440" bIns="45720" rtlCol="0">
+            <a:normAutofit fontScale="40000" lnSpcReduction="20000"/>
+          </a:bodyPr>
+          <a:lstStyle>
+            <a:lvl1pPr marL="342900" indent="-342900" algn="l" defTabSz="457200" rtl="0" eaLnBrk="1" latinLnBrk="0" hangingPunct="1">
+              <a:spcBef>
+                <a:spcPct val="20000"/>
+              </a:spcBef>
+              <a:buFont typeface="Arial"/>
+              <a:buChar char="•"/>
+              <a:defRPr sz="3200" kern="1200">
+                <a:solidFill>
+                  <a:schemeClr val="tx1"/>
+                </a:solidFill>
+                <a:latin typeface="+mn-lt"/>
+                <a:ea typeface="+mn-ea"/>
+                <a:cs typeface="+mn-cs"/>
+              </a:defRPr>
+            </a:lvl1pPr>
+            <a:lvl2pPr marL="742950" indent="-285750" algn="l" defTabSz="457200" rtl="0" eaLnBrk="1" latinLnBrk="0" hangingPunct="1">
+              <a:spcBef>
+                <a:spcPct val="20000"/>
+              </a:spcBef>
+              <a:buFont typeface="Arial"/>
+              <a:buChar char="–"/>
+              <a:defRPr sz="2800" kern="1200">
+                <a:solidFill>
+                  <a:schemeClr val="tx1"/>
+                </a:solidFill>
+                <a:latin typeface="+mn-lt"/>
+                <a:ea typeface="+mn-ea"/>
+                <a:cs typeface="+mn-cs"/>
+              </a:defRPr>
+            </a:lvl2pPr>
+            <a:lvl3pPr marL="1143000" indent="-228600" algn="l" defTabSz="457200" rtl="0" eaLnBrk="1" latinLnBrk="0" hangingPunct="1">
+              <a:spcBef>
+                <a:spcPct val="20000"/>
+              </a:spcBef>
+              <a:buFont typeface="Arial"/>
+              <a:buChar char="•"/>
+              <a:defRPr sz="2400" kern="1200">
+                <a:solidFill>
+                  <a:schemeClr val="tx1"/>
+                </a:solidFill>
+                <a:latin typeface="+mn-lt"/>
+                <a:ea typeface="+mn-ea"/>
+                <a:cs typeface="+mn-cs"/>
+              </a:defRPr>
+            </a:lvl3pPr>
+            <a:lvl4pPr marL="1600200" indent="-228600" algn="l" defTabSz="457200" rtl="0" eaLnBrk="1" latinLnBrk="0" hangingPunct="1">
+              <a:spcBef>
+                <a:spcPct val="20000"/>
+              </a:spcBef>
+              <a:buFont typeface="Arial"/>
+              <a:buChar char="–"/>
+              <a:defRPr sz="2000" kern="1200">
+                <a:solidFill>
+                  <a:schemeClr val="tx1"/>
+                </a:solidFill>
+                <a:latin typeface="+mn-lt"/>
+                <a:ea typeface="+mn-ea"/>
+                <a:cs typeface="+mn-cs"/>
+              </a:defRPr>
+            </a:lvl4pPr>
+            <a:lvl5pPr marL="2057400" indent="-228600" algn="l" defTabSz="457200" rtl="0" eaLnBrk="1" latinLnBrk="0" hangingPunct="1">
+              <a:spcBef>
+                <a:spcPct val="20000"/>
+              </a:spcBef>
+              <a:buFont typeface="Arial"/>
+              <a:buChar char="»"/>
+              <a:defRPr sz="2000" kern="1200">
+                <a:solidFill>
+                  <a:schemeClr val="tx1"/>
+                </a:solidFill>
+                <a:latin typeface="+mn-lt"/>
+                <a:ea typeface="+mn-ea"/>
+                <a:cs typeface="+mn-cs"/>
+              </a:defRPr>
+            </a:lvl5pPr>
+            <a:lvl6pPr marL="2514600" indent="-228600" algn="l" defTabSz="457200" rtl="0" eaLnBrk="1" latinLnBrk="0" hangingPunct="1">
+              <a:spcBef>
+                <a:spcPct val="20000"/>
+              </a:spcBef>
+              <a:buFont typeface="Arial"/>
+              <a:buChar char="•"/>
+              <a:defRPr sz="2000" kern="1200">
+                <a:solidFill>
+                  <a:schemeClr val="tx1"/>
+                </a:solidFill>
+                <a:latin typeface="+mn-lt"/>
+                <a:ea typeface="+mn-ea"/>
+                <a:cs typeface="+mn-cs"/>
+              </a:defRPr>
+            </a:lvl6pPr>
+            <a:lvl7pPr marL="2971800" indent="-228600" algn="l" defTabSz="457200" rtl="0" eaLnBrk="1" latinLnBrk="0" hangingPunct="1">
+              <a:spcBef>
+                <a:spcPct val="20000"/>
+              </a:spcBef>
+              <a:buFont typeface="Arial"/>
+              <a:buChar char="•"/>
+              <a:defRPr sz="2000" kern="1200">
+                <a:solidFill>
+                  <a:schemeClr val="tx1"/>
+                </a:solidFill>
+                <a:latin typeface="+mn-lt"/>
+                <a:ea typeface="+mn-ea"/>
+                <a:cs typeface="+mn-cs"/>
+              </a:defRPr>
+            </a:lvl7pPr>
+            <a:lvl8pPr marL="3429000" indent="-228600" algn="l" defTabSz="457200" rtl="0" eaLnBrk="1" latinLnBrk="0" hangingPunct="1">
+              <a:spcBef>
+                <a:spcPct val="20000"/>
+              </a:spcBef>
+              <a:buFont typeface="Arial"/>
+              <a:buChar char="•"/>
+              <a:defRPr sz="2000" kern="1200">
+                <a:solidFill>
+                  <a:schemeClr val="tx1"/>
+                </a:solidFill>
+                <a:latin typeface="+mn-lt"/>
+                <a:ea typeface="+mn-ea"/>
+                <a:cs typeface="+mn-cs"/>
+              </a:defRPr>
+            </a:lvl8pPr>
+            <a:lvl9pPr marL="3886200" indent="-228600" algn="l" defTabSz="457200" rtl="0" eaLnBrk="1" latinLnBrk="0" hangingPunct="1">
+              <a:spcBef>
+                <a:spcPct val="20000"/>
+              </a:spcBef>
+              <a:buFont typeface="Arial"/>
+              <a:buChar char="•"/>
+              <a:defRPr sz="2000" kern="1200">
+                <a:solidFill>
+                  <a:schemeClr val="tx1"/>
+                </a:solidFill>
+                <a:latin typeface="+mn-lt"/>
+                <a:ea typeface="+mn-ea"/>
+                <a:cs typeface="+mn-cs"/>
+              </a:defRPr>
+            </a:lvl9pPr>
+          </a:lstStyle>
+          <a:p>
+            <a:pPr marL="0" indent="0">
+              <a:buNone/>
+            </a:pPr>
+            <a:r>
+              <a:rPr lang="en-GB" b="1" dirty="0"/>
+              <a:t>Slide Takeaways:</a:t>
+            </a:r>
+          </a:p>
+          <a:p>
+            <a:r>
+              <a:rPr lang="en-GB" dirty="0"/>
+              <a:t>EfficientNet1DLSTM with LR=[0.001, 0.0005], Batch Size=[16, 32], Adam, WD=1e-04 didn’t worked, i.e. any hyperparameter combo didn’t worked.</a:t>
+            </a:r>
+          </a:p>
+          <a:p>
+            <a:r>
+              <a:rPr lang="en-GB" dirty="0"/>
+              <a:t>(LR=0.0005, BS=16, Adam, WD=1e-04) worked and specially batch size  = 16 for any hyper parameter combo gave best results.</a:t>
+            </a:r>
+          </a:p>
+          <a:p>
+            <a:r>
+              <a:rPr lang="en-GB" dirty="0"/>
+              <a:t>DenseNet1D and </a:t>
+            </a:r>
+            <a:r>
+              <a:rPr lang="en-GB" dirty="0" err="1"/>
+              <a:t>CSILSTMNet</a:t>
+            </a:r>
+            <a:r>
+              <a:rPr lang="en-GB" dirty="0"/>
+              <a:t> performed well at lower learning rates and smaller batch sizes with Adam optimizer.</a:t>
+            </a:r>
+          </a:p>
+          <a:p>
+            <a:r>
+              <a:rPr lang="en-GB" b="1" dirty="0"/>
+              <a:t>Avoid config</a:t>
+            </a:r>
+            <a:r>
+              <a:rPr lang="en-GB" dirty="0"/>
+              <a:t>: Batch Size 32 and LR=0.001 with Adam (caused low/zero accuracy for all models).</a:t>
+            </a:r>
+          </a:p>
+          <a:p>
+            <a:pPr marL="0" indent="0">
+              <a:buNone/>
+            </a:pPr>
+            <a:endParaRPr lang="en-GB" b="1" dirty="0"/>
+          </a:p>
+        </p:txBody>
+      </p:sp>
+      <p:graphicFrame>
+        <p:nvGraphicFramePr>
+          <p:cNvPr id="5" name="Object 4">
+            <a:extLst>
+              <a:ext uri="{FF2B5EF4-FFF2-40B4-BE49-F238E27FC236}">
+                <a16:creationId xmlns:a16="http://schemas.microsoft.com/office/drawing/2014/main" id="{25F4DFC9-8DB3-FC9E-1343-586E93B7F715}"/>
+              </a:ext>
+            </a:extLst>
+          </p:cNvPr>
+          <p:cNvGraphicFramePr>
+            <a:graphicFrameLocks noChangeAspect="1"/>
+          </p:cNvGraphicFramePr>
+          <p:nvPr>
+            <p:extLst>
+              <p:ext uri="{D42A27DB-BD31-4B8C-83A1-F6EECF244321}">
+                <p14:modId xmlns:p14="http://schemas.microsoft.com/office/powerpoint/2010/main" val="1959443333"/>
+              </p:ext>
+            </p:extLst>
+          </p:nvPr>
+        </p:nvGraphicFramePr>
+        <p:xfrm>
+          <a:off x="5360974" y="923125"/>
+          <a:ext cx="914400" cy="771525"/>
+        </p:xfrm>
+        <a:graphic>
+          <a:graphicData uri="http://schemas.openxmlformats.org/presentationml/2006/ole">
+            <mc:AlternateContent xmlns:mc="http://schemas.openxmlformats.org/markup-compatibility/2006">
+              <mc:Choice xmlns:v="urn:schemas-microsoft-com:vml" Requires="v">
+                <p:oleObj name="Packager Shell Object" showAsIcon="1" r:id="rId4" imgW="914400" imgH="771656" progId="Package">
+                  <p:embed/>
+                </p:oleObj>
+              </mc:Choice>
+              <mc:Fallback>
+                <p:oleObj name="Packager Shell Object" showAsIcon="1" r:id="rId4" imgW="914400" imgH="771656" progId="Package">
+                  <p:embed/>
+                  <p:pic>
+                    <p:nvPicPr>
+                      <p:cNvPr id="0" name=""/>
+                      <p:cNvPicPr/>
+                      <p:nvPr/>
+                    </p:nvPicPr>
+                    <p:blipFill>
+                      <a:blip r:embed="rId3"/>
+                      <a:stretch>
+                        <a:fillRect/>
+                      </a:stretch>
+                    </p:blipFill>
+                    <p:spPr>
+                      <a:xfrm>
+                        <a:off x="5360974" y="923125"/>
+                        <a:ext cx="914400" cy="771525"/>
+                      </a:xfrm>
+                      <a:prstGeom prst="rect">
+                        <a:avLst/>
+                      </a:prstGeom>
+                    </p:spPr>
+                  </p:pic>
+                </p:oleObj>
+              </mc:Fallback>
+            </mc:AlternateContent>
+          </a:graphicData>
+        </a:graphic>
+      </p:graphicFrame>
+      <p:graphicFrame>
+        <p:nvGraphicFramePr>
+          <p:cNvPr id="7" name="Object 6">
+            <a:extLst>
+              <a:ext uri="{FF2B5EF4-FFF2-40B4-BE49-F238E27FC236}">
+                <a16:creationId xmlns:a16="http://schemas.microsoft.com/office/drawing/2014/main" id="{F8D4DB40-B854-D554-7C5D-957D8BA0F109}"/>
+              </a:ext>
+            </a:extLst>
+          </p:cNvPr>
+          <p:cNvGraphicFramePr>
+            <a:graphicFrameLocks noChangeAspect="1"/>
+          </p:cNvGraphicFramePr>
+          <p:nvPr>
+            <p:extLst>
+              <p:ext uri="{D42A27DB-BD31-4B8C-83A1-F6EECF244321}">
+                <p14:modId xmlns:p14="http://schemas.microsoft.com/office/powerpoint/2010/main" val="1633247725"/>
+              </p:ext>
+            </p:extLst>
+          </p:nvPr>
+        </p:nvGraphicFramePr>
+        <p:xfrm>
+          <a:off x="6561292" y="832294"/>
+          <a:ext cx="914400" cy="771525"/>
+        </p:xfrm>
+        <a:graphic>
+          <a:graphicData uri="http://schemas.openxmlformats.org/presentationml/2006/ole">
+            <mc:AlternateContent xmlns:mc="http://schemas.openxmlformats.org/markup-compatibility/2006">
+              <mc:Choice xmlns:v="urn:schemas-microsoft-com:vml" Requires="v">
+                <p:oleObj name="Worksheet" showAsIcon="1" r:id="rId5" imgW="914400" imgH="771656" progId="Excel.Sheet.12">
+                  <p:embed/>
+                </p:oleObj>
+              </mc:Choice>
+              <mc:Fallback>
+                <p:oleObj name="Worksheet" showAsIcon="1" r:id="rId5" imgW="914400" imgH="771656" progId="Excel.Sheet.12">
+                  <p:embed/>
+                  <p:pic>
+                    <p:nvPicPr>
+                      <p:cNvPr id="0" name=""/>
+                      <p:cNvPicPr/>
+                      <p:nvPr/>
+                    </p:nvPicPr>
+                    <p:blipFill>
+                      <a:blip r:embed="rId6"/>
+                      <a:stretch>
+                        <a:fillRect/>
+                      </a:stretch>
+                    </p:blipFill>
+                    <p:spPr>
+                      <a:xfrm>
+                        <a:off x="6561292" y="832294"/>
+                        <a:ext cx="914400" cy="771525"/>
+                      </a:xfrm>
+                      <a:prstGeom prst="rect">
+                        <a:avLst/>
+                      </a:prstGeom>
+                    </p:spPr>
+                  </p:pic>
+                </p:oleObj>
+              </mc:Fallback>
+            </mc:AlternateContent>
+          </a:graphicData>
+        </a:graphic>
+      </p:graphicFrame>
+    </p:spTree>
+    <p:extLst>
+      <p:ext uri="{BB962C8B-B14F-4D97-AF65-F5344CB8AC3E}">
+        <p14:creationId xmlns:p14="http://schemas.microsoft.com/office/powerpoint/2010/main" val="1174188810"/>
+      </p:ext>
+    </p:extLst>
+  </p:cSld>
+  <p:clrMapOvr>
+    <a:masterClrMapping/>
+  </p:clrMapOvr>
+</p:sld>
+</file>
+
+<file path=ppt/slides/slide36.xml><?xml version="1.0" encoding="utf-8"?>
+<p:sld xmlns:a="http://schemas.openxmlformats.org/drawingml/2006/main" xmlns:r="http://schemas.openxmlformats.org/officeDocument/2006/relationships" xmlns:p="http://schemas.openxmlformats.org/presentationml/2006/main">
+  <p:cSld>
+    <p:spTree>
+      <p:nvGrpSpPr>
+        <p:cNvPr id="1" name="">
+          <a:extLst>
+            <a:ext uri="{FF2B5EF4-FFF2-40B4-BE49-F238E27FC236}">
+              <a16:creationId xmlns:a16="http://schemas.microsoft.com/office/drawing/2014/main" id="{64EDD5C2-1AAE-ABE0-E381-264C7C7C3979}"/>
+            </a:ext>
+          </a:extLst>
+        </p:cNvPr>
+        <p:cNvGrpSpPr/>
+        <p:nvPr/>
+      </p:nvGrpSpPr>
+      <p:grpSpPr>
+        <a:xfrm>
+          <a:off x="0" y="0"/>
+          <a:ext cx="0" cy="0"/>
+          <a:chOff x="0" y="0"/>
+          <a:chExt cx="0" cy="0"/>
+        </a:xfrm>
+      </p:grpSpPr>
+      <p:sp>
+        <p:nvSpPr>
+          <p:cNvPr id="2" name="Title 1">
+            <a:extLst>
+              <a:ext uri="{FF2B5EF4-FFF2-40B4-BE49-F238E27FC236}">
+                <a16:creationId xmlns:a16="http://schemas.microsoft.com/office/drawing/2014/main" id="{CC7EE2B4-165A-D5B9-7A56-1769578AD34F}"/>
+              </a:ext>
+            </a:extLst>
+          </p:cNvPr>
+          <p:cNvSpPr>
+            <a:spLocks noGrp="1"/>
+          </p:cNvSpPr>
+          <p:nvPr>
+            <p:ph type="title"/>
+          </p:nvPr>
+        </p:nvSpPr>
+        <p:spPr/>
+        <p:txBody>
+          <a:bodyPr>
+            <a:noAutofit/>
+          </a:bodyPr>
+          <a:lstStyle/>
+          <a:p>
+            <a:r>
+              <a:rPr lang="en-GB" sz="3600" dirty="0"/>
+              <a:t>Experiment-3</a:t>
+            </a:r>
+          </a:p>
+        </p:txBody>
+      </p:sp>
+      <p:graphicFrame>
+        <p:nvGraphicFramePr>
+          <p:cNvPr id="4" name="Content Placeholder 3">
+            <a:extLst>
+              <a:ext uri="{FF2B5EF4-FFF2-40B4-BE49-F238E27FC236}">
+                <a16:creationId xmlns:a16="http://schemas.microsoft.com/office/drawing/2014/main" id="{E4EB810C-9CBE-0E44-6607-8445AA56414F}"/>
+              </a:ext>
+            </a:extLst>
+          </p:cNvPr>
+          <p:cNvGraphicFramePr>
+            <a:graphicFrameLocks noGrp="1"/>
+          </p:cNvGraphicFramePr>
+          <p:nvPr>
+            <p:ph idx="1"/>
+          </p:nvPr>
+        </p:nvGraphicFramePr>
+        <p:xfrm>
+          <a:off x="606902" y="1497456"/>
+          <a:ext cx="7727894" cy="2184400"/>
+        </p:xfrm>
+        <a:graphic>
+          <a:graphicData uri="http://schemas.openxmlformats.org/drawingml/2006/table">
+            <a:tbl>
+              <a:tblPr firstRow="1" bandRow="1">
+                <a:tableStyleId>{5C22544A-7EE6-4342-B048-85BDC9FD1C3A}</a:tableStyleId>
+              </a:tblPr>
+              <a:tblGrid>
+                <a:gridCol w="1883645">
+                  <a:extLst>
+                    <a:ext uri="{9D8B030D-6E8A-4147-A177-3AD203B41FA5}">
+                      <a16:colId xmlns:a16="http://schemas.microsoft.com/office/drawing/2014/main" val="4008570941"/>
+                    </a:ext>
+                  </a:extLst>
+                </a:gridCol>
+                <a:gridCol w="1875120">
+                  <a:extLst>
+                    <a:ext uri="{9D8B030D-6E8A-4147-A177-3AD203B41FA5}">
+                      <a16:colId xmlns:a16="http://schemas.microsoft.com/office/drawing/2014/main" val="323992706"/>
+                    </a:ext>
+                  </a:extLst>
+                </a:gridCol>
+                <a:gridCol w="1381257">
+                  <a:extLst>
+                    <a:ext uri="{9D8B030D-6E8A-4147-A177-3AD203B41FA5}">
+                      <a16:colId xmlns:a16="http://schemas.microsoft.com/office/drawing/2014/main" val="3738054000"/>
+                    </a:ext>
+                  </a:extLst>
+                </a:gridCol>
+                <a:gridCol w="1524146">
+                  <a:extLst>
+                    <a:ext uri="{9D8B030D-6E8A-4147-A177-3AD203B41FA5}">
+                      <a16:colId xmlns:a16="http://schemas.microsoft.com/office/drawing/2014/main" val="2578734096"/>
+                    </a:ext>
+                  </a:extLst>
+                </a:gridCol>
+                <a:gridCol w="1063726">
+                  <a:extLst>
+                    <a:ext uri="{9D8B030D-6E8A-4147-A177-3AD203B41FA5}">
+                      <a16:colId xmlns:a16="http://schemas.microsoft.com/office/drawing/2014/main" val="2069725364"/>
+                    </a:ext>
+                  </a:extLst>
+                </a:gridCol>
+              </a:tblGrid>
+              <a:tr h="370840">
+                <a:tc>
+                  <a:txBody>
+                    <a:bodyPr/>
+                    <a:lstStyle/>
+                    <a:p>
+                      <a:pPr algn="l" fontAlgn="t" latinLnBrk="0">
+                        <a:buNone/>
+                      </a:pPr>
+                      <a:r>
+                        <a:rPr lang="en-GB" b="0" dirty="0">
+                          <a:effectLst/>
+                        </a:rPr>
+                        <a:t>Model Name</a:t>
+                      </a:r>
+                    </a:p>
+                  </a:txBody>
+                  <a:tcPr marL="76200" marR="76200" marT="76200" marB="76200"/>
+                </a:tc>
+                <a:tc>
+                  <a:txBody>
+                    <a:bodyPr/>
+                    <a:lstStyle/>
+                    <a:p>
+                      <a:pPr algn="l" fontAlgn="t" latinLnBrk="0">
+                        <a:buNone/>
+                      </a:pPr>
+                      <a:r>
+                        <a:rPr lang="en-GB" b="0" dirty="0">
+                          <a:effectLst/>
+                        </a:rPr>
+                        <a:t>CSI Input Size / Channels</a:t>
+                      </a:r>
+                    </a:p>
+                  </a:txBody>
+                  <a:tcPr marL="76200" marR="76200" marT="76200" marB="76200"/>
+                </a:tc>
+                <a:tc>
+                  <a:txBody>
+                    <a:bodyPr/>
+                    <a:lstStyle/>
+                    <a:p>
+                      <a:pPr algn="l" fontAlgn="t" latinLnBrk="0">
+                        <a:buNone/>
+                      </a:pPr>
+                      <a:r>
+                        <a:rPr lang="en-GB" b="0">
+                          <a:effectLst/>
+                        </a:rPr>
+                        <a:t>Meta Features</a:t>
+                      </a:r>
+                    </a:p>
+                  </a:txBody>
+                  <a:tcPr marL="76200" marR="76200" marT="76200" marB="76200"/>
+                </a:tc>
+                <a:tc>
+                  <a:txBody>
+                    <a:bodyPr/>
+                    <a:lstStyle/>
+                    <a:p>
+                      <a:pPr algn="l" fontAlgn="t" latinLnBrk="0">
+                        <a:buNone/>
+                      </a:pPr>
+                      <a:r>
+                        <a:rPr lang="en-GB" b="0">
+                          <a:effectLst/>
+                        </a:rPr>
+                        <a:t>Sequence / Window Size</a:t>
+                      </a:r>
+                    </a:p>
+                  </a:txBody>
+                  <a:tcPr marL="76200" marR="76200" marT="76200" marB="76200"/>
+                </a:tc>
+                <a:tc>
+                  <a:txBody>
+                    <a:bodyPr/>
+                    <a:lstStyle/>
+                    <a:p>
+                      <a:pPr algn="l" fontAlgn="t" latinLnBrk="0">
+                        <a:buNone/>
+                      </a:pPr>
+                      <a:r>
+                        <a:rPr lang="en-GB" b="0">
+                          <a:effectLst/>
+                        </a:rPr>
+                        <a:t>Output Classes</a:t>
+                      </a:r>
+                    </a:p>
+                  </a:txBody>
+                  <a:tcPr marL="76200" marR="76200" marT="76200" marB="76200"/>
+                </a:tc>
+                <a:extLst>
+                  <a:ext uri="{0D108BD9-81ED-4DB2-BD59-A6C34878D82A}">
+                    <a16:rowId xmlns:a16="http://schemas.microsoft.com/office/drawing/2014/main" val="3271397179"/>
+                  </a:ext>
+                </a:extLst>
+              </a:tr>
+              <a:tr h="370840">
+                <a:tc>
+                  <a:txBody>
+                    <a:bodyPr/>
+                    <a:lstStyle/>
+                    <a:p>
+                      <a:pPr fontAlgn="base" latinLnBrk="0">
+                        <a:buNone/>
+                      </a:pPr>
+                      <a:r>
+                        <a:rPr lang="en-GB" sz="1200" b="1" dirty="0" err="1">
+                          <a:effectLst/>
+                          <a:latin typeface="+mn-lt"/>
+                        </a:rPr>
+                        <a:t>CSILSTMNet</a:t>
+                      </a:r>
+                      <a:endParaRPr lang="en-GB" sz="1200" b="1" dirty="0">
+                        <a:effectLst/>
+                        <a:latin typeface="+mn-lt"/>
+                      </a:endParaRPr>
+                    </a:p>
+                  </a:txBody>
+                  <a:tcPr marL="76200" marR="76200" anchor="ctr"/>
+                </a:tc>
+                <a:tc>
+                  <a:txBody>
+                    <a:bodyPr/>
+                    <a:lstStyle/>
+                    <a:p>
+                      <a:pPr fontAlgn="base" latinLnBrk="0">
+                        <a:buNone/>
+                      </a:pPr>
+                      <a:r>
+                        <a:rPr lang="en-GB" sz="1200">
+                          <a:effectLst/>
+                          <a:latin typeface="+mn-lt"/>
+                        </a:rPr>
+                        <a:t>99</a:t>
+                      </a:r>
+                    </a:p>
+                  </a:txBody>
+                  <a:tcPr marL="76200" marR="76200" anchor="ctr"/>
+                </a:tc>
+                <a:tc>
+                  <a:txBody>
+                    <a:bodyPr/>
+                    <a:lstStyle/>
+                    <a:p>
+                      <a:pPr fontAlgn="base" latinLnBrk="0">
+                        <a:buNone/>
+                      </a:pPr>
+                      <a:r>
+                        <a:rPr lang="en-GB" sz="1200">
+                          <a:effectLst/>
+                          <a:latin typeface="+mn-lt"/>
+                        </a:rPr>
+                        <a:t>12</a:t>
+                      </a:r>
+                    </a:p>
+                  </a:txBody>
+                  <a:tcPr marL="76200" marR="76200" anchor="ctr"/>
+                </a:tc>
+                <a:tc>
+                  <a:txBody>
+                    <a:bodyPr/>
+                    <a:lstStyle/>
+                    <a:p>
+                      <a:pPr fontAlgn="base" latinLnBrk="0">
+                        <a:buNone/>
+                      </a:pPr>
+                      <a:r>
+                        <a:rPr lang="en-GB" sz="1200">
+                          <a:effectLst/>
+                          <a:latin typeface="+mn-lt"/>
+                        </a:rPr>
+                        <a:t>128</a:t>
+                      </a:r>
+                    </a:p>
+                  </a:txBody>
+                  <a:tcPr marL="76200" marR="76200" anchor="ctr"/>
+                </a:tc>
+                <a:tc>
+                  <a:txBody>
+                    <a:bodyPr/>
+                    <a:lstStyle/>
+                    <a:p>
+                      <a:pPr fontAlgn="base" latinLnBrk="0">
+                        <a:buNone/>
+                      </a:pPr>
+                      <a:r>
+                        <a:rPr lang="en-GB" sz="1200">
+                          <a:effectLst/>
+                          <a:latin typeface="+mn-lt"/>
+                        </a:rPr>
+                        <a:t>31</a:t>
+                      </a:r>
+                    </a:p>
+                  </a:txBody>
+                  <a:tcPr marL="76200" marR="76200" anchor="ctr"/>
+                </a:tc>
+                <a:extLst>
+                  <a:ext uri="{0D108BD9-81ED-4DB2-BD59-A6C34878D82A}">
+                    <a16:rowId xmlns:a16="http://schemas.microsoft.com/office/drawing/2014/main" val="1267054606"/>
+                  </a:ext>
+                </a:extLst>
+              </a:tr>
+              <a:tr h="370840">
+                <a:tc>
+                  <a:txBody>
+                    <a:bodyPr/>
+                    <a:lstStyle/>
+                    <a:p>
+                      <a:pPr fontAlgn="base" latinLnBrk="0">
+                        <a:buNone/>
+                      </a:pPr>
+                      <a:r>
+                        <a:rPr lang="en-GB" sz="1200" b="1">
+                          <a:effectLst/>
+                          <a:latin typeface="+mn-lt"/>
+                        </a:rPr>
+                        <a:t>DenseNet1D</a:t>
+                      </a:r>
+                    </a:p>
+                  </a:txBody>
+                  <a:tcPr marL="76200" marR="76200" anchor="ctr"/>
+                </a:tc>
+                <a:tc>
+                  <a:txBody>
+                    <a:bodyPr/>
+                    <a:lstStyle/>
+                    <a:p>
+                      <a:pPr fontAlgn="base" latinLnBrk="0">
+                        <a:buNone/>
+                      </a:pPr>
+                      <a:r>
+                        <a:rPr lang="en-GB" sz="1200">
+                          <a:effectLst/>
+                          <a:latin typeface="+mn-lt"/>
+                        </a:rPr>
+                        <a:t>99</a:t>
+                      </a:r>
+                    </a:p>
+                  </a:txBody>
+                  <a:tcPr marL="76200" marR="76200" anchor="ctr"/>
+                </a:tc>
+                <a:tc>
+                  <a:txBody>
+                    <a:bodyPr/>
+                    <a:lstStyle/>
+                    <a:p>
+                      <a:pPr fontAlgn="base" latinLnBrk="0">
+                        <a:buNone/>
+                      </a:pPr>
+                      <a:r>
+                        <a:rPr lang="en-GB" sz="1200">
+                          <a:effectLst/>
+                          <a:latin typeface="+mn-lt"/>
+                        </a:rPr>
+                        <a:t>12</a:t>
+                      </a:r>
+                    </a:p>
+                  </a:txBody>
+                  <a:tcPr marL="76200" marR="76200" anchor="ctr"/>
+                </a:tc>
+                <a:tc>
+                  <a:txBody>
+                    <a:bodyPr/>
+                    <a:lstStyle/>
+                    <a:p>
+                      <a:pPr fontAlgn="base" latinLnBrk="0">
+                        <a:buNone/>
+                      </a:pPr>
+                      <a:r>
+                        <a:rPr lang="en-GB" sz="1200">
+                          <a:effectLst/>
+                          <a:latin typeface="+mn-lt"/>
+                        </a:rPr>
+                        <a:t>—</a:t>
+                      </a:r>
+                    </a:p>
+                  </a:txBody>
+                  <a:tcPr marL="76200" marR="76200" anchor="ctr"/>
+                </a:tc>
+                <a:tc>
+                  <a:txBody>
+                    <a:bodyPr/>
+                    <a:lstStyle/>
+                    <a:p>
+                      <a:pPr fontAlgn="base" latinLnBrk="0">
+                        <a:buNone/>
+                      </a:pPr>
+                      <a:r>
+                        <a:rPr lang="en-GB" sz="1200">
+                          <a:effectLst/>
+                          <a:latin typeface="+mn-lt"/>
+                        </a:rPr>
+                        <a:t>31</a:t>
+                      </a:r>
+                    </a:p>
+                  </a:txBody>
+                  <a:tcPr marL="76200" marR="76200" anchor="ctr"/>
+                </a:tc>
+                <a:extLst>
+                  <a:ext uri="{0D108BD9-81ED-4DB2-BD59-A6C34878D82A}">
+                    <a16:rowId xmlns:a16="http://schemas.microsoft.com/office/drawing/2014/main" val="1890405566"/>
+                  </a:ext>
+                </a:extLst>
+              </a:tr>
+              <a:tr h="370840">
+                <a:tc>
+                  <a:txBody>
+                    <a:bodyPr/>
+                    <a:lstStyle/>
+                    <a:p>
+                      <a:pPr fontAlgn="base" latinLnBrk="0">
+                        <a:buNone/>
+                      </a:pPr>
+                      <a:r>
+                        <a:rPr lang="en-GB" sz="1200" b="1">
+                          <a:effectLst/>
+                          <a:latin typeface="+mn-lt"/>
+                        </a:rPr>
+                        <a:t>EfficientNet1DLSTM</a:t>
+                      </a:r>
+                    </a:p>
+                  </a:txBody>
+                  <a:tcPr marL="76200" marR="76200" anchor="ctr"/>
+                </a:tc>
+                <a:tc>
+                  <a:txBody>
+                    <a:bodyPr/>
+                    <a:lstStyle/>
+                    <a:p>
+                      <a:pPr fontAlgn="base" latinLnBrk="0">
+                        <a:buNone/>
+                      </a:pPr>
+                      <a:r>
+                        <a:rPr lang="en-GB" sz="1200" dirty="0">
+                          <a:effectLst/>
+                          <a:latin typeface="+mn-lt"/>
+                        </a:rPr>
+                        <a:t>99</a:t>
+                      </a:r>
+                    </a:p>
+                  </a:txBody>
+                  <a:tcPr marL="76200" marR="76200" anchor="ctr"/>
+                </a:tc>
+                <a:tc>
+                  <a:txBody>
+                    <a:bodyPr/>
+                    <a:lstStyle/>
+                    <a:p>
+                      <a:pPr fontAlgn="base" latinLnBrk="0">
+                        <a:buNone/>
+                      </a:pPr>
+                      <a:r>
+                        <a:rPr lang="en-GB" sz="1200">
+                          <a:effectLst/>
+                          <a:latin typeface="+mn-lt"/>
+                        </a:rPr>
+                        <a:t>12</a:t>
+                      </a:r>
+                    </a:p>
+                  </a:txBody>
+                  <a:tcPr marL="76200" marR="76200" anchor="ctr"/>
+                </a:tc>
+                <a:tc>
+                  <a:txBody>
+                    <a:bodyPr/>
+                    <a:lstStyle/>
+                    <a:p>
+                      <a:pPr fontAlgn="base" latinLnBrk="0">
+                        <a:buNone/>
+                      </a:pPr>
+                      <a:r>
+                        <a:rPr lang="en-GB" sz="1200">
+                          <a:effectLst/>
+                          <a:latin typeface="+mn-lt"/>
+                        </a:rPr>
+                        <a:t>128</a:t>
+                      </a:r>
+                    </a:p>
+                  </a:txBody>
+                  <a:tcPr marL="76200" marR="76200" anchor="ctr"/>
+                </a:tc>
+                <a:tc>
+                  <a:txBody>
+                    <a:bodyPr/>
+                    <a:lstStyle/>
+                    <a:p>
+                      <a:pPr fontAlgn="base" latinLnBrk="0">
+                        <a:buNone/>
+                      </a:pPr>
+                      <a:r>
+                        <a:rPr lang="en-GB" sz="1200">
+                          <a:effectLst/>
+                          <a:latin typeface="+mn-lt"/>
+                        </a:rPr>
+                        <a:t>31</a:t>
+                      </a:r>
+                    </a:p>
+                  </a:txBody>
+                  <a:tcPr marL="76200" marR="76200" anchor="ctr"/>
+                </a:tc>
+                <a:extLst>
+                  <a:ext uri="{0D108BD9-81ED-4DB2-BD59-A6C34878D82A}">
+                    <a16:rowId xmlns:a16="http://schemas.microsoft.com/office/drawing/2014/main" val="1037789132"/>
+                  </a:ext>
+                </a:extLst>
+              </a:tr>
+              <a:tr h="370840">
+                <a:tc>
+                  <a:txBody>
+                    <a:bodyPr/>
+                    <a:lstStyle/>
+                    <a:p>
+                      <a:pPr fontAlgn="base" latinLnBrk="0">
+                        <a:buNone/>
+                      </a:pPr>
+                      <a:r>
+                        <a:rPr lang="en-GB" sz="1200" b="1" dirty="0">
+                          <a:effectLst/>
+                          <a:latin typeface="+mn-lt"/>
+                        </a:rPr>
+                        <a:t>MobileNetV3_1D_LSTM</a:t>
+                      </a:r>
+                    </a:p>
+                  </a:txBody>
+                  <a:tcPr marL="76200" marR="76200" anchor="ctr"/>
+                </a:tc>
+                <a:tc>
+                  <a:txBody>
+                    <a:bodyPr/>
+                    <a:lstStyle/>
+                    <a:p>
+                      <a:pPr fontAlgn="base" latinLnBrk="0">
+                        <a:buNone/>
+                      </a:pPr>
+                      <a:r>
+                        <a:rPr lang="en-GB" sz="1200">
+                          <a:effectLst/>
+                          <a:latin typeface="+mn-lt"/>
+                        </a:rPr>
+                        <a:t>99</a:t>
+                      </a:r>
+                    </a:p>
+                  </a:txBody>
+                  <a:tcPr marL="76200" marR="76200" anchor="ctr"/>
+                </a:tc>
+                <a:tc>
+                  <a:txBody>
+                    <a:bodyPr/>
+                    <a:lstStyle/>
+                    <a:p>
+                      <a:pPr fontAlgn="base" latinLnBrk="0">
+                        <a:buNone/>
+                      </a:pPr>
+                      <a:r>
+                        <a:rPr lang="en-GB" sz="1200">
+                          <a:effectLst/>
+                          <a:latin typeface="+mn-lt"/>
+                        </a:rPr>
+                        <a:t>12</a:t>
+                      </a:r>
+                    </a:p>
+                  </a:txBody>
+                  <a:tcPr marL="76200" marR="76200" anchor="ctr"/>
+                </a:tc>
+                <a:tc>
+                  <a:txBody>
+                    <a:bodyPr/>
+                    <a:lstStyle/>
+                    <a:p>
+                      <a:pPr fontAlgn="base" latinLnBrk="0">
+                        <a:buNone/>
+                      </a:pPr>
+                      <a:r>
+                        <a:rPr lang="en-GB" sz="1200">
+                          <a:effectLst/>
+                          <a:latin typeface="+mn-lt"/>
+                        </a:rPr>
+                        <a:t>—</a:t>
+                      </a:r>
+                    </a:p>
+                  </a:txBody>
+                  <a:tcPr marL="76200" marR="76200" anchor="ctr"/>
+                </a:tc>
+                <a:tc>
+                  <a:txBody>
+                    <a:bodyPr/>
+                    <a:lstStyle/>
+                    <a:p>
+                      <a:pPr fontAlgn="base" latinLnBrk="0">
+                        <a:buNone/>
+                      </a:pPr>
+                      <a:r>
+                        <a:rPr lang="en-GB" sz="1200" dirty="0">
+                          <a:effectLst/>
+                          <a:latin typeface="+mn-lt"/>
+                        </a:rPr>
+                        <a:t>31</a:t>
+                      </a:r>
+                    </a:p>
+                  </a:txBody>
+                  <a:tcPr marL="76200" marR="76200" anchor="ctr"/>
+                </a:tc>
+                <a:extLst>
+                  <a:ext uri="{0D108BD9-81ED-4DB2-BD59-A6C34878D82A}">
+                    <a16:rowId xmlns:a16="http://schemas.microsoft.com/office/drawing/2014/main" val="2484458502"/>
+                  </a:ext>
+                </a:extLst>
+              </a:tr>
+            </a:tbl>
+          </a:graphicData>
+        </a:graphic>
+      </p:graphicFrame>
+      <p:graphicFrame>
+        <p:nvGraphicFramePr>
+          <p:cNvPr id="3" name="Table 2">
+            <a:extLst>
+              <a:ext uri="{FF2B5EF4-FFF2-40B4-BE49-F238E27FC236}">
+                <a16:creationId xmlns:a16="http://schemas.microsoft.com/office/drawing/2014/main" id="{32F0A4EC-ACD8-8589-C8AE-3A96CA0A47A1}"/>
+              </a:ext>
+            </a:extLst>
+          </p:cNvPr>
+          <p:cNvGraphicFramePr>
+            <a:graphicFrameLocks noGrp="1"/>
+          </p:cNvGraphicFramePr>
+          <p:nvPr/>
+        </p:nvGraphicFramePr>
+        <p:xfrm>
+          <a:off x="606902" y="3800324"/>
+          <a:ext cx="7727894" cy="2225040"/>
+        </p:xfrm>
+        <a:graphic>
+          <a:graphicData uri="http://schemas.openxmlformats.org/drawingml/2006/table">
+            <a:tbl>
+              <a:tblPr firstRow="1" bandRow="1">
+                <a:tableStyleId>{5C22544A-7EE6-4342-B048-85BDC9FD1C3A}</a:tableStyleId>
+              </a:tblPr>
+              <a:tblGrid>
+                <a:gridCol w="3863947">
+                  <a:extLst>
+                    <a:ext uri="{9D8B030D-6E8A-4147-A177-3AD203B41FA5}">
+                      <a16:colId xmlns:a16="http://schemas.microsoft.com/office/drawing/2014/main" val="3398294999"/>
+                    </a:ext>
+                  </a:extLst>
+                </a:gridCol>
+                <a:gridCol w="3863947">
+                  <a:extLst>
+                    <a:ext uri="{9D8B030D-6E8A-4147-A177-3AD203B41FA5}">
+                      <a16:colId xmlns:a16="http://schemas.microsoft.com/office/drawing/2014/main" val="2376096010"/>
+                    </a:ext>
+                  </a:extLst>
+                </a:gridCol>
+              </a:tblGrid>
+              <a:tr h="370840">
+                <a:tc>
+                  <a:txBody>
+                    <a:bodyPr/>
+                    <a:lstStyle/>
+                    <a:p>
+                      <a:r>
+                        <a:rPr lang="en-IN" dirty="0"/>
+                        <a:t>Hyperparameter</a:t>
+                      </a:r>
+                      <a:endParaRPr lang="en-GB" dirty="0"/>
+                    </a:p>
+                  </a:txBody>
+                  <a:tcPr/>
+                </a:tc>
+                <a:tc>
+                  <a:txBody>
+                    <a:bodyPr/>
+                    <a:lstStyle/>
+                    <a:p>
+                      <a:r>
+                        <a:rPr lang="en-IN" dirty="0"/>
+                        <a:t>Values Tested</a:t>
+                      </a:r>
+                      <a:endParaRPr lang="en-GB" dirty="0"/>
+                    </a:p>
+                  </a:txBody>
+                  <a:tcPr/>
+                </a:tc>
+                <a:extLst>
+                  <a:ext uri="{0D108BD9-81ED-4DB2-BD59-A6C34878D82A}">
+                    <a16:rowId xmlns:a16="http://schemas.microsoft.com/office/drawing/2014/main" val="3705606927"/>
+                  </a:ext>
+                </a:extLst>
+              </a:tr>
+              <a:tr h="370840">
+                <a:tc>
+                  <a:txBody>
+                    <a:bodyPr/>
+                    <a:lstStyle/>
+                    <a:p>
+                      <a:r>
+                        <a:rPr lang="en-IN" dirty="0"/>
+                        <a:t>Learning Rate</a:t>
+                      </a:r>
+                      <a:endParaRPr lang="en-GB" dirty="0"/>
+                    </a:p>
+                  </a:txBody>
+                  <a:tcPr/>
+                </a:tc>
+                <a:tc>
+                  <a:txBody>
+                    <a:bodyPr/>
+                    <a:lstStyle/>
+                    <a:p>
+                      <a:r>
+                        <a:rPr lang="en-IN" dirty="0"/>
+                        <a:t>0.001, 0.0005</a:t>
+                      </a:r>
+                      <a:endParaRPr lang="en-GB" dirty="0"/>
+                    </a:p>
+                  </a:txBody>
+                  <a:tcPr/>
+                </a:tc>
+                <a:extLst>
+                  <a:ext uri="{0D108BD9-81ED-4DB2-BD59-A6C34878D82A}">
+                    <a16:rowId xmlns:a16="http://schemas.microsoft.com/office/drawing/2014/main" val="850416615"/>
+                  </a:ext>
+                </a:extLst>
+              </a:tr>
+              <a:tr h="370840">
+                <a:tc>
+                  <a:txBody>
+                    <a:bodyPr/>
+                    <a:lstStyle/>
+                    <a:p>
+                      <a:r>
+                        <a:rPr lang="en-IN" dirty="0"/>
+                        <a:t>Batch Size </a:t>
+                      </a:r>
+                      <a:endParaRPr lang="en-GB" dirty="0"/>
+                    </a:p>
+                  </a:txBody>
+                  <a:tcPr/>
+                </a:tc>
+                <a:tc>
+                  <a:txBody>
+                    <a:bodyPr/>
+                    <a:lstStyle/>
+                    <a:p>
+                      <a:pPr marL="0" marR="0" lvl="0" indent="0" algn="l" defTabSz="457200" rtl="0" eaLnBrk="1" fontAlgn="auto" latinLnBrk="0" hangingPunct="1">
+                        <a:lnSpc>
+                          <a:spcPct val="100000"/>
+                        </a:lnSpc>
+                        <a:spcBef>
+                          <a:spcPts val="0"/>
+                        </a:spcBef>
+                        <a:spcAft>
+                          <a:spcPts val="0"/>
+                        </a:spcAft>
+                        <a:buClrTx/>
+                        <a:buSzTx/>
+                        <a:buFontTx/>
+                        <a:buNone/>
+                        <a:tabLst/>
+                        <a:defRPr/>
+                      </a:pPr>
+                      <a:r>
+                        <a:rPr lang="en-GB" sz="1800" b="0" kern="1200" dirty="0">
+                          <a:solidFill>
+                            <a:schemeClr val="dk1"/>
+                          </a:solidFill>
+                          <a:effectLst/>
+                          <a:latin typeface="+mn-lt"/>
+                          <a:ea typeface="+mn-ea"/>
+                          <a:cs typeface="+mn-cs"/>
+                        </a:rPr>
+                        <a:t>16, 32</a:t>
+                      </a:r>
+                    </a:p>
+                  </a:txBody>
+                  <a:tcPr/>
+                </a:tc>
+                <a:extLst>
+                  <a:ext uri="{0D108BD9-81ED-4DB2-BD59-A6C34878D82A}">
+                    <a16:rowId xmlns:a16="http://schemas.microsoft.com/office/drawing/2014/main" val="3765307749"/>
+                  </a:ext>
+                </a:extLst>
+              </a:tr>
+              <a:tr h="370840">
+                <a:tc>
+                  <a:txBody>
+                    <a:bodyPr/>
+                    <a:lstStyle/>
+                    <a:p>
+                      <a:r>
+                        <a:rPr lang="en-GB" sz="1800" b="0" i="0" kern="1200" dirty="0">
+                          <a:solidFill>
+                            <a:schemeClr val="dk1"/>
+                          </a:solidFill>
+                          <a:effectLst/>
+                          <a:latin typeface="+mn-lt"/>
+                          <a:ea typeface="+mn-ea"/>
+                          <a:cs typeface="+mn-cs"/>
+                        </a:rPr>
+                        <a:t>Optimizer</a:t>
+                      </a:r>
+                      <a:endParaRPr lang="en-GB" dirty="0"/>
+                    </a:p>
+                  </a:txBody>
+                  <a:tcPr/>
+                </a:tc>
+                <a:tc>
+                  <a:txBody>
+                    <a:bodyPr/>
+                    <a:lstStyle/>
+                    <a:p>
+                      <a:r>
+                        <a:rPr lang="en-IN" dirty="0"/>
+                        <a:t>Adam</a:t>
+                      </a:r>
+                      <a:endParaRPr lang="en-GB" dirty="0"/>
+                    </a:p>
+                  </a:txBody>
+                  <a:tcPr/>
+                </a:tc>
+                <a:extLst>
+                  <a:ext uri="{0D108BD9-81ED-4DB2-BD59-A6C34878D82A}">
+                    <a16:rowId xmlns:a16="http://schemas.microsoft.com/office/drawing/2014/main" val="53225989"/>
+                  </a:ext>
+                </a:extLst>
+              </a:tr>
+              <a:tr h="370840">
+                <a:tc>
+                  <a:txBody>
+                    <a:bodyPr/>
+                    <a:lstStyle/>
+                    <a:p>
+                      <a:pPr fontAlgn="base" latinLnBrk="0">
+                        <a:buNone/>
+                      </a:pPr>
+                      <a:r>
+                        <a:rPr lang="en-GB" dirty="0">
+                          <a:effectLst/>
+                        </a:rPr>
+                        <a:t>Weight Decay</a:t>
+                      </a:r>
+                    </a:p>
+                  </a:txBody>
+                  <a:tcPr marL="76200" marR="76200" anchor="ctr"/>
+                </a:tc>
+                <a:tc>
+                  <a:txBody>
+                    <a:bodyPr/>
+                    <a:lstStyle/>
+                    <a:p>
+                      <a:pPr fontAlgn="base" latinLnBrk="0">
+                        <a:buNone/>
+                      </a:pPr>
+                      <a:r>
+                        <a:rPr lang="en-GB" sz="1800" b="0" i="0" kern="1200" dirty="0">
+                          <a:solidFill>
+                            <a:schemeClr val="dk1"/>
+                          </a:solidFill>
+                          <a:effectLst/>
+                          <a:latin typeface="+mn-lt"/>
+                          <a:ea typeface="+mn-ea"/>
+                          <a:cs typeface="+mn-cs"/>
+                        </a:rPr>
+                        <a:t>1e-4</a:t>
+                      </a:r>
+                      <a:endParaRPr lang="en-GB" dirty="0">
+                        <a:effectLst/>
+                      </a:endParaRPr>
+                    </a:p>
+                  </a:txBody>
+                  <a:tcPr marL="76200" marR="76200" anchor="ctr"/>
+                </a:tc>
+                <a:extLst>
+                  <a:ext uri="{0D108BD9-81ED-4DB2-BD59-A6C34878D82A}">
+                    <a16:rowId xmlns:a16="http://schemas.microsoft.com/office/drawing/2014/main" val="2372432037"/>
+                  </a:ext>
+                </a:extLst>
+              </a:tr>
+              <a:tr h="370840">
+                <a:tc>
+                  <a:txBody>
+                    <a:bodyPr/>
+                    <a:lstStyle/>
+                    <a:p>
+                      <a:r>
+                        <a:rPr lang="en-IN" dirty="0"/>
+                        <a:t>Epochs</a:t>
+                      </a:r>
+                      <a:endParaRPr lang="en-GB" dirty="0"/>
+                    </a:p>
+                  </a:txBody>
+                  <a:tcPr/>
+                </a:tc>
+                <a:tc>
+                  <a:txBody>
+                    <a:bodyPr/>
+                    <a:lstStyle/>
+                    <a:p>
+                      <a:r>
+                        <a:rPr lang="en-IN" dirty="0"/>
+                        <a:t>100</a:t>
+                      </a:r>
+                      <a:endParaRPr lang="en-GB" dirty="0"/>
+                    </a:p>
+                  </a:txBody>
+                  <a:tcPr/>
+                </a:tc>
+                <a:extLst>
+                  <a:ext uri="{0D108BD9-81ED-4DB2-BD59-A6C34878D82A}">
+                    <a16:rowId xmlns:a16="http://schemas.microsoft.com/office/drawing/2014/main" val="1293429995"/>
+                  </a:ext>
+                </a:extLst>
+              </a:tr>
+            </a:tbl>
+          </a:graphicData>
+        </a:graphic>
+      </p:graphicFrame>
+    </p:spTree>
+    <p:extLst>
+      <p:ext uri="{BB962C8B-B14F-4D97-AF65-F5344CB8AC3E}">
+        <p14:creationId xmlns:p14="http://schemas.microsoft.com/office/powerpoint/2010/main" val="3152229251"/>
       </p:ext>
     </p:extLst>
   </p:cSld>
